--- a/exports/pptx/lessons/middle-module-08-yoga/day-06-pranayama.pptx
+++ b/exports/pptx/lessons/middle-module-08-yoga/day-06-pranayama.pptx
@@ -19,9 +19,14 @@
     <p:sldId id="267" r:id="rId13"/>
     <p:sldId id="268" r:id="rId14"/>
     <p:sldId id="269" r:id="rId15"/>
+    <p:sldId id="270" r:id="rId16"/>
+    <p:sldId id="271" r:id="rId17"/>
+    <p:sldId id="272" r:id="rId18"/>
+    <p:sldId id="273" r:id="rId19"/>
+    <p:sldId id="274" r:id="rId20"/>
   </p:sldIdLst>
   <p:notesMasterIdLst>
-    <p:notesMasterId r:id="rId16"/>
+    <p:notesMasterId r:id="rId21"/>
   </p:notesMasterIdLst>
   <p:sldSz cx="9144000" cy="5143500"/>
   <p:notesSz cx="5143500" cy="9144000"/>
@@ -979,6 +984,446 @@
             <a:fld id="{F7021451-1387-4CA6-816F-3879F97B5CBC}" type="slidenum">
               <a:rPr lang="en-US"/>
               <a:t>14</a:t>
+            </a:fld>
+            <a:endParaRPr lang="en-US"/>
+          </a:p>
+        </p:txBody>
+      </p:sp>
+    </p:spTree>
+    <p:extLst>
+      <p:ext uri="{BB962C8B-B14F-4D97-AF65-F5344CB8AC3E}">
+        <p14:creationId xmlns:p14="http://schemas.microsoft.com/office/powerpoint/2010/main" val="1024086991"/>
+      </p:ext>
+    </p:extLst>
+  </p:cSld>
+  <p:clrMapOvr>
+    <a:masterClrMapping/>
+  </p:clrMapOvr>
+</p:notes>
+</file>
+
+<file path=ppt/notesSlides/notesSlide15.xml><?xml version="1.0" encoding="utf-8"?>
+<p:notes xmlns:a="http://schemas.openxmlformats.org/drawingml/2006/main" xmlns:r="http://schemas.openxmlformats.org/officeDocument/2006/relationships" xmlns:p="http://schemas.openxmlformats.org/presentationml/2006/main">
+  <p:cSld>
+    <p:spTree>
+      <p:nvGrpSpPr>
+        <p:cNvPr id="1" name=""/>
+        <p:cNvGrpSpPr/>
+        <p:nvPr/>
+      </p:nvGrpSpPr>
+      <p:grpSpPr>
+        <a:xfrm>
+          <a:off x="0" y="0"/>
+          <a:ext cx="0" cy="0"/>
+          <a:chOff x="0" y="0"/>
+          <a:chExt cx="0" cy="0"/>
+        </a:xfrm>
+      </p:grpSpPr>
+      <p:sp>
+        <p:nvSpPr>
+          <p:cNvPr id="2" name="Slide Image Placeholder 1"/>
+          <p:cNvSpPr>
+            <a:spLocks noGrp="1" noRot="1" noChangeAspect="1"/>
+          </p:cNvSpPr>
+          <p:nvPr>
+            <p:ph type="sldImg"/>
+          </p:nvPr>
+        </p:nvSpPr>
+        <p:spPr/>
+      </p:sp>
+      <p:sp>
+        <p:nvSpPr>
+          <p:cNvPr id="3" name="Notes Placeholder 2"/>
+          <p:cNvSpPr>
+            <a:spLocks noGrp="1"/>
+          </p:cNvSpPr>
+          <p:nvPr>
+            <p:ph type="body" idx="1"/>
+          </p:nvPr>
+        </p:nvSpPr>
+        <p:spPr/>
+        <p:txBody>
+          <a:bodyPr/>
+          <a:lstStyle/>
+          <a:p>
+            <a:r>
+              <a:rPr lang="en-US" dirty="0"/>
+              <a:t/>
+            </a:r>
+            <a:endParaRPr lang="en-US" dirty="0"/>
+          </a:p>
+        </p:txBody>
+      </p:sp>
+      <p:sp>
+        <p:nvSpPr>
+          <p:cNvPr id="4" name="Slide Number Placeholder 3"/>
+          <p:cNvSpPr>
+            <a:spLocks noGrp="1"/>
+          </p:cNvSpPr>
+          <p:nvPr>
+            <p:ph type="sldNum" sz="quarter" idx="10"/>
+          </p:nvPr>
+        </p:nvSpPr>
+        <p:spPr/>
+        <p:txBody>
+          <a:bodyPr/>
+          <a:lstStyle/>
+          <a:p>
+            <a:fld id="{F7021451-1387-4CA6-816F-3879F97B5CBC}" type="slidenum">
+              <a:rPr lang="en-US"/>
+              <a:t>15</a:t>
+            </a:fld>
+            <a:endParaRPr lang="en-US"/>
+          </a:p>
+        </p:txBody>
+      </p:sp>
+    </p:spTree>
+    <p:extLst>
+      <p:ext uri="{BB962C8B-B14F-4D97-AF65-F5344CB8AC3E}">
+        <p14:creationId xmlns:p14="http://schemas.microsoft.com/office/powerpoint/2010/main" val="1024086991"/>
+      </p:ext>
+    </p:extLst>
+  </p:cSld>
+  <p:clrMapOvr>
+    <a:masterClrMapping/>
+  </p:clrMapOvr>
+</p:notes>
+</file>
+
+<file path=ppt/notesSlides/notesSlide16.xml><?xml version="1.0" encoding="utf-8"?>
+<p:notes xmlns:a="http://schemas.openxmlformats.org/drawingml/2006/main" xmlns:r="http://schemas.openxmlformats.org/officeDocument/2006/relationships" xmlns:p="http://schemas.openxmlformats.org/presentationml/2006/main">
+  <p:cSld>
+    <p:spTree>
+      <p:nvGrpSpPr>
+        <p:cNvPr id="1" name=""/>
+        <p:cNvGrpSpPr/>
+        <p:nvPr/>
+      </p:nvGrpSpPr>
+      <p:grpSpPr>
+        <a:xfrm>
+          <a:off x="0" y="0"/>
+          <a:ext cx="0" cy="0"/>
+          <a:chOff x="0" y="0"/>
+          <a:chExt cx="0" cy="0"/>
+        </a:xfrm>
+      </p:grpSpPr>
+      <p:sp>
+        <p:nvSpPr>
+          <p:cNvPr id="2" name="Slide Image Placeholder 1"/>
+          <p:cNvSpPr>
+            <a:spLocks noGrp="1" noRot="1" noChangeAspect="1"/>
+          </p:cNvSpPr>
+          <p:nvPr>
+            <p:ph type="sldImg"/>
+          </p:nvPr>
+        </p:nvSpPr>
+        <p:spPr/>
+      </p:sp>
+      <p:sp>
+        <p:nvSpPr>
+          <p:cNvPr id="3" name="Notes Placeholder 2"/>
+          <p:cNvSpPr>
+            <a:spLocks noGrp="1"/>
+          </p:cNvSpPr>
+          <p:nvPr>
+            <p:ph type="body" idx="1"/>
+          </p:nvPr>
+        </p:nvSpPr>
+        <p:spPr/>
+        <p:txBody>
+          <a:bodyPr/>
+          <a:lstStyle/>
+          <a:p>
+            <a:r>
+              <a:rPr lang="en-US" dirty="0"/>
+              <a:t/>
+            </a:r>
+            <a:endParaRPr lang="en-US" dirty="0"/>
+          </a:p>
+        </p:txBody>
+      </p:sp>
+      <p:sp>
+        <p:nvSpPr>
+          <p:cNvPr id="4" name="Slide Number Placeholder 3"/>
+          <p:cNvSpPr>
+            <a:spLocks noGrp="1"/>
+          </p:cNvSpPr>
+          <p:nvPr>
+            <p:ph type="sldNum" sz="quarter" idx="10"/>
+          </p:nvPr>
+        </p:nvSpPr>
+        <p:spPr/>
+        <p:txBody>
+          <a:bodyPr/>
+          <a:lstStyle/>
+          <a:p>
+            <a:fld id="{F7021451-1387-4CA6-816F-3879F97B5CBC}" type="slidenum">
+              <a:rPr lang="en-US"/>
+              <a:t>16</a:t>
+            </a:fld>
+            <a:endParaRPr lang="en-US"/>
+          </a:p>
+        </p:txBody>
+      </p:sp>
+    </p:spTree>
+    <p:extLst>
+      <p:ext uri="{BB962C8B-B14F-4D97-AF65-F5344CB8AC3E}">
+        <p14:creationId xmlns:p14="http://schemas.microsoft.com/office/powerpoint/2010/main" val="1024086991"/>
+      </p:ext>
+    </p:extLst>
+  </p:cSld>
+  <p:clrMapOvr>
+    <a:masterClrMapping/>
+  </p:clrMapOvr>
+</p:notes>
+</file>
+
+<file path=ppt/notesSlides/notesSlide17.xml><?xml version="1.0" encoding="utf-8"?>
+<p:notes xmlns:a="http://schemas.openxmlformats.org/drawingml/2006/main" xmlns:r="http://schemas.openxmlformats.org/officeDocument/2006/relationships" xmlns:p="http://schemas.openxmlformats.org/presentationml/2006/main">
+  <p:cSld>
+    <p:spTree>
+      <p:nvGrpSpPr>
+        <p:cNvPr id="1" name=""/>
+        <p:cNvGrpSpPr/>
+        <p:nvPr/>
+      </p:nvGrpSpPr>
+      <p:grpSpPr>
+        <a:xfrm>
+          <a:off x="0" y="0"/>
+          <a:ext cx="0" cy="0"/>
+          <a:chOff x="0" y="0"/>
+          <a:chExt cx="0" cy="0"/>
+        </a:xfrm>
+      </p:grpSpPr>
+      <p:sp>
+        <p:nvSpPr>
+          <p:cNvPr id="2" name="Slide Image Placeholder 1"/>
+          <p:cNvSpPr>
+            <a:spLocks noGrp="1" noRot="1" noChangeAspect="1"/>
+          </p:cNvSpPr>
+          <p:nvPr>
+            <p:ph type="sldImg"/>
+          </p:nvPr>
+        </p:nvSpPr>
+        <p:spPr/>
+      </p:sp>
+      <p:sp>
+        <p:nvSpPr>
+          <p:cNvPr id="3" name="Notes Placeholder 2"/>
+          <p:cNvSpPr>
+            <a:spLocks noGrp="1"/>
+          </p:cNvSpPr>
+          <p:nvPr>
+            <p:ph type="body" idx="1"/>
+          </p:nvPr>
+        </p:nvSpPr>
+        <p:spPr/>
+        <p:txBody>
+          <a:bodyPr/>
+          <a:lstStyle/>
+          <a:p>
+            <a:r>
+              <a:rPr lang="en-US" dirty="0"/>
+              <a:t/>
+            </a:r>
+            <a:endParaRPr lang="en-US" dirty="0"/>
+          </a:p>
+        </p:txBody>
+      </p:sp>
+      <p:sp>
+        <p:nvSpPr>
+          <p:cNvPr id="4" name="Slide Number Placeholder 3"/>
+          <p:cNvSpPr>
+            <a:spLocks noGrp="1"/>
+          </p:cNvSpPr>
+          <p:nvPr>
+            <p:ph type="sldNum" sz="quarter" idx="10"/>
+          </p:nvPr>
+        </p:nvSpPr>
+        <p:spPr/>
+        <p:txBody>
+          <a:bodyPr/>
+          <a:lstStyle/>
+          <a:p>
+            <a:fld id="{F7021451-1387-4CA6-816F-3879F97B5CBC}" type="slidenum">
+              <a:rPr lang="en-US"/>
+              <a:t>17</a:t>
+            </a:fld>
+            <a:endParaRPr lang="en-US"/>
+          </a:p>
+        </p:txBody>
+      </p:sp>
+    </p:spTree>
+    <p:extLst>
+      <p:ext uri="{BB962C8B-B14F-4D97-AF65-F5344CB8AC3E}">
+        <p14:creationId xmlns:p14="http://schemas.microsoft.com/office/powerpoint/2010/main" val="1024086991"/>
+      </p:ext>
+    </p:extLst>
+  </p:cSld>
+  <p:clrMapOvr>
+    <a:masterClrMapping/>
+  </p:clrMapOvr>
+</p:notes>
+</file>
+
+<file path=ppt/notesSlides/notesSlide18.xml><?xml version="1.0" encoding="utf-8"?>
+<p:notes xmlns:a="http://schemas.openxmlformats.org/drawingml/2006/main" xmlns:r="http://schemas.openxmlformats.org/officeDocument/2006/relationships" xmlns:p="http://schemas.openxmlformats.org/presentationml/2006/main">
+  <p:cSld>
+    <p:spTree>
+      <p:nvGrpSpPr>
+        <p:cNvPr id="1" name=""/>
+        <p:cNvGrpSpPr/>
+        <p:nvPr/>
+      </p:nvGrpSpPr>
+      <p:grpSpPr>
+        <a:xfrm>
+          <a:off x="0" y="0"/>
+          <a:ext cx="0" cy="0"/>
+          <a:chOff x="0" y="0"/>
+          <a:chExt cx="0" cy="0"/>
+        </a:xfrm>
+      </p:grpSpPr>
+      <p:sp>
+        <p:nvSpPr>
+          <p:cNvPr id="2" name="Slide Image Placeholder 1"/>
+          <p:cNvSpPr>
+            <a:spLocks noGrp="1" noRot="1" noChangeAspect="1"/>
+          </p:cNvSpPr>
+          <p:nvPr>
+            <p:ph type="sldImg"/>
+          </p:nvPr>
+        </p:nvSpPr>
+        <p:spPr/>
+      </p:sp>
+      <p:sp>
+        <p:nvSpPr>
+          <p:cNvPr id="3" name="Notes Placeholder 2"/>
+          <p:cNvSpPr>
+            <a:spLocks noGrp="1"/>
+          </p:cNvSpPr>
+          <p:nvPr>
+            <p:ph type="body" idx="1"/>
+          </p:nvPr>
+        </p:nvSpPr>
+        <p:spPr/>
+        <p:txBody>
+          <a:bodyPr/>
+          <a:lstStyle/>
+          <a:p>
+            <a:r>
+              <a:rPr lang="en-US" dirty="0"/>
+              <a:t/>
+            </a:r>
+            <a:endParaRPr lang="en-US" dirty="0"/>
+          </a:p>
+        </p:txBody>
+      </p:sp>
+      <p:sp>
+        <p:nvSpPr>
+          <p:cNvPr id="4" name="Slide Number Placeholder 3"/>
+          <p:cNvSpPr>
+            <a:spLocks noGrp="1"/>
+          </p:cNvSpPr>
+          <p:nvPr>
+            <p:ph type="sldNum" sz="quarter" idx="10"/>
+          </p:nvPr>
+        </p:nvSpPr>
+        <p:spPr/>
+        <p:txBody>
+          <a:bodyPr/>
+          <a:lstStyle/>
+          <a:p>
+            <a:fld id="{F7021451-1387-4CA6-816F-3879F97B5CBC}" type="slidenum">
+              <a:rPr lang="en-US"/>
+              <a:t>18</a:t>
+            </a:fld>
+            <a:endParaRPr lang="en-US"/>
+          </a:p>
+        </p:txBody>
+      </p:sp>
+    </p:spTree>
+    <p:extLst>
+      <p:ext uri="{BB962C8B-B14F-4D97-AF65-F5344CB8AC3E}">
+        <p14:creationId xmlns:p14="http://schemas.microsoft.com/office/powerpoint/2010/main" val="1024086991"/>
+      </p:ext>
+    </p:extLst>
+  </p:cSld>
+  <p:clrMapOvr>
+    <a:masterClrMapping/>
+  </p:clrMapOvr>
+</p:notes>
+</file>
+
+<file path=ppt/notesSlides/notesSlide19.xml><?xml version="1.0" encoding="utf-8"?>
+<p:notes xmlns:a="http://schemas.openxmlformats.org/drawingml/2006/main" xmlns:r="http://schemas.openxmlformats.org/officeDocument/2006/relationships" xmlns:p="http://schemas.openxmlformats.org/presentationml/2006/main">
+  <p:cSld>
+    <p:spTree>
+      <p:nvGrpSpPr>
+        <p:cNvPr id="1" name=""/>
+        <p:cNvGrpSpPr/>
+        <p:nvPr/>
+      </p:nvGrpSpPr>
+      <p:grpSpPr>
+        <a:xfrm>
+          <a:off x="0" y="0"/>
+          <a:ext cx="0" cy="0"/>
+          <a:chOff x="0" y="0"/>
+          <a:chExt cx="0" cy="0"/>
+        </a:xfrm>
+      </p:grpSpPr>
+      <p:sp>
+        <p:nvSpPr>
+          <p:cNvPr id="2" name="Slide Image Placeholder 1"/>
+          <p:cNvSpPr>
+            <a:spLocks noGrp="1" noRot="1" noChangeAspect="1"/>
+          </p:cNvSpPr>
+          <p:nvPr>
+            <p:ph type="sldImg"/>
+          </p:nvPr>
+        </p:nvSpPr>
+        <p:spPr/>
+      </p:sp>
+      <p:sp>
+        <p:nvSpPr>
+          <p:cNvPr id="3" name="Notes Placeholder 2"/>
+          <p:cNvSpPr>
+            <a:spLocks noGrp="1"/>
+          </p:cNvSpPr>
+          <p:nvPr>
+            <p:ph type="body" idx="1"/>
+          </p:nvPr>
+        </p:nvSpPr>
+        <p:spPr/>
+        <p:txBody>
+          <a:bodyPr/>
+          <a:lstStyle/>
+          <a:p>
+            <a:r>
+              <a:rPr lang="en-US" dirty="0"/>
+              <a:t/>
+            </a:r>
+            <a:endParaRPr lang="en-US" dirty="0"/>
+          </a:p>
+        </p:txBody>
+      </p:sp>
+      <p:sp>
+        <p:nvSpPr>
+          <p:cNvPr id="4" name="Slide Number Placeholder 3"/>
+          <p:cNvSpPr>
+            <a:spLocks noGrp="1"/>
+          </p:cNvSpPr>
+          <p:nvPr>
+            <p:ph type="sldNum" sz="quarter" idx="10"/>
+          </p:nvPr>
+        </p:nvSpPr>
+        <p:spPr/>
+        <p:txBody>
+          <a:bodyPr/>
+          <a:lstStyle/>
+          <a:p>
+            <a:fld id="{F7021451-1387-4CA6-816F-3879F97B5CBC}" type="slidenum">
+              <a:rPr lang="en-US"/>
+              <a:t>19</a:t>
             </a:fld>
             <a:endParaRPr lang="en-US"/>
           </a:p>
@@ -2278,102 +2723,6 @@
         </p:nvSpPr>
         <p:spPr>
           <a:xfrm>
-            <a:off x="406301" y="1223963"/>
-            <a:ext cx="8498026" cy="274290"/>
-          </a:xfrm>
-          <a:prstGeom prst="rect">
-            <a:avLst/>
-          </a:prstGeom>
-          <a:noFill/>
-          <a:ln/>
-        </p:spPr>
-        <p:txBody>
-          <a:bodyPr wrap="square" lIns="0" tIns="0" rIns="0" bIns="0" rtlCol="0" anchor="t"/>
-          <a:lstStyle/>
-          <a:p>
-            <a:pPr algn="l" indent="0" marL="0">
-              <a:lnSpc>
-                <a:spcPts val="2160"/>
-              </a:lnSpc>
-              <a:spcBef>
-                <a:spcPts val="600"/>
-              </a:spcBef>
-              <a:spcAft>
-                <a:spcPts val="800"/>
-              </a:spcAft>
-              <a:buNone/>
-            </a:pPr>
-            <a:r>
-              <a:rPr lang="en-US" sz="1800" b="1" dirty="0">
-                <a:solidFill>
-                  <a:srgbClr val="FE4447"/>
-                </a:solidFill>
-                <a:latin typeface="Georgia" pitchFamily="34" charset="0"/>
-                <a:ea typeface="Georgia" pitchFamily="34" charset="-122"/>
-                <a:cs typeface="Georgia" pitchFamily="34" charset="-120"/>
-              </a:rPr>
-              <a:t>Learning objective</a:t>
-            </a:r>
-            <a:endParaRPr lang="en-US" sz="1800" dirty="0"/>
-          </a:p>
-        </p:txBody>
-      </p:sp>
-      <p:sp>
-        <p:nvSpPr>
-          <p:cNvPr id="6" name="Text 4"/>
-          <p:cNvSpPr/>
-          <p:nvPr/>
-        </p:nvSpPr>
-        <p:spPr>
-          <a:xfrm>
-            <a:off x="406301" y="1637854"/>
-            <a:ext cx="8498026" cy="426541"/>
-          </a:xfrm>
-          <a:prstGeom prst="rect">
-            <a:avLst/>
-          </a:prstGeom>
-          <a:noFill/>
-          <a:ln/>
-        </p:spPr>
-        <p:txBody>
-          <a:bodyPr wrap="square" lIns="0" tIns="0" rIns="0" bIns="0" rtlCol="0" anchor="t"/>
-          <a:lstStyle/>
-          <a:p>
-            <a:pPr algn="l" indent="0" marL="0">
-              <a:lnSpc>
-                <a:spcPts val="1680"/>
-              </a:lnSpc>
-              <a:spcBef>
-                <a:spcPts val="300"/>
-              </a:spcBef>
-              <a:spcAft>
-                <a:spcPts val="300"/>
-              </a:spcAft>
-              <a:buNone/>
-            </a:pPr>
-            <a:r>
-              <a:rPr lang="en-US" sz="1200" dirty="0">
-                <a:solidFill>
-                  <a:srgbClr val="1C2833"/>
-                </a:solidFill>
-                <a:latin typeface="Arial" pitchFamily="34" charset="0"/>
-                <a:ea typeface="Arial" pitchFamily="34" charset="-122"/>
-                <a:cs typeface="Arial" pitchFamily="34" charset="-120"/>
-              </a:rPr>
-              <a:t>By the end of this lesson, students will complete a 5-minute natural-breath observation and a 5-minute counted-breath (4-in, 4-out) practice, and describe one observable effect of slow breathing.</a:t>
-            </a:r>
-            <a:endParaRPr lang="en-US" sz="1200" dirty="0"/>
-          </a:p>
-        </p:txBody>
-      </p:sp>
-      <p:sp>
-        <p:nvSpPr>
-          <p:cNvPr id="7" name="Text 5"/>
-          <p:cNvSpPr/>
-          <p:nvPr/>
-        </p:nvSpPr>
-        <p:spPr>
-          <a:xfrm>
             <a:off x="406301" y="4434929"/>
             <a:ext cx="8498026" cy="213271"/>
           </a:xfrm>
@@ -2518,7 +2867,7 @@
                 <a:ea typeface="Georgia" pitchFamily="34" charset="-122"/>
                 <a:cs typeface="Georgia" pitchFamily="34" charset="-120"/>
               </a:rPr>
-              <a:t>Student-facing content</a:t>
+              <a:t>Core (10 min) — What is prāṇāyāma? (cont.)</a:t>
             </a:r>
             <a:endParaRPr lang="en-US" sz="1800" dirty="0"/>
           </a:p>
@@ -2533,7 +2882,7 @@
         <p:spPr>
           <a:xfrm>
             <a:off x="406301" y="883593"/>
-            <a:ext cx="8331398" cy="2419350"/>
+            <a:ext cx="8331398" cy="1073944"/>
           </a:xfrm>
           <a:prstGeom prst="rect">
             <a:avLst/>
@@ -2563,7 +2912,7 @@
         <p:spPr>
           <a:xfrm>
             <a:off x="434876" y="883593"/>
-            <a:ext cx="0" cy="2419350"/>
+            <a:ext cx="0" cy="1073944"/>
           </a:xfrm>
           <a:prstGeom prst="line">
             <a:avLst/>
@@ -2586,7 +2935,7 @@
         <p:spPr>
           <a:xfrm>
             <a:off x="692051" y="1074093"/>
-            <a:ext cx="7973389" cy="230981"/>
+            <a:ext cx="7973389" cy="692944"/>
           </a:xfrm>
           <a:prstGeom prst="rect">
             <a:avLst/>
@@ -2611,7 +2960,7 @@
               <a:buNone/>
             </a:pPr>
             <a:r>
-              <a:rPr lang="en-US" sz="1300" b="1" i="1" dirty="0">
+              <a:rPr lang="en-US" sz="1300" dirty="0">
                 <a:solidFill>
                   <a:srgbClr val="1C2833"/>
                 </a:solidFill>
@@ -2619,33 +2968,8 @@
                 <a:ea typeface="Georgia" pitchFamily="34" charset="-122"/>
                 <a:cs typeface="Georgia" pitchFamily="34" charset="-120"/>
               </a:rPr>
-              <a:t>Prāṇāyāma — the 4th limb</a:t>
-            </a:r>
-            <a:endParaRPr lang="en-US" sz="1300" dirty="0"/>
-          </a:p>
-        </p:txBody>
-      </p:sp>
-      <p:sp>
-        <p:nvSpPr>
-          <p:cNvPr id="7" name="Text 5"/>
-          <p:cNvSpPr/>
-          <p:nvPr/>
-        </p:nvSpPr>
-        <p:spPr>
-          <a:xfrm>
-            <a:off x="692051" y="1343174"/>
-            <a:ext cx="7973389" cy="230981"/>
-          </a:xfrm>
-          <a:prstGeom prst="rect">
-            <a:avLst/>
-          </a:prstGeom>
-          <a:noFill/>
-          <a:ln/>
-        </p:spPr>
-        <p:txBody>
-          <a:bodyPr wrap="square" lIns="0" tIns="0" rIns="0" bIns="0" rtlCol="0" anchor="t"/>
-          <a:lstStyle/>
-          <a:p>
+              <a:t>"</a:t>
+            </a:r>
             <a:pPr algn="l" indent="0" marL="0">
               <a:lnSpc>
                 <a:spcPts val="1820"/>
@@ -2667,7 +2991,7 @@
                 <a:ea typeface="Georgia" pitchFamily="34" charset="-122"/>
                 <a:cs typeface="Georgia" pitchFamily="34" charset="-120"/>
               </a:rPr>
-              <a:t>prāṇa</a:t>
+              <a:t>prāṇāyāmena tṛ-vṛtā prāṇendṛya-mano-malam śanair vyudasyābhidhyāyen manasā guruṇā gurum</a:t>
             </a:r>
             <a:pPr algn="l" indent="0" marL="0">
               <a:lnSpc>
@@ -2690,11 +3014,36 @@
                 <a:ea typeface="Georgia" pitchFamily="34" charset="-122"/>
                 <a:cs typeface="Georgia" pitchFamily="34" charset="-120"/>
               </a:rPr>
-              <a:t> = breath, vital energy. </a:t>
-            </a:r>
-            <a:pPr algn="l" indent="0" marL="0">
-              <a:lnSpc>
-                <a:spcPts val="1820"/>
+              <a:t>" "Through the threefold prāṇāyāma practice, one gradually purifies the breath, senses, and mind, and then meditates." — Śrīmad-Bhāgavatam 4.8.44</a:t>
+            </a:r>
+            <a:endParaRPr lang="en-US" sz="1300" dirty="0"/>
+          </a:p>
+        </p:txBody>
+      </p:sp>
+      <p:sp>
+        <p:nvSpPr>
+          <p:cNvPr id="7" name="Text 5"/>
+          <p:cNvSpPr/>
+          <p:nvPr/>
+        </p:nvSpPr>
+        <p:spPr>
+          <a:xfrm>
+            <a:off x="406301" y="2046387"/>
+            <a:ext cx="8498026" cy="213271"/>
+          </a:xfrm>
+          <a:prstGeom prst="rect">
+            <a:avLst/>
+          </a:prstGeom>
+          <a:noFill/>
+          <a:ln/>
+        </p:spPr>
+        <p:txBody>
+          <a:bodyPr wrap="square" lIns="0" tIns="0" rIns="0" bIns="0" rtlCol="0" anchor="t"/>
+          <a:lstStyle/>
+          <a:p>
+            <a:pPr algn="l" indent="0" marL="0">
+              <a:lnSpc>
+                <a:spcPts val="1680"/>
               </a:lnSpc>
               <a:spcBef>
                 <a:spcPts val="300"/>
@@ -2705,19 +3054,19 @@
               <a:buNone/>
             </a:pPr>
             <a:r>
-              <a:rPr lang="en-US" sz="1300" i="1" dirty="0">
-                <a:solidFill>
-                  <a:srgbClr val="1C2833"/>
-                </a:solidFill>
-                <a:latin typeface="Georgia" pitchFamily="34" charset="0"/>
-                <a:ea typeface="Georgia" pitchFamily="34" charset="-122"/>
-                <a:cs typeface="Georgia" pitchFamily="34" charset="-120"/>
-              </a:rPr>
-              <a:t>āyāma</a:t>
-            </a:r>
-            <a:pPr algn="l" indent="0" marL="0">
-              <a:lnSpc>
-                <a:spcPts val="1820"/>
+              <a:rPr lang="en-US" sz="1200" i="1" dirty="0">
+                <a:solidFill>
+                  <a:srgbClr val="1C2833"/>
+                </a:solidFill>
+                <a:latin typeface="Arial" pitchFamily="34" charset="0"/>
+                <a:ea typeface="Arial" pitchFamily="34" charset="-122"/>
+                <a:cs typeface="Arial" pitchFamily="34" charset="-120"/>
+              </a:rPr>
+              <a:t>"Notice the word </a:t>
+            </a:r>
+            <a:pPr algn="l" indent="0" marL="0">
+              <a:lnSpc>
+                <a:spcPts val="1680"/>
               </a:lnSpc>
               <a:spcBef>
                 <a:spcPts val="300"/>
@@ -2728,422 +3077,46 @@
               <a:buNone/>
             </a:pPr>
             <a:r>
-              <a:rPr lang="en-US" sz="1300" dirty="0">
-                <a:solidFill>
-                  <a:srgbClr val="1C2833"/>
-                </a:solidFill>
-                <a:latin typeface="Georgia" pitchFamily="34" charset="0"/>
-                <a:ea typeface="Georgia" pitchFamily="34" charset="-122"/>
-                <a:cs typeface="Georgia" pitchFamily="34" charset="-120"/>
-              </a:rPr>
-              <a:t> = extension, regulation.</a:t>
-            </a:r>
-            <a:endParaRPr lang="en-US" sz="1300" dirty="0"/>
+              <a:rPr lang="en-US" sz="1200" b="1" i="1" dirty="0">
+                <a:solidFill>
+                  <a:srgbClr val="1C2833"/>
+                </a:solidFill>
+                <a:latin typeface="Arial" pitchFamily="34" charset="0"/>
+                <a:ea typeface="Arial" pitchFamily="34" charset="-122"/>
+                <a:cs typeface="Arial" pitchFamily="34" charset="-120"/>
+              </a:rPr>
+              <a:t>gradually</a:t>
+            </a:r>
+            <a:pPr algn="l" indent="0" marL="0">
+              <a:lnSpc>
+                <a:spcPts val="1680"/>
+              </a:lnSpc>
+              <a:spcBef>
+                <a:spcPts val="300"/>
+              </a:spcBef>
+              <a:spcAft>
+                <a:spcPts val="300"/>
+              </a:spcAft>
+              <a:buNone/>
+            </a:pPr>
+            <a:r>
+              <a:rPr lang="en-US" sz="1200" i="1" dirty="0">
+                <a:solidFill>
+                  <a:srgbClr val="1C2833"/>
+                </a:solidFill>
+                <a:latin typeface="Arial" pitchFamily="34" charset="0"/>
+                <a:ea typeface="Arial" pitchFamily="34" charset="-122"/>
+                <a:cs typeface="Arial" pitchFamily="34" charset="-120"/>
+              </a:rPr>
+              <a:t> (śanair). The tradition is unambiguous: this is slow work."</a:t>
+            </a:r>
+            <a:endParaRPr lang="en-US" sz="1200" dirty="0"/>
           </a:p>
         </p:txBody>
       </p:sp>
       <p:sp>
         <p:nvSpPr>
           <p:cNvPr id="8" name="Text 6"/>
-          <p:cNvSpPr/>
-          <p:nvPr/>
-        </p:nvSpPr>
-        <p:spPr>
-          <a:xfrm>
-            <a:off x="692051" y="1612255"/>
-            <a:ext cx="7973389" cy="230981"/>
-          </a:xfrm>
-          <a:prstGeom prst="rect">
-            <a:avLst/>
-          </a:prstGeom>
-          <a:noFill/>
-          <a:ln/>
-        </p:spPr>
-        <p:txBody>
-          <a:bodyPr wrap="square" lIns="0" tIns="0" rIns="0" bIns="0" rtlCol="0" anchor="t"/>
-          <a:lstStyle/>
-          <a:p>
-            <a:pPr algn="l" indent="0" marL="0">
-              <a:lnSpc>
-                <a:spcPts val="1820"/>
-              </a:lnSpc>
-              <a:spcBef>
-                <a:spcPts val="300"/>
-              </a:spcBef>
-              <a:spcAft>
-                <a:spcPts val="300"/>
-              </a:spcAft>
-              <a:buNone/>
-            </a:pPr>
-            <a:r>
-              <a:rPr lang="en-US" sz="1300" dirty="0">
-                <a:solidFill>
-                  <a:srgbClr val="1C2833"/>
-                </a:solidFill>
-                <a:latin typeface="Georgia" pitchFamily="34" charset="0"/>
-                <a:ea typeface="Georgia" pitchFamily="34" charset="-122"/>
-                <a:cs typeface="Georgia" pitchFamily="34" charset="-120"/>
-              </a:rPr>
-              <a:t>Today: </a:t>
-            </a:r>
-            <a:pPr algn="l" indent="0" marL="0">
-              <a:lnSpc>
-                <a:spcPts val="1820"/>
-              </a:lnSpc>
-              <a:spcBef>
-                <a:spcPts val="300"/>
-              </a:spcBef>
-              <a:spcAft>
-                <a:spcPts val="300"/>
-              </a:spcAft>
-              <a:buNone/>
-            </a:pPr>
-            <a:r>
-              <a:rPr lang="en-US" sz="1300" b="1" i="1" dirty="0">
-                <a:solidFill>
-                  <a:srgbClr val="1C2833"/>
-                </a:solidFill>
-                <a:latin typeface="Georgia" pitchFamily="34" charset="0"/>
-                <a:ea typeface="Georgia" pitchFamily="34" charset="-122"/>
-                <a:cs typeface="Georgia" pitchFamily="34" charset="-120"/>
-              </a:rPr>
-              <a:t>two practices</a:t>
-            </a:r>
-            <a:pPr algn="l" indent="0" marL="0">
-              <a:lnSpc>
-                <a:spcPts val="1820"/>
-              </a:lnSpc>
-              <a:spcBef>
-                <a:spcPts val="300"/>
-              </a:spcBef>
-              <a:spcAft>
-                <a:spcPts val="300"/>
-              </a:spcAft>
-              <a:buNone/>
-            </a:pPr>
-            <a:r>
-              <a:rPr lang="en-US" sz="1300" dirty="0">
-                <a:solidFill>
-                  <a:srgbClr val="1C2833"/>
-                </a:solidFill>
-                <a:latin typeface="Georgia" pitchFamily="34" charset="0"/>
-                <a:ea typeface="Georgia" pitchFamily="34" charset="-122"/>
-                <a:cs typeface="Georgia" pitchFamily="34" charset="-120"/>
-              </a:rPr>
-              <a:t>.</a:t>
-            </a:r>
-            <a:endParaRPr lang="en-US" sz="1300" dirty="0"/>
-          </a:p>
-        </p:txBody>
-      </p:sp>
-      <p:sp>
-        <p:nvSpPr>
-          <p:cNvPr id="9" name="Text 7"/>
-          <p:cNvSpPr/>
-          <p:nvPr/>
-        </p:nvSpPr>
-        <p:spPr>
-          <a:xfrm>
-            <a:off x="692051" y="1881336"/>
-            <a:ext cx="7973389" cy="461963"/>
-          </a:xfrm>
-          <a:prstGeom prst="rect">
-            <a:avLst/>
-          </a:prstGeom>
-          <a:noFill/>
-          <a:ln/>
-        </p:spPr>
-        <p:txBody>
-          <a:bodyPr wrap="square" lIns="0" tIns="0" rIns="0" bIns="0" rtlCol="0" anchor="t"/>
-          <a:lstStyle/>
-          <a:p>
-            <a:pPr algn="l" indent="0" marL="0">
-              <a:lnSpc>
-                <a:spcPts val="1820"/>
-              </a:lnSpc>
-              <a:spcBef>
-                <a:spcPts val="300"/>
-              </a:spcBef>
-              <a:spcAft>
-                <a:spcPts val="300"/>
-              </a:spcAft>
-              <a:buNone/>
-            </a:pPr>
-            <a:r>
-              <a:rPr lang="en-US" sz="1300" dirty="0">
-                <a:solidFill>
-                  <a:srgbClr val="1C2833"/>
-                </a:solidFill>
-                <a:latin typeface="Georgia" pitchFamily="34" charset="0"/>
-                <a:ea typeface="Georgia" pitchFamily="34" charset="-122"/>
-                <a:cs typeface="Georgia" pitchFamily="34" charset="-120"/>
-              </a:rPr>
-              <a:t>1. </a:t>
-            </a:r>
-            <a:pPr algn="l" indent="0" marL="0">
-              <a:lnSpc>
-                <a:spcPts val="1820"/>
-              </a:lnSpc>
-              <a:spcBef>
-                <a:spcPts val="300"/>
-              </a:spcBef>
-              <a:spcAft>
-                <a:spcPts val="300"/>
-              </a:spcAft>
-              <a:buNone/>
-            </a:pPr>
-            <a:r>
-              <a:rPr lang="en-US" sz="1300" b="1" i="1" dirty="0">
-                <a:solidFill>
-                  <a:srgbClr val="1C2833"/>
-                </a:solidFill>
-                <a:latin typeface="Georgia" pitchFamily="34" charset="0"/>
-                <a:ea typeface="Georgia" pitchFamily="34" charset="-122"/>
-                <a:cs typeface="Georgia" pitchFamily="34" charset="-120"/>
-              </a:rPr>
-              <a:t>Natural breath, 5 min.</a:t>
-            </a:r>
-            <a:pPr algn="l" indent="0" marL="0">
-              <a:lnSpc>
-                <a:spcPts val="1820"/>
-              </a:lnSpc>
-              <a:spcBef>
-                <a:spcPts val="300"/>
-              </a:spcBef>
-              <a:spcAft>
-                <a:spcPts val="300"/>
-              </a:spcAft>
-              <a:buNone/>
-            </a:pPr>
-            <a:r>
-              <a:rPr lang="en-US" sz="1300" dirty="0">
-                <a:solidFill>
-                  <a:srgbClr val="1C2833"/>
-                </a:solidFill>
-                <a:latin typeface="Georgia" pitchFamily="34" charset="0"/>
-                <a:ea typeface="Georgia" pitchFamily="34" charset="-122"/>
-                <a:cs typeface="Georgia" pitchFamily="34" charset="-120"/>
-              </a:rPr>
-              <a:t> Don't change anything. Just observe. 2. </a:t>
-            </a:r>
-            <a:pPr algn="l" indent="0" marL="0">
-              <a:lnSpc>
-                <a:spcPts val="1820"/>
-              </a:lnSpc>
-              <a:spcBef>
-                <a:spcPts val="300"/>
-              </a:spcBef>
-              <a:spcAft>
-                <a:spcPts val="300"/>
-              </a:spcAft>
-              <a:buNone/>
-            </a:pPr>
-            <a:r>
-              <a:rPr lang="en-US" sz="1300" b="1" i="1" dirty="0">
-                <a:solidFill>
-                  <a:srgbClr val="1C2833"/>
-                </a:solidFill>
-                <a:latin typeface="Georgia" pitchFamily="34" charset="0"/>
-                <a:ea typeface="Georgia" pitchFamily="34" charset="-122"/>
-                <a:cs typeface="Georgia" pitchFamily="34" charset="-120"/>
-              </a:rPr>
-              <a:t>Counted breath, 5 min.</a:t>
-            </a:r>
-            <a:pPr algn="l" indent="0" marL="0">
-              <a:lnSpc>
-                <a:spcPts val="1820"/>
-              </a:lnSpc>
-              <a:spcBef>
-                <a:spcPts val="300"/>
-              </a:spcBef>
-              <a:spcAft>
-                <a:spcPts val="300"/>
-              </a:spcAft>
-              <a:buNone/>
-            </a:pPr>
-            <a:r>
-              <a:rPr lang="en-US" sz="1300" dirty="0">
-                <a:solidFill>
-                  <a:srgbClr val="1C2833"/>
-                </a:solidFill>
-                <a:latin typeface="Georgia" pitchFamily="34" charset="0"/>
-                <a:ea typeface="Georgia" pitchFamily="34" charset="-122"/>
-                <a:cs typeface="Georgia" pitchFamily="34" charset="-120"/>
-              </a:rPr>
-              <a:t> Inhale 4 counts. Exhale 4 counts. Continuous, smooth.</a:t>
-            </a:r>
-            <a:endParaRPr lang="en-US" sz="1300" dirty="0"/>
-          </a:p>
-        </p:txBody>
-      </p:sp>
-      <p:sp>
-        <p:nvSpPr>
-          <p:cNvPr id="10" name="Text 8"/>
-          <p:cNvSpPr/>
-          <p:nvPr/>
-        </p:nvSpPr>
-        <p:spPr>
-          <a:xfrm>
-            <a:off x="692051" y="2381399"/>
-            <a:ext cx="7973389" cy="461963"/>
-          </a:xfrm>
-          <a:prstGeom prst="rect">
-            <a:avLst/>
-          </a:prstGeom>
-          <a:noFill/>
-          <a:ln/>
-        </p:spPr>
-        <p:txBody>
-          <a:bodyPr wrap="square" lIns="0" tIns="0" rIns="0" bIns="0" rtlCol="0" anchor="t"/>
-          <a:lstStyle/>
-          <a:p>
-            <a:pPr algn="l" indent="0" marL="0">
-              <a:lnSpc>
-                <a:spcPts val="1820"/>
-              </a:lnSpc>
-              <a:spcBef>
-                <a:spcPts val="300"/>
-              </a:spcBef>
-              <a:spcAft>
-                <a:spcPts val="300"/>
-              </a:spcAft>
-              <a:buNone/>
-            </a:pPr>
-            <a:r>
-              <a:rPr lang="en-US" sz="1300" b="1" i="1" dirty="0">
-                <a:solidFill>
-                  <a:srgbClr val="1C2833"/>
-                </a:solidFill>
-                <a:latin typeface="Georgia" pitchFamily="34" charset="0"/>
-                <a:ea typeface="Georgia" pitchFamily="34" charset="-122"/>
-                <a:cs typeface="Georgia" pitchFamily="34" charset="-120"/>
-              </a:rPr>
-              <a:t>What we DON'T do at this level:</a:t>
-            </a:r>
-            <a:pPr algn="l" indent="0" marL="0">
-              <a:lnSpc>
-                <a:spcPts val="1820"/>
-              </a:lnSpc>
-              <a:spcBef>
-                <a:spcPts val="300"/>
-              </a:spcBef>
-              <a:spcAft>
-                <a:spcPts val="300"/>
-              </a:spcAft>
-              <a:buNone/>
-            </a:pPr>
-            <a:r>
-              <a:rPr lang="en-US" sz="1300" dirty="0">
-                <a:solidFill>
-                  <a:srgbClr val="1C2833"/>
-                </a:solidFill>
-                <a:latin typeface="Georgia" pitchFamily="34" charset="0"/>
-                <a:ea typeface="Georgia" pitchFamily="34" charset="-122"/>
-                <a:cs typeface="Georgia" pitchFamily="34" charset="-120"/>
-              </a:rPr>
-              <a:t> breath retention, forceful breathing, bellows breath, skull shining. Those require trained guidance.</a:t>
-            </a:r>
-            <a:endParaRPr lang="en-US" sz="1300" dirty="0"/>
-          </a:p>
-        </p:txBody>
-      </p:sp>
-      <p:sp>
-        <p:nvSpPr>
-          <p:cNvPr id="11" name="Text 9"/>
-          <p:cNvSpPr/>
-          <p:nvPr/>
-        </p:nvSpPr>
-        <p:spPr>
-          <a:xfrm>
-            <a:off x="692051" y="2881461"/>
-            <a:ext cx="7973389" cy="230981"/>
-          </a:xfrm>
-          <a:prstGeom prst="rect">
-            <a:avLst/>
-          </a:prstGeom>
-          <a:noFill/>
-          <a:ln/>
-        </p:spPr>
-        <p:txBody>
-          <a:bodyPr wrap="square" lIns="0" tIns="0" rIns="0" bIns="0" rtlCol="0" anchor="t"/>
-          <a:lstStyle/>
-          <a:p>
-            <a:pPr algn="l" indent="0" marL="0">
-              <a:lnSpc>
-                <a:spcPts val="1820"/>
-              </a:lnSpc>
-              <a:spcBef>
-                <a:spcPts val="300"/>
-              </a:spcBef>
-              <a:spcAft>
-                <a:spcPts val="300"/>
-              </a:spcAft>
-              <a:buNone/>
-            </a:pPr>
-            <a:r>
-              <a:rPr lang="en-US" sz="1300" dirty="0">
-                <a:solidFill>
-                  <a:srgbClr val="1C2833"/>
-                </a:solidFill>
-                <a:latin typeface="Georgia" pitchFamily="34" charset="0"/>
-                <a:ea typeface="Georgia" pitchFamily="34" charset="-122"/>
-                <a:cs typeface="Georgia" pitchFamily="34" charset="-120"/>
-              </a:rPr>
-              <a:t>&gt; "</a:t>
-            </a:r>
-            <a:pPr algn="l" indent="0" marL="0">
-              <a:lnSpc>
-                <a:spcPts val="1820"/>
-              </a:lnSpc>
-              <a:spcBef>
-                <a:spcPts val="300"/>
-              </a:spcBef>
-              <a:spcAft>
-                <a:spcPts val="300"/>
-              </a:spcAft>
-              <a:buNone/>
-            </a:pPr>
-            <a:r>
-              <a:rPr lang="en-US" sz="1300" i="1" dirty="0">
-                <a:solidFill>
-                  <a:srgbClr val="1C2833"/>
-                </a:solidFill>
-                <a:latin typeface="Georgia" pitchFamily="34" charset="0"/>
-                <a:ea typeface="Georgia" pitchFamily="34" charset="-122"/>
-                <a:cs typeface="Georgia" pitchFamily="34" charset="-120"/>
-              </a:rPr>
-              <a:t>śanair</a:t>
-            </a:r>
-            <a:pPr algn="l" indent="0" marL="0">
-              <a:lnSpc>
-                <a:spcPts val="1820"/>
-              </a:lnSpc>
-              <a:spcBef>
-                <a:spcPts val="300"/>
-              </a:spcBef>
-              <a:spcAft>
-                <a:spcPts val="300"/>
-              </a:spcAft>
-              <a:buNone/>
-            </a:pPr>
-            <a:r>
-              <a:rPr lang="en-US" sz="1300" dirty="0">
-                <a:solidFill>
-                  <a:srgbClr val="1C2833"/>
-                </a:solidFill>
-                <a:latin typeface="Georgia" pitchFamily="34" charset="0"/>
-                <a:ea typeface="Georgia" pitchFamily="34" charset="-122"/>
-                <a:cs typeface="Georgia" pitchFamily="34" charset="-120"/>
-              </a:rPr>
-              <a:t> — gradually" — Śrīmad-Bhāgavatam 4.8.44</a:t>
-            </a:r>
-            <a:endParaRPr lang="en-US" sz="1300" dirty="0"/>
-          </a:p>
-        </p:txBody>
-      </p:sp>
-      <p:sp>
-        <p:nvSpPr>
-          <p:cNvPr id="12" name="Text 10"/>
           <p:cNvSpPr/>
           <p:nvPr/>
         </p:nvSpPr>
@@ -3293,7 +3266,7 @@
                 <a:ea typeface="Georgia" pitchFamily="34" charset="-122"/>
                 <a:cs typeface="Georgia" pitchFamily="34" charset="-120"/>
               </a:rPr>
-              <a:t>Homework</a:t>
+              <a:t>Practice (20 min) — Two breath practices</a:t>
             </a:r>
             <a:endParaRPr lang="en-US" sz="1800" dirty="0"/>
           </a:p>
@@ -3333,7 +3306,7 @@
               <a:buNone/>
             </a:pPr>
             <a:r>
-              <a:rPr lang="en-US" sz="1200" dirty="0">
+              <a:rPr lang="en-US" sz="1200" b="1" dirty="0">
                 <a:solidFill>
                   <a:srgbClr val="1C2833"/>
                 </a:solidFill>
@@ -3341,7 +3314,7 @@
                 <a:ea typeface="Arial" pitchFamily="34" charset="-122"/>
                 <a:cs typeface="Arial" pitchFamily="34" charset="-120"/>
               </a:rPr>
-              <a:t>– Practise the counted breath for 3 minutes before bed tonight. Note in your workbook: "I felt _____ before, _____ after."</a:t>
+              <a:t>Practice 1 (5 min) — Natural-breath observation.</a:t>
             </a:r>
             <a:endParaRPr lang="en-US" sz="1200" dirty="0"/>
           </a:p>
@@ -3350,6 +3323,148 @@
       <p:sp>
         <p:nvSpPr>
           <p:cNvPr id="5" name="Text 3"/>
+          <p:cNvSpPr/>
+          <p:nvPr/>
+        </p:nvSpPr>
+        <p:spPr>
+          <a:xfrm>
+            <a:off x="634901" y="1173063"/>
+            <a:ext cx="8102798" cy="1257002"/>
+          </a:xfrm>
+          <a:prstGeom prst="rect">
+            <a:avLst/>
+          </a:prstGeom>
+          <a:noFill/>
+          <a:ln/>
+        </p:spPr>
+        <p:txBody>
+          <a:bodyPr wrap="square" lIns="0" tIns="0" rIns="0" bIns="0" rtlCol="0" anchor="t"/>
+          <a:lstStyle/>
+          <a:p>
+            <a:pPr algn="l" marL="342900" indent="-342900">
+              <a:lnSpc>
+                <a:spcPts val="1620"/>
+              </a:lnSpc>
+              <a:spcAft>
+                <a:spcPts val="300"/>
+              </a:spcAft>
+              <a:buSzPct val="100000"/>
+              <a:buChar char="•"/>
+            </a:pPr>
+            <a:r>
+              <a:rPr lang="en-US" sz="1200" dirty="0">
+                <a:solidFill>
+                  <a:srgbClr val="1C2833"/>
+                </a:solidFill>
+                <a:latin typeface="Arial" pitchFamily="34" charset="0"/>
+                <a:ea typeface="Arial" pitchFamily="34" charset="-122"/>
+                <a:cs typeface="Arial" pitchFamily="34" charset="-120"/>
+              </a:rPr>
+              <a:t>Sukhāsana. Eyes closed (or lowered).</a:t>
+            </a:r>
+            <a:endParaRPr lang="en-US" sz="1200" dirty="0"/>
+          </a:p>
+          <a:p>
+            <a:pPr algn="l" marL="342900" indent="-342900">
+              <a:lnSpc>
+                <a:spcPts val="1620"/>
+              </a:lnSpc>
+              <a:spcAft>
+                <a:spcPts val="300"/>
+              </a:spcAft>
+              <a:buSzPct val="100000"/>
+              <a:buChar char="•"/>
+            </a:pPr>
+            <a:r>
+              <a:rPr lang="en-US" sz="1200" dirty="0">
+                <a:solidFill>
+                  <a:srgbClr val="1C2833"/>
+                </a:solidFill>
+                <a:latin typeface="Arial" pitchFamily="34" charset="0"/>
+                <a:ea typeface="Arial" pitchFamily="34" charset="-122"/>
+                <a:cs typeface="Arial" pitchFamily="34" charset="-120"/>
+              </a:rPr>
+              <a:t>Breathe completely naturally. Don't change anything.</a:t>
+            </a:r>
+            <a:endParaRPr lang="en-US" sz="1200" dirty="0"/>
+          </a:p>
+          <a:p>
+            <a:pPr algn="l" marL="342900" indent="-342900">
+              <a:lnSpc>
+                <a:spcPts val="1620"/>
+              </a:lnSpc>
+              <a:spcAft>
+                <a:spcPts val="300"/>
+              </a:spcAft>
+              <a:buSzPct val="100000"/>
+              <a:buChar char="•"/>
+            </a:pPr>
+            <a:r>
+              <a:rPr lang="en-US" sz="1200" dirty="0">
+                <a:solidFill>
+                  <a:srgbClr val="1C2833"/>
+                </a:solidFill>
+                <a:latin typeface="Arial" pitchFamily="34" charset="0"/>
+                <a:ea typeface="Arial" pitchFamily="34" charset="-122"/>
+                <a:cs typeface="Arial" pitchFamily="34" charset="-120"/>
+              </a:rPr>
+              <a:t>Observe: which nostril is more open? Is the breath deep or shallow? Even or uneven?</a:t>
+            </a:r>
+            <a:endParaRPr lang="en-US" sz="1200" dirty="0"/>
+          </a:p>
+          <a:p>
+            <a:pPr algn="l" marL="342900" indent="-342900">
+              <a:lnSpc>
+                <a:spcPts val="1620"/>
+              </a:lnSpc>
+              <a:spcAft>
+                <a:spcPts val="300"/>
+              </a:spcAft>
+              <a:buSzPct val="100000"/>
+              <a:buChar char="•"/>
+            </a:pPr>
+            <a:r>
+              <a:rPr lang="en-US" sz="1200" dirty="0">
+                <a:solidFill>
+                  <a:srgbClr val="1C2833"/>
+                </a:solidFill>
+                <a:latin typeface="Arial" pitchFamily="34" charset="0"/>
+                <a:ea typeface="Arial" pitchFamily="34" charset="-122"/>
+                <a:cs typeface="Arial" pitchFamily="34" charset="-120"/>
+              </a:rPr>
+              <a:t>Just NOTICE. Don't fix.</a:t>
+            </a:r>
+            <a:endParaRPr lang="en-US" sz="1200" dirty="0"/>
+          </a:p>
+          <a:p>
+            <a:pPr algn="l" marL="342900" indent="-342900">
+              <a:lnSpc>
+                <a:spcPts val="1620"/>
+              </a:lnSpc>
+              <a:spcAft>
+                <a:spcPts val="300"/>
+              </a:spcAft>
+              <a:buSzPct val="100000"/>
+              <a:buChar char="•"/>
+            </a:pPr>
+            <a:r>
+              <a:rPr lang="en-US" sz="1200" dirty="0">
+                <a:solidFill>
+                  <a:srgbClr val="1C2833"/>
+                </a:solidFill>
+                <a:latin typeface="Arial" pitchFamily="34" charset="0"/>
+                <a:ea typeface="Arial" pitchFamily="34" charset="-122"/>
+                <a:cs typeface="Arial" pitchFamily="34" charset="-120"/>
+              </a:rPr>
+              <a:t>Teacher rings a soft bell at 1 min, 3 min, 5 min.</a:t>
+            </a:r>
+            <a:endParaRPr lang="en-US" sz="1200" dirty="0"/>
+          </a:p>
+        </p:txBody>
+      </p:sp>
+      <p:sp>
+        <p:nvSpPr>
+          <p:cNvPr id="6" name="Text 4"/>
           <p:cNvSpPr/>
           <p:nvPr/>
         </p:nvSpPr>
@@ -3499,7 +3614,7 @@
                 <a:ea typeface="Georgia" pitchFamily="34" charset="-122"/>
                 <a:cs typeface="Georgia" pitchFamily="34" charset="-120"/>
               </a:rPr>
-              <a:t>Differentiation</a:t>
+              <a:t>Practice (20 min) — Two breath practices (cont.)</a:t>
             </a:r>
             <a:endParaRPr lang="en-US" sz="1800" dirty="0"/>
           </a:p>
@@ -3513,8 +3628,8 @@
         </p:nvSpPr>
         <p:spPr>
           <a:xfrm>
-            <a:off x="634901" y="883593"/>
-            <a:ext cx="8102798" cy="525661"/>
+            <a:off x="406301" y="870942"/>
+            <a:ext cx="8498026" cy="213271"/>
           </a:xfrm>
           <a:prstGeom prst="rect">
             <a:avLst/>
@@ -3526,15 +3641,17 @@
           <a:bodyPr wrap="square" lIns="0" tIns="0" rIns="0" bIns="0" rtlCol="0" anchor="t"/>
           <a:lstStyle/>
           <a:p>
-            <a:pPr algn="l" marL="342900" indent="-342900">
-              <a:lnSpc>
-                <a:spcPts val="1620"/>
-              </a:lnSpc>
-              <a:spcAft>
-                <a:spcPts val="300"/>
-              </a:spcAft>
-              <a:buSzPct val="100000"/>
-              <a:buChar char="•"/>
+            <a:pPr algn="l" indent="0" marL="0">
+              <a:lnSpc>
+                <a:spcPts val="1680"/>
+              </a:lnSpc>
+              <a:spcBef>
+                <a:spcPts val="300"/>
+              </a:spcBef>
+              <a:spcAft>
+                <a:spcPts val="300"/>
+              </a:spcAft>
+              <a:buNone/>
             </a:pPr>
             <a:r>
               <a:rPr lang="en-US" sz="1200" b="1" dirty="0">
@@ -3545,16 +3662,42 @@
                 <a:ea typeface="Arial" pitchFamily="34" charset="-122"/>
                 <a:cs typeface="Arial" pitchFamily="34" charset="-120"/>
               </a:rPr>
-              <a:t>Tier up:</a:t>
-            </a:r>
-            <a:pPr algn="l" indent="0" marL="0">
+              <a:t>Practice 2 (5 min) — Counted breath.</a:t>
+            </a:r>
+            <a:endParaRPr lang="en-US" sz="1200" dirty="0"/>
+          </a:p>
+        </p:txBody>
+      </p:sp>
+      <p:sp>
+        <p:nvSpPr>
+          <p:cNvPr id="5" name="Text 3"/>
+          <p:cNvSpPr/>
+          <p:nvPr/>
+        </p:nvSpPr>
+        <p:spPr>
+          <a:xfrm>
+            <a:off x="634901" y="1173063"/>
+            <a:ext cx="8102798" cy="1257002"/>
+          </a:xfrm>
+          <a:prstGeom prst="rect">
+            <a:avLst/>
+          </a:prstGeom>
+          <a:noFill/>
+          <a:ln/>
+        </p:spPr>
+        <p:txBody>
+          <a:bodyPr wrap="square" lIns="0" tIns="0" rIns="0" bIns="0" rtlCol="0" anchor="t"/>
+          <a:lstStyle/>
+          <a:p>
+            <a:pPr algn="l" marL="342900" indent="-342900">
               <a:lnSpc>
                 <a:spcPts val="1620"/>
               </a:lnSpc>
               <a:spcAft>
                 <a:spcPts val="300"/>
               </a:spcAft>
-              <a:buNone/>
+              <a:buSzPct val="100000"/>
+              <a:buChar char="•"/>
             </a:pPr>
             <a:r>
               <a:rPr lang="en-US" sz="1200" dirty="0">
@@ -3565,7 +3708,7 @@
                 <a:ea typeface="Arial" pitchFamily="34" charset="-122"/>
                 <a:cs typeface="Arial" pitchFamily="34" charset="-120"/>
               </a:rPr>
-              <a:t> Extend the counted breath to 5-in, 5-out for the second practice.</a:t>
+              <a:t>Inhale slowly to count of 4 (count silently in your head).</a:t>
             </a:r>
             <a:endParaRPr lang="en-US" sz="1200" dirty="0"/>
           </a:p>
@@ -3581,7 +3724,7 @@
               <a:buChar char="•"/>
             </a:pPr>
             <a:r>
-              <a:rPr lang="en-US" sz="1200" b="1" dirty="0">
+              <a:rPr lang="en-US" sz="1200" dirty="0">
                 <a:solidFill>
                   <a:srgbClr val="1C2833"/>
                 </a:solidFill>
@@ -3589,16 +3732,20 @@
                 <a:ea typeface="Arial" pitchFamily="34" charset="-122"/>
                 <a:cs typeface="Arial" pitchFamily="34" charset="-120"/>
               </a:rPr>
-              <a:t>Tier down:</a:t>
-            </a:r>
-            <a:pPr algn="l" indent="0" marL="0">
+              <a:t>Exhale slowly to count of 4.</a:t>
+            </a:r>
+            <a:endParaRPr lang="en-US" sz="1200" dirty="0"/>
+          </a:p>
+          <a:p>
+            <a:pPr algn="l" marL="342900" indent="-342900">
               <a:lnSpc>
                 <a:spcPts val="1620"/>
               </a:lnSpc>
               <a:spcAft>
                 <a:spcPts val="300"/>
               </a:spcAft>
-              <a:buNone/>
+              <a:buSzPct val="100000"/>
+              <a:buChar char="•"/>
             </a:pPr>
             <a:r>
               <a:rPr lang="en-US" sz="1200" dirty="0">
@@ -3609,15 +3756,63 @@
                 <a:ea typeface="Arial" pitchFamily="34" charset="-122"/>
                 <a:cs typeface="Arial" pitchFamily="34" charset="-120"/>
               </a:rPr>
-              <a:t> Just do the natural-breath observation. Skip the counted breath today.</a:t>
+              <a:t>No holding at the top or bottom. Continuous.</a:t>
             </a:r>
             <a:endParaRPr lang="en-US" sz="1200" dirty="0"/>
           </a:p>
-        </p:txBody>
-      </p:sp>
-      <p:sp>
-        <p:nvSpPr>
-          <p:cNvPr id="5" name="Text 3"/>
+          <a:p>
+            <a:pPr algn="l" marL="342900" indent="-342900">
+              <a:lnSpc>
+                <a:spcPts val="1620"/>
+              </a:lnSpc>
+              <a:spcAft>
+                <a:spcPts val="300"/>
+              </a:spcAft>
+              <a:buSzPct val="100000"/>
+              <a:buChar char="•"/>
+            </a:pPr>
+            <a:r>
+              <a:rPr lang="en-US" sz="1200" dirty="0">
+                <a:solidFill>
+                  <a:srgbClr val="1C2833"/>
+                </a:solidFill>
+                <a:latin typeface="Arial" pitchFamily="34" charset="0"/>
+                <a:ea typeface="Arial" pitchFamily="34" charset="-122"/>
+                <a:cs typeface="Arial" pitchFamily="34" charset="-120"/>
+              </a:rPr>
+              <a:t>10 cycles = roughly 1 minute. Aim for 5 minutes (50 cycles).</a:t>
+            </a:r>
+            <a:endParaRPr lang="en-US" sz="1200" dirty="0"/>
+          </a:p>
+          <a:p>
+            <a:pPr algn="l" marL="342900" indent="-342900">
+              <a:lnSpc>
+                <a:spcPts val="1620"/>
+              </a:lnSpc>
+              <a:spcAft>
+                <a:spcPts val="300"/>
+              </a:spcAft>
+              <a:buSzPct val="100000"/>
+              <a:buChar char="•"/>
+            </a:pPr>
+            <a:r>
+              <a:rPr lang="en-US" sz="1200" dirty="0">
+                <a:solidFill>
+                  <a:srgbClr val="1C2833"/>
+                </a:solidFill>
+                <a:latin typeface="Arial" pitchFamily="34" charset="0"/>
+                <a:ea typeface="Arial" pitchFamily="34" charset="-122"/>
+                <a:cs typeface="Arial" pitchFamily="34" charset="-120"/>
+              </a:rPr>
+              <a:t>If you lose count, restart at 1.</a:t>
+            </a:r>
+            <a:endParaRPr lang="en-US" sz="1200" dirty="0"/>
+          </a:p>
+        </p:txBody>
+      </p:sp>
+      <p:sp>
+        <p:nvSpPr>
+          <p:cNvPr id="6" name="Text 4"/>
           <p:cNvSpPr/>
           <p:nvPr/>
         </p:nvSpPr>
@@ -3767,7 +3962,7 @@
                 <a:ea typeface="Georgia" pitchFamily="34" charset="-122"/>
                 <a:cs typeface="Georgia" pitchFamily="34" charset="-120"/>
               </a:rPr>
-              <a:t>Teacher notes</a:t>
+              <a:t>Reflection (8 min)</a:t>
             </a:r>
             <a:endParaRPr lang="en-US" sz="1800" dirty="0"/>
           </a:p>
@@ -3781,8 +3976,8 @@
         </p:nvSpPr>
         <p:spPr>
           <a:xfrm>
-            <a:off x="406301" y="870942"/>
-            <a:ext cx="8498026" cy="853083"/>
+            <a:off x="634901" y="883593"/>
+            <a:ext cx="8102798" cy="1276052"/>
           </a:xfrm>
           <a:prstGeom prst="rect">
             <a:avLst/>
@@ -3794,17 +3989,15 @@
           <a:bodyPr wrap="square" lIns="0" tIns="0" rIns="0" bIns="0" rtlCol="0" anchor="t"/>
           <a:lstStyle/>
           <a:p>
-            <a:pPr algn="l" indent="0" marL="0">
-              <a:lnSpc>
-                <a:spcPts val="1680"/>
-              </a:lnSpc>
-              <a:spcBef>
-                <a:spcPts val="300"/>
-              </a:spcBef>
-              <a:spcAft>
-                <a:spcPts val="300"/>
-              </a:spcAft>
-              <a:buNone/>
+            <a:pPr algn="l" marL="342900" indent="-342900">
+              <a:lnSpc>
+                <a:spcPts val="1620"/>
+              </a:lnSpc>
+              <a:spcAft>
+                <a:spcPts val="300"/>
+              </a:spcAft>
+              <a:buSzPct val="100000"/>
+              <a:buChar char="•"/>
             </a:pPr>
             <a:r>
               <a:rPr lang="en-US" sz="1200" dirty="0">
@@ -3815,7 +4008,143 @@
                 <a:ea typeface="Arial" pitchFamily="34" charset="-122"/>
                 <a:cs typeface="Arial" pitchFamily="34" charset="-120"/>
               </a:rPr>
-              <a:t>– Some students find sitting with the breath uncomfortable — minds race, anxiety rises. Honour that: "if it feels too much, open your eyes and just rest." – The "natural-breath-first" frame matters. Forceful breathing can cause hyperventilation or dizziness in students; we sidestep that completely at this band. – Reinforce: this is real prāṇāyāma. The simplest forms are not "lesser" — they are the foundation.</a:t>
+              <a:t>Worksheet </a:t>
+            </a:r>
+            <a:pPr algn="l" indent="0" marL="0">
+              <a:lnSpc>
+                <a:spcPts val="1620"/>
+              </a:lnSpc>
+              <a:spcAft>
+                <a:spcPts val="300"/>
+              </a:spcAft>
+              <a:buNone/>
+            </a:pPr>
+            <a:r>
+              <a:rPr lang="en-US" sz="1200" dirty="0">
+                <a:solidFill>
+                  <a:srgbClr val="1C2833"/>
+                </a:solidFill>
+                <a:latin typeface="Arial" pitchFamily="34" charset="0"/>
+                <a:ea typeface="Arial" pitchFamily="34" charset="-122"/>
+                <a:cs typeface="Arial" pitchFamily="34" charset="-120"/>
+              </a:rPr>
+              <a:t>activities/activity-02-breath-observation.md</a:t>
+            </a:r>
+            <a:pPr algn="l" indent="0" marL="0">
+              <a:lnSpc>
+                <a:spcPts val="1620"/>
+              </a:lnSpc>
+              <a:spcAft>
+                <a:spcPts val="300"/>
+              </a:spcAft>
+              <a:buNone/>
+            </a:pPr>
+            <a:r>
+              <a:rPr lang="en-US" sz="1200" dirty="0">
+                <a:solidFill>
+                  <a:srgbClr val="1C2833"/>
+                </a:solidFill>
+                <a:latin typeface="Arial" pitchFamily="34" charset="0"/>
+                <a:ea typeface="Arial" pitchFamily="34" charset="-122"/>
+                <a:cs typeface="Arial" pitchFamily="34" charset="-120"/>
+              </a:rPr>
+              <a:t>.</a:t>
+            </a:r>
+            <a:endParaRPr lang="en-US" sz="1200" dirty="0"/>
+          </a:p>
+          <a:p>
+            <a:pPr algn="l" marL="342900" indent="-342900">
+              <a:lnSpc>
+                <a:spcPts val="1620"/>
+              </a:lnSpc>
+              <a:spcAft>
+                <a:spcPts val="300"/>
+              </a:spcAft>
+              <a:buSzPct val="100000"/>
+              <a:buChar char="•"/>
+            </a:pPr>
+            <a:r>
+              <a:rPr lang="en-US" sz="1200" dirty="0">
+                <a:solidFill>
+                  <a:srgbClr val="1C2833"/>
+                </a:solidFill>
+                <a:latin typeface="Arial" pitchFamily="34" charset="0"/>
+                <a:ea typeface="Arial" pitchFamily="34" charset="-122"/>
+                <a:cs typeface="Arial" pitchFamily="34" charset="-120"/>
+              </a:rPr>
+              <a:t>Students write briefly:</a:t>
+            </a:r>
+            <a:endParaRPr lang="en-US" sz="1200" dirty="0"/>
+          </a:p>
+          <a:p>
+            <a:pPr algn="l" marL="342900" indent="-342900">
+              <a:lnSpc>
+                <a:spcPts val="1620"/>
+              </a:lnSpc>
+              <a:spcAft>
+                <a:spcPts val="300"/>
+              </a:spcAft>
+              <a:buSzPct val="100000"/>
+              <a:buChar char="•"/>
+            </a:pPr>
+            <a:r>
+              <a:rPr lang="en-US" sz="1200" dirty="0">
+                <a:solidFill>
+                  <a:srgbClr val="1C2833"/>
+                </a:solidFill>
+                <a:latin typeface="Arial" pitchFamily="34" charset="0"/>
+                <a:ea typeface="Arial" pitchFamily="34" charset="-122"/>
+                <a:cs typeface="Arial" pitchFamily="34" charset="-120"/>
+              </a:rPr>
+              <a:t>Before the practice, my mind felt: ____</a:t>
+            </a:r>
+            <a:endParaRPr lang="en-US" sz="1200" dirty="0"/>
+          </a:p>
+          <a:p>
+            <a:pPr algn="l" marL="342900" indent="-342900">
+              <a:lnSpc>
+                <a:spcPts val="1620"/>
+              </a:lnSpc>
+              <a:spcAft>
+                <a:spcPts val="300"/>
+              </a:spcAft>
+              <a:buSzPct val="100000"/>
+              <a:buChar char="•"/>
+            </a:pPr>
+            <a:r>
+              <a:rPr lang="en-US" sz="1200" dirty="0">
+                <a:solidFill>
+                  <a:srgbClr val="1C2833"/>
+                </a:solidFill>
+                <a:latin typeface="Arial" pitchFamily="34" charset="0"/>
+                <a:ea typeface="Arial" pitchFamily="34" charset="-122"/>
+                <a:cs typeface="Arial" pitchFamily="34" charset="-120"/>
+              </a:rPr>
+              <a:t>After the practice, my mind felt: ____</a:t>
+            </a:r>
+            <a:endParaRPr lang="en-US" sz="1200" dirty="0"/>
+          </a:p>
+          <a:p>
+            <a:pPr algn="l" marL="342900" indent="-342900">
+              <a:lnSpc>
+                <a:spcPts val="1620"/>
+              </a:lnSpc>
+              <a:spcAft>
+                <a:spcPts val="300"/>
+              </a:spcAft>
+              <a:buSzPct val="100000"/>
+              <a:buChar char="•"/>
+            </a:pPr>
+            <a:r>
+              <a:rPr lang="en-US" sz="1200" dirty="0">
+                <a:solidFill>
+                  <a:srgbClr val="1C2833"/>
+                </a:solidFill>
+                <a:latin typeface="Arial" pitchFamily="34" charset="0"/>
+                <a:ea typeface="Arial" pitchFamily="34" charset="-122"/>
+                <a:cs typeface="Arial" pitchFamily="34" charset="-120"/>
+              </a:rPr>
+              <a:t>One thing I noticed about my breath: ____</a:t>
             </a:r>
             <a:endParaRPr lang="en-US" sz="1200" dirty="0"/>
           </a:p>
@@ -3973,7 +4302,7 @@
                 <a:ea typeface="Georgia" pitchFamily="34" charset="-122"/>
                 <a:cs typeface="Georgia" pitchFamily="34" charset="-120"/>
               </a:rPr>
-              <a:t>Citation(s) used in this lesson</a:t>
+              <a:t>Wrap-up (5 min)</a:t>
             </a:r>
             <a:endParaRPr lang="en-US" sz="1800" dirty="0"/>
           </a:p>
@@ -3987,8 +4316,8 @@
         </p:nvSpPr>
         <p:spPr>
           <a:xfrm>
-            <a:off x="406301" y="870942"/>
-            <a:ext cx="8498026" cy="436066"/>
+            <a:off x="634901" y="883593"/>
+            <a:ext cx="8102798" cy="769441"/>
           </a:xfrm>
           <a:prstGeom prst="rect">
             <a:avLst/>
@@ -4000,17 +4329,15 @@
           <a:bodyPr wrap="square" lIns="0" tIns="0" rIns="0" bIns="0" rtlCol="0" anchor="t"/>
           <a:lstStyle/>
           <a:p>
-            <a:pPr algn="l" indent="0" marL="0">
-              <a:lnSpc>
-                <a:spcPts val="1680"/>
-              </a:lnSpc>
-              <a:spcBef>
-                <a:spcPts val="300"/>
-              </a:spcBef>
-              <a:spcAft>
-                <a:spcPts val="300"/>
-              </a:spcAft>
-              <a:buNone/>
+            <a:pPr algn="l" marL="342900" indent="-342900">
+              <a:lnSpc>
+                <a:spcPts val="1620"/>
+              </a:lnSpc>
+              <a:spcAft>
+                <a:spcPts val="300"/>
+              </a:spcAft>
+              <a:buSzPct val="100000"/>
+              <a:buChar char="•"/>
             </a:pPr>
             <a:r>
               <a:rPr lang="en-US" sz="1200" dirty="0">
@@ -4021,19 +4348,20 @@
                 <a:ea typeface="Arial" pitchFamily="34" charset="-122"/>
                 <a:cs typeface="Arial" pitchFamily="34" charset="-120"/>
               </a:rPr>
-              <a:t>– SB 4.8.44 — vidya-karana RAG cache </a:t>
-            </a:r>
-            <a:pPr algn="l" indent="0" marL="0">
-              <a:lnSpc>
-                <a:spcPts val="1680"/>
-              </a:lnSpc>
-              <a:spcBef>
-                <a:spcPts val="300"/>
-              </a:spcBef>
-              <a:spcAft>
-                <a:spcPts val="300"/>
-              </a:spcAft>
-              <a:buNone/>
+              <a:t>3 student shares: one sentence each on "what I noticed."</a:t>
+            </a:r>
+            <a:endParaRPr lang="en-US" sz="1200" dirty="0"/>
+          </a:p>
+          <a:p>
+            <a:pPr algn="l" marL="342900" indent="-342900">
+              <a:lnSpc>
+                <a:spcPts val="1620"/>
+              </a:lnSpc>
+              <a:spcAft>
+                <a:spcPts val="300"/>
+              </a:spcAft>
+              <a:buSzPct val="100000"/>
+              <a:buChar char="•"/>
             </a:pPr>
             <a:r>
               <a:rPr lang="en-US" sz="1200" dirty="0">
@@ -4044,22 +4372,19 @@
                 <a:ea typeface="Arial" pitchFamily="34" charset="-122"/>
                 <a:cs typeface="Arial" pitchFamily="34" charset="-120"/>
               </a:rPr>
-              <a:t>day-06-pranayama.json</a:t>
-            </a:r>
-            <a:pPr algn="l" indent="0" marL="0">
-              <a:lnSpc>
-                <a:spcPts val="1680"/>
-              </a:lnSpc>
-              <a:spcBef>
-                <a:spcPts val="300"/>
-              </a:spcBef>
-              <a:spcAft>
-                <a:spcPts val="300"/>
-              </a:spcAft>
-              <a:buNone/>
-            </a:pPr>
-            <a:r>
-              <a:rPr lang="en-US" sz="1200" dirty="0">
+              <a:t>Note: </a:t>
+            </a:r>
+            <a:pPr algn="l" indent="0" marL="0">
+              <a:lnSpc>
+                <a:spcPts val="1620"/>
+              </a:lnSpc>
+              <a:spcAft>
+                <a:spcPts val="300"/>
+              </a:spcAft>
+              <a:buNone/>
+            </a:pPr>
+            <a:r>
+              <a:rPr lang="en-US" sz="1200" i="1" dirty="0">
                 <a:solidFill>
                   <a:srgbClr val="1C2833"/>
                 </a:solidFill>
@@ -4067,7 +4392,1820 @@
                 <a:ea typeface="Arial" pitchFamily="34" charset="-122"/>
                 <a:cs typeface="Arial" pitchFamily="34" charset="-120"/>
               </a:rPr>
-              <a:t> chunk[0]. Direct verse on threefold prāṇāyāma and gradual purification. – BG Ch. 4 (apāne juhvati prāṇaṁ) — referenced via cache chunk on breath sacrifice.</a:t>
+              <a:t>"A common report — the mind is busier than we thought. Noticing that IS the practice."</a:t>
+            </a:r>
+            <a:endParaRPr lang="en-US" sz="1200" dirty="0"/>
+          </a:p>
+          <a:p>
+            <a:pPr algn="l" marL="342900" indent="-342900">
+              <a:lnSpc>
+                <a:spcPts val="1620"/>
+              </a:lnSpc>
+              <a:spcAft>
+                <a:spcPts val="300"/>
+              </a:spcAft>
+              <a:buSzPct val="100000"/>
+              <a:buChar char="•"/>
+            </a:pPr>
+            <a:r>
+              <a:rPr lang="en-US" sz="1200" dirty="0">
+                <a:solidFill>
+                  <a:srgbClr val="1C2833"/>
+                </a:solidFill>
+                <a:latin typeface="Arial" pitchFamily="34" charset="0"/>
+                <a:ea typeface="Arial" pitchFamily="34" charset="-122"/>
+                <a:cs typeface="Arial" pitchFamily="34" charset="-120"/>
+              </a:rPr>
+              <a:t>Preview Day 7: </a:t>
+            </a:r>
+            <a:pPr algn="l" indent="0" marL="0">
+              <a:lnSpc>
+                <a:spcPts val="1620"/>
+              </a:lnSpc>
+              <a:spcAft>
+                <a:spcPts val="300"/>
+              </a:spcAft>
+              <a:buNone/>
+            </a:pPr>
+            <a:r>
+              <a:rPr lang="en-US" sz="1200" i="1" dirty="0">
+                <a:solidFill>
+                  <a:srgbClr val="1C2833"/>
+                </a:solidFill>
+                <a:latin typeface="Arial" pitchFamily="34" charset="0"/>
+                <a:ea typeface="Arial" pitchFamily="34" charset="-122"/>
+                <a:cs typeface="Arial" pitchFamily="34" charset="-120"/>
+              </a:rPr>
+              <a:t>"Tomorrow — why does this work? We'll look at the autonomic nervous system."</a:t>
+            </a:r>
+            <a:endParaRPr lang="en-US" sz="1200" dirty="0"/>
+          </a:p>
+        </p:txBody>
+      </p:sp>
+      <p:sp>
+        <p:nvSpPr>
+          <p:cNvPr id="5" name="Text 3"/>
+          <p:cNvSpPr/>
+          <p:nvPr/>
+        </p:nvSpPr>
+        <p:spPr>
+          <a:xfrm>
+            <a:off x="406301" y="4434929"/>
+            <a:ext cx="8498026" cy="213271"/>
+          </a:xfrm>
+          <a:prstGeom prst="rect">
+            <a:avLst/>
+          </a:prstGeom>
+          <a:noFill/>
+          <a:ln/>
+        </p:spPr>
+        <p:txBody>
+          <a:bodyPr wrap="square" lIns="0" tIns="0" rIns="0" bIns="0" rtlCol="0" anchor="t"/>
+          <a:lstStyle/>
+          <a:p>
+            <a:pPr algn="l" indent="0" marL="0">
+              <a:lnSpc>
+                <a:spcPts val="1680"/>
+              </a:lnSpc>
+              <a:spcBef>
+                <a:spcPts val="300"/>
+              </a:spcBef>
+              <a:spcAft>
+                <a:spcPts val="300"/>
+              </a:spcAft>
+              <a:buNone/>
+            </a:pPr>
+            <a:r>
+              <a:rPr lang="en-US" sz="1200" dirty="0">
+                <a:solidFill>
+                  <a:srgbClr val="1C2833"/>
+                </a:solidFill>
+                <a:latin typeface="Arial" pitchFamily="34" charset="0"/>
+                <a:ea typeface="Arial" pitchFamily="34" charset="-122"/>
+                <a:cs typeface="Arial" pitchFamily="34" charset="-120"/>
+              </a:rPr>
+              <a:t>Middle ·  · IKS Curriculum</a:t>
+            </a:r>
+            <a:endParaRPr lang="en-US" sz="1200" dirty="0"/>
+          </a:p>
+        </p:txBody>
+      </p:sp>
+    </p:spTree>
+  </p:cSld>
+  <p:clrMapOvr>
+    <a:masterClrMapping/>
+  </p:clrMapOvr>
+</p:sld>
+</file>
+
+<file path=ppt/slides/slide15.xml><?xml version="1.0" encoding="utf-8"?>
+<p:sld xmlns:a="http://schemas.openxmlformats.org/drawingml/2006/main" xmlns:r="http://schemas.openxmlformats.org/officeDocument/2006/relationships" xmlns:p="http://schemas.openxmlformats.org/presentationml/2006/main">
+  <p:cSld name="Slide 15">
+    <p:bg>
+      <p:bgPr>
+        <a:solidFill>
+          <a:srgbClr val="FFFFFF"/>
+        </a:solidFill>
+      </p:bgPr>
+    </p:bg>
+    <p:spTree>
+      <p:nvGrpSpPr>
+        <p:cNvPr id="1" name=""/>
+        <p:cNvGrpSpPr/>
+        <p:nvPr/>
+      </p:nvGrpSpPr>
+      <p:grpSpPr>
+        <a:xfrm>
+          <a:off x="0" y="0"/>
+          <a:ext cx="0" cy="0"/>
+          <a:chOff x="0" y="0"/>
+          <a:chExt cx="0" cy="0"/>
+        </a:xfrm>
+      </p:grpSpPr>
+      <p:sp>
+        <p:nvSpPr>
+          <p:cNvPr id="2" name="Text 0"/>
+          <p:cNvSpPr/>
+          <p:nvPr/>
+        </p:nvSpPr>
+        <p:spPr>
+          <a:xfrm>
+            <a:off x="0" y="0"/>
+            <a:ext cx="9144000" cy="101501"/>
+          </a:xfrm>
+          <a:prstGeom prst="rect">
+            <a:avLst/>
+          </a:prstGeom>
+          <a:solidFill>
+            <a:srgbClr val="277884"/>
+          </a:solidFill>
+          <a:ln/>
+        </p:spPr>
+        <p:txBody>
+          <a:bodyPr wrap="square" rtlCol="0" anchor="ctr"/>
+          <a:lstStyle/>
+          <a:p>
+            <a:pPr indent="0" marL="0">
+              <a:buNone/>
+            </a:pPr>
+            <a:endParaRPr lang="en-US" dirty="0"/>
+          </a:p>
+        </p:txBody>
+      </p:sp>
+      <p:sp>
+        <p:nvSpPr>
+          <p:cNvPr id="3" name="Text 1"/>
+          <p:cNvSpPr/>
+          <p:nvPr/>
+        </p:nvSpPr>
+        <p:spPr>
+          <a:xfrm>
+            <a:off x="406301" y="457051"/>
+            <a:ext cx="8498026" cy="274290"/>
+          </a:xfrm>
+          <a:prstGeom prst="rect">
+            <a:avLst/>
+          </a:prstGeom>
+          <a:noFill/>
+          <a:ln/>
+        </p:spPr>
+        <p:txBody>
+          <a:bodyPr wrap="square" lIns="0" tIns="0" rIns="0" bIns="0" rtlCol="0" anchor="t"/>
+          <a:lstStyle/>
+          <a:p>
+            <a:pPr algn="l" indent="0" marL="0">
+              <a:lnSpc>
+                <a:spcPts val="2160"/>
+              </a:lnSpc>
+              <a:spcBef>
+                <a:spcPts val="600"/>
+              </a:spcBef>
+              <a:spcAft>
+                <a:spcPts val="800"/>
+              </a:spcAft>
+              <a:buNone/>
+            </a:pPr>
+            <a:r>
+              <a:rPr lang="en-US" sz="1800" b="1" dirty="0">
+                <a:solidFill>
+                  <a:srgbClr val="FE4447"/>
+                </a:solidFill>
+                <a:latin typeface="Georgia" pitchFamily="34" charset="0"/>
+                <a:ea typeface="Georgia" pitchFamily="34" charset="-122"/>
+                <a:cs typeface="Georgia" pitchFamily="34" charset="-120"/>
+              </a:rPr>
+              <a:t>Student-facing content</a:t>
+            </a:r>
+            <a:endParaRPr lang="en-US" sz="1800" dirty="0"/>
+          </a:p>
+        </p:txBody>
+      </p:sp>
+      <p:sp>
+        <p:nvSpPr>
+          <p:cNvPr id="4" name="Text 2"/>
+          <p:cNvSpPr/>
+          <p:nvPr/>
+        </p:nvSpPr>
+        <p:spPr>
+          <a:xfrm>
+            <a:off x="406301" y="883593"/>
+            <a:ext cx="8331398" cy="2457450"/>
+          </a:xfrm>
+          <a:prstGeom prst="rect">
+            <a:avLst/>
+          </a:prstGeom>
+          <a:solidFill>
+            <a:srgbClr val="F4F8F9"/>
+          </a:solidFill>
+          <a:ln/>
+        </p:spPr>
+        <p:txBody>
+          <a:bodyPr wrap="square" rtlCol="0" anchor="ctr"/>
+          <a:lstStyle/>
+          <a:p>
+            <a:pPr indent="0" marL="0">
+              <a:buNone/>
+            </a:pPr>
+            <a:endParaRPr lang="en-US" dirty="0"/>
+          </a:p>
+        </p:txBody>
+      </p:sp>
+      <p:sp>
+        <p:nvSpPr>
+          <p:cNvPr id="5" name="Shape 3"/>
+          <p:cNvSpPr/>
+          <p:nvPr/>
+        </p:nvSpPr>
+        <p:spPr>
+          <a:xfrm>
+            <a:off x="434876" y="883593"/>
+            <a:ext cx="0" cy="2457450"/>
+          </a:xfrm>
+          <a:prstGeom prst="line">
+            <a:avLst/>
+          </a:prstGeom>
+          <a:noFill/>
+          <a:ln w="57150">
+            <a:solidFill>
+              <a:srgbClr val="FE4447"/>
+            </a:solidFill>
+            <a:prstDash val="solid"/>
+          </a:ln>
+        </p:spPr>
+      </p:sp>
+      <p:sp>
+        <p:nvSpPr>
+          <p:cNvPr id="6" name="Text 4"/>
+          <p:cNvSpPr/>
+          <p:nvPr/>
+        </p:nvSpPr>
+        <p:spPr>
+          <a:xfrm>
+            <a:off x="692051" y="1074093"/>
+            <a:ext cx="7973389" cy="230981"/>
+          </a:xfrm>
+          <a:prstGeom prst="rect">
+            <a:avLst/>
+          </a:prstGeom>
+          <a:noFill/>
+          <a:ln/>
+        </p:spPr>
+        <p:txBody>
+          <a:bodyPr wrap="square" lIns="0" tIns="0" rIns="0" bIns="0" rtlCol="0" anchor="t"/>
+          <a:lstStyle/>
+          <a:p>
+            <a:pPr algn="l" indent="0" marL="0">
+              <a:lnSpc>
+                <a:spcPts val="1820"/>
+              </a:lnSpc>
+              <a:spcBef>
+                <a:spcPts val="300"/>
+              </a:spcBef>
+              <a:spcAft>
+                <a:spcPts val="300"/>
+              </a:spcAft>
+              <a:buNone/>
+            </a:pPr>
+            <a:r>
+              <a:rPr lang="en-US" sz="1300" b="1" i="1" dirty="0">
+                <a:solidFill>
+                  <a:srgbClr val="1C2833"/>
+                </a:solidFill>
+                <a:latin typeface="Georgia" pitchFamily="34" charset="0"/>
+                <a:ea typeface="Georgia" pitchFamily="34" charset="-122"/>
+                <a:cs typeface="Georgia" pitchFamily="34" charset="-120"/>
+              </a:rPr>
+              <a:t>Prāṇāyāma — the 4th limb</a:t>
+            </a:r>
+            <a:endParaRPr lang="en-US" sz="1300" dirty="0"/>
+          </a:p>
+        </p:txBody>
+      </p:sp>
+      <p:sp>
+        <p:nvSpPr>
+          <p:cNvPr id="7" name="Text 5"/>
+          <p:cNvSpPr/>
+          <p:nvPr/>
+        </p:nvSpPr>
+        <p:spPr>
+          <a:xfrm>
+            <a:off x="692051" y="1343174"/>
+            <a:ext cx="7973389" cy="230981"/>
+          </a:xfrm>
+          <a:prstGeom prst="rect">
+            <a:avLst/>
+          </a:prstGeom>
+          <a:noFill/>
+          <a:ln/>
+        </p:spPr>
+        <p:txBody>
+          <a:bodyPr wrap="square" lIns="0" tIns="0" rIns="0" bIns="0" rtlCol="0" anchor="t"/>
+          <a:lstStyle/>
+          <a:p>
+            <a:pPr algn="l" indent="0" marL="0">
+              <a:lnSpc>
+                <a:spcPts val="1820"/>
+              </a:lnSpc>
+              <a:spcBef>
+                <a:spcPts val="300"/>
+              </a:spcBef>
+              <a:spcAft>
+                <a:spcPts val="300"/>
+              </a:spcAft>
+              <a:buNone/>
+            </a:pPr>
+            <a:r>
+              <a:rPr lang="en-US" sz="1300" i="1" dirty="0">
+                <a:solidFill>
+                  <a:srgbClr val="1C2833"/>
+                </a:solidFill>
+                <a:latin typeface="Georgia" pitchFamily="34" charset="0"/>
+                <a:ea typeface="Georgia" pitchFamily="34" charset="-122"/>
+                <a:cs typeface="Georgia" pitchFamily="34" charset="-120"/>
+              </a:rPr>
+              <a:t>prāṇa</a:t>
+            </a:r>
+            <a:pPr algn="l" indent="0" marL="0">
+              <a:lnSpc>
+                <a:spcPts val="1820"/>
+              </a:lnSpc>
+              <a:spcBef>
+                <a:spcPts val="300"/>
+              </a:spcBef>
+              <a:spcAft>
+                <a:spcPts val="300"/>
+              </a:spcAft>
+              <a:buNone/>
+            </a:pPr>
+            <a:r>
+              <a:rPr lang="en-US" sz="1300" dirty="0">
+                <a:solidFill>
+                  <a:srgbClr val="1C2833"/>
+                </a:solidFill>
+                <a:latin typeface="Georgia" pitchFamily="34" charset="0"/>
+                <a:ea typeface="Georgia" pitchFamily="34" charset="-122"/>
+                <a:cs typeface="Georgia" pitchFamily="34" charset="-120"/>
+              </a:rPr>
+              <a:t> = breath, vital energy. </a:t>
+            </a:r>
+            <a:pPr algn="l" indent="0" marL="0">
+              <a:lnSpc>
+                <a:spcPts val="1820"/>
+              </a:lnSpc>
+              <a:spcBef>
+                <a:spcPts val="300"/>
+              </a:spcBef>
+              <a:spcAft>
+                <a:spcPts val="300"/>
+              </a:spcAft>
+              <a:buNone/>
+            </a:pPr>
+            <a:r>
+              <a:rPr lang="en-US" sz="1300" i="1" dirty="0">
+                <a:solidFill>
+                  <a:srgbClr val="1C2833"/>
+                </a:solidFill>
+                <a:latin typeface="Georgia" pitchFamily="34" charset="0"/>
+                <a:ea typeface="Georgia" pitchFamily="34" charset="-122"/>
+                <a:cs typeface="Georgia" pitchFamily="34" charset="-120"/>
+              </a:rPr>
+              <a:t>āyāma</a:t>
+            </a:r>
+            <a:pPr algn="l" indent="0" marL="0">
+              <a:lnSpc>
+                <a:spcPts val="1820"/>
+              </a:lnSpc>
+              <a:spcBef>
+                <a:spcPts val="300"/>
+              </a:spcBef>
+              <a:spcAft>
+                <a:spcPts val="300"/>
+              </a:spcAft>
+              <a:buNone/>
+            </a:pPr>
+            <a:r>
+              <a:rPr lang="en-US" sz="1300" dirty="0">
+                <a:solidFill>
+                  <a:srgbClr val="1C2833"/>
+                </a:solidFill>
+                <a:latin typeface="Georgia" pitchFamily="34" charset="0"/>
+                <a:ea typeface="Georgia" pitchFamily="34" charset="-122"/>
+                <a:cs typeface="Georgia" pitchFamily="34" charset="-120"/>
+              </a:rPr>
+              <a:t> = extension, regulation.</a:t>
+            </a:r>
+            <a:endParaRPr lang="en-US" sz="1300" dirty="0"/>
+          </a:p>
+        </p:txBody>
+      </p:sp>
+      <p:sp>
+        <p:nvSpPr>
+          <p:cNvPr id="8" name="Text 6"/>
+          <p:cNvSpPr/>
+          <p:nvPr/>
+        </p:nvSpPr>
+        <p:spPr>
+          <a:xfrm>
+            <a:off x="692051" y="1612255"/>
+            <a:ext cx="7973389" cy="230981"/>
+          </a:xfrm>
+          <a:prstGeom prst="rect">
+            <a:avLst/>
+          </a:prstGeom>
+          <a:noFill/>
+          <a:ln/>
+        </p:spPr>
+        <p:txBody>
+          <a:bodyPr wrap="square" lIns="0" tIns="0" rIns="0" bIns="0" rtlCol="0" anchor="t"/>
+          <a:lstStyle/>
+          <a:p>
+            <a:pPr algn="l" indent="0" marL="0">
+              <a:lnSpc>
+                <a:spcPts val="1820"/>
+              </a:lnSpc>
+              <a:spcBef>
+                <a:spcPts val="300"/>
+              </a:spcBef>
+              <a:spcAft>
+                <a:spcPts val="300"/>
+              </a:spcAft>
+              <a:buNone/>
+            </a:pPr>
+            <a:r>
+              <a:rPr lang="en-US" sz="1300" dirty="0">
+                <a:solidFill>
+                  <a:srgbClr val="1C2833"/>
+                </a:solidFill>
+                <a:latin typeface="Georgia" pitchFamily="34" charset="0"/>
+                <a:ea typeface="Georgia" pitchFamily="34" charset="-122"/>
+                <a:cs typeface="Georgia" pitchFamily="34" charset="-120"/>
+              </a:rPr>
+              <a:t>Today: </a:t>
+            </a:r>
+            <a:pPr algn="l" indent="0" marL="0">
+              <a:lnSpc>
+                <a:spcPts val="1820"/>
+              </a:lnSpc>
+              <a:spcBef>
+                <a:spcPts val="300"/>
+              </a:spcBef>
+              <a:spcAft>
+                <a:spcPts val="300"/>
+              </a:spcAft>
+              <a:buNone/>
+            </a:pPr>
+            <a:r>
+              <a:rPr lang="en-US" sz="1300" b="1" i="1" dirty="0">
+                <a:solidFill>
+                  <a:srgbClr val="1C2833"/>
+                </a:solidFill>
+                <a:latin typeface="Georgia" pitchFamily="34" charset="0"/>
+                <a:ea typeface="Georgia" pitchFamily="34" charset="-122"/>
+                <a:cs typeface="Georgia" pitchFamily="34" charset="-120"/>
+              </a:rPr>
+              <a:t>two practices</a:t>
+            </a:r>
+            <a:pPr algn="l" indent="0" marL="0">
+              <a:lnSpc>
+                <a:spcPts val="1820"/>
+              </a:lnSpc>
+              <a:spcBef>
+                <a:spcPts val="300"/>
+              </a:spcBef>
+              <a:spcAft>
+                <a:spcPts val="300"/>
+              </a:spcAft>
+              <a:buNone/>
+            </a:pPr>
+            <a:r>
+              <a:rPr lang="en-US" sz="1300" dirty="0">
+                <a:solidFill>
+                  <a:srgbClr val="1C2833"/>
+                </a:solidFill>
+                <a:latin typeface="Georgia" pitchFamily="34" charset="0"/>
+                <a:ea typeface="Georgia" pitchFamily="34" charset="-122"/>
+                <a:cs typeface="Georgia" pitchFamily="34" charset="-120"/>
+              </a:rPr>
+              <a:t>.</a:t>
+            </a:r>
+            <a:endParaRPr lang="en-US" sz="1300" dirty="0"/>
+          </a:p>
+        </p:txBody>
+      </p:sp>
+      <p:sp>
+        <p:nvSpPr>
+          <p:cNvPr id="9" name="Text 7"/>
+          <p:cNvSpPr/>
+          <p:nvPr/>
+        </p:nvSpPr>
+        <p:spPr>
+          <a:xfrm>
+            <a:off x="692051" y="1881336"/>
+            <a:ext cx="7973389" cy="230981"/>
+          </a:xfrm>
+          <a:prstGeom prst="rect">
+            <a:avLst/>
+          </a:prstGeom>
+          <a:noFill/>
+          <a:ln/>
+        </p:spPr>
+        <p:txBody>
+          <a:bodyPr wrap="square" lIns="0" tIns="0" rIns="0" bIns="0" rtlCol="0" anchor="t"/>
+          <a:lstStyle/>
+          <a:p>
+            <a:pPr algn="l" indent="0" marL="0">
+              <a:lnSpc>
+                <a:spcPts val="1820"/>
+              </a:lnSpc>
+              <a:spcBef>
+                <a:spcPts val="300"/>
+              </a:spcBef>
+              <a:spcAft>
+                <a:spcPts val="300"/>
+              </a:spcAft>
+              <a:buNone/>
+            </a:pPr>
+            <a:r>
+              <a:rPr lang="en-US" sz="1300" b="1" i="1" dirty="0">
+                <a:solidFill>
+                  <a:srgbClr val="1C2833"/>
+                </a:solidFill>
+                <a:latin typeface="Georgia" pitchFamily="34" charset="0"/>
+                <a:ea typeface="Georgia" pitchFamily="34" charset="-122"/>
+                <a:cs typeface="Georgia" pitchFamily="34" charset="-120"/>
+              </a:rPr>
+              <a:t>Natural breath, 5 min.</a:t>
+            </a:r>
+            <a:pPr algn="l" indent="0" marL="0">
+              <a:lnSpc>
+                <a:spcPts val="1820"/>
+              </a:lnSpc>
+              <a:spcBef>
+                <a:spcPts val="300"/>
+              </a:spcBef>
+              <a:spcAft>
+                <a:spcPts val="300"/>
+              </a:spcAft>
+              <a:buNone/>
+            </a:pPr>
+            <a:r>
+              <a:rPr lang="en-US" sz="1300" dirty="0">
+                <a:solidFill>
+                  <a:srgbClr val="1C2833"/>
+                </a:solidFill>
+                <a:latin typeface="Georgia" pitchFamily="34" charset="0"/>
+                <a:ea typeface="Georgia" pitchFamily="34" charset="-122"/>
+                <a:cs typeface="Georgia" pitchFamily="34" charset="-120"/>
+              </a:rPr>
+              <a:t> Don't change anything. Just observe.</a:t>
+            </a:r>
+            <a:endParaRPr lang="en-US" sz="1300" dirty="0"/>
+          </a:p>
+        </p:txBody>
+      </p:sp>
+      <p:sp>
+        <p:nvSpPr>
+          <p:cNvPr id="10" name="Text 8"/>
+          <p:cNvSpPr/>
+          <p:nvPr/>
+        </p:nvSpPr>
+        <p:spPr>
+          <a:xfrm>
+            <a:off x="692051" y="2150418"/>
+            <a:ext cx="7973389" cy="230981"/>
+          </a:xfrm>
+          <a:prstGeom prst="rect">
+            <a:avLst/>
+          </a:prstGeom>
+          <a:noFill/>
+          <a:ln/>
+        </p:spPr>
+        <p:txBody>
+          <a:bodyPr wrap="square" lIns="0" tIns="0" rIns="0" bIns="0" rtlCol="0" anchor="t"/>
+          <a:lstStyle/>
+          <a:p>
+            <a:pPr algn="l" indent="0" marL="0">
+              <a:lnSpc>
+                <a:spcPts val="1820"/>
+              </a:lnSpc>
+              <a:spcBef>
+                <a:spcPts val="300"/>
+              </a:spcBef>
+              <a:spcAft>
+                <a:spcPts val="300"/>
+              </a:spcAft>
+              <a:buNone/>
+            </a:pPr>
+            <a:r>
+              <a:rPr lang="en-US" sz="1300" b="1" i="1" dirty="0">
+                <a:solidFill>
+                  <a:srgbClr val="1C2833"/>
+                </a:solidFill>
+                <a:latin typeface="Georgia" pitchFamily="34" charset="0"/>
+                <a:ea typeface="Georgia" pitchFamily="34" charset="-122"/>
+                <a:cs typeface="Georgia" pitchFamily="34" charset="-120"/>
+              </a:rPr>
+              <a:t>Counted breath, 5 min.</a:t>
+            </a:r>
+            <a:pPr algn="l" indent="0" marL="0">
+              <a:lnSpc>
+                <a:spcPts val="1820"/>
+              </a:lnSpc>
+              <a:spcBef>
+                <a:spcPts val="300"/>
+              </a:spcBef>
+              <a:spcAft>
+                <a:spcPts val="300"/>
+              </a:spcAft>
+              <a:buNone/>
+            </a:pPr>
+            <a:r>
+              <a:rPr lang="en-US" sz="1300" dirty="0">
+                <a:solidFill>
+                  <a:srgbClr val="1C2833"/>
+                </a:solidFill>
+                <a:latin typeface="Georgia" pitchFamily="34" charset="0"/>
+                <a:ea typeface="Georgia" pitchFamily="34" charset="-122"/>
+                <a:cs typeface="Georgia" pitchFamily="34" charset="-120"/>
+              </a:rPr>
+              <a:t> Inhale 4 counts. Exhale 4 counts. Continuous, smooth.</a:t>
+            </a:r>
+            <a:endParaRPr lang="en-US" sz="1300" dirty="0"/>
+          </a:p>
+        </p:txBody>
+      </p:sp>
+      <p:sp>
+        <p:nvSpPr>
+          <p:cNvPr id="11" name="Text 9"/>
+          <p:cNvSpPr/>
+          <p:nvPr/>
+        </p:nvSpPr>
+        <p:spPr>
+          <a:xfrm>
+            <a:off x="692051" y="2419499"/>
+            <a:ext cx="7973389" cy="461963"/>
+          </a:xfrm>
+          <a:prstGeom prst="rect">
+            <a:avLst/>
+          </a:prstGeom>
+          <a:noFill/>
+          <a:ln/>
+        </p:spPr>
+        <p:txBody>
+          <a:bodyPr wrap="square" lIns="0" tIns="0" rIns="0" bIns="0" rtlCol="0" anchor="t"/>
+          <a:lstStyle/>
+          <a:p>
+            <a:pPr algn="l" indent="0" marL="0">
+              <a:lnSpc>
+                <a:spcPts val="1820"/>
+              </a:lnSpc>
+              <a:spcBef>
+                <a:spcPts val="300"/>
+              </a:spcBef>
+              <a:spcAft>
+                <a:spcPts val="300"/>
+              </a:spcAft>
+              <a:buNone/>
+            </a:pPr>
+            <a:r>
+              <a:rPr lang="en-US" sz="1300" b="1" i="1" dirty="0">
+                <a:solidFill>
+                  <a:srgbClr val="1C2833"/>
+                </a:solidFill>
+                <a:latin typeface="Georgia" pitchFamily="34" charset="0"/>
+                <a:ea typeface="Georgia" pitchFamily="34" charset="-122"/>
+                <a:cs typeface="Georgia" pitchFamily="34" charset="-120"/>
+              </a:rPr>
+              <a:t>What we DON'T do at this level:</a:t>
+            </a:r>
+            <a:pPr algn="l" indent="0" marL="0">
+              <a:lnSpc>
+                <a:spcPts val="1820"/>
+              </a:lnSpc>
+              <a:spcBef>
+                <a:spcPts val="300"/>
+              </a:spcBef>
+              <a:spcAft>
+                <a:spcPts val="300"/>
+              </a:spcAft>
+              <a:buNone/>
+            </a:pPr>
+            <a:r>
+              <a:rPr lang="en-US" sz="1300" dirty="0">
+                <a:solidFill>
+                  <a:srgbClr val="1C2833"/>
+                </a:solidFill>
+                <a:latin typeface="Georgia" pitchFamily="34" charset="0"/>
+                <a:ea typeface="Georgia" pitchFamily="34" charset="-122"/>
+                <a:cs typeface="Georgia" pitchFamily="34" charset="-120"/>
+              </a:rPr>
+              <a:t> breath retention, forceful breathing, bellows breath, skull shining. Those require trained guidance.</a:t>
+            </a:r>
+            <a:endParaRPr lang="en-US" sz="1300" dirty="0"/>
+          </a:p>
+        </p:txBody>
+      </p:sp>
+      <p:sp>
+        <p:nvSpPr>
+          <p:cNvPr id="12" name="Text 10"/>
+          <p:cNvSpPr/>
+          <p:nvPr/>
+        </p:nvSpPr>
+        <p:spPr>
+          <a:xfrm>
+            <a:off x="692051" y="2919561"/>
+            <a:ext cx="7973389" cy="230981"/>
+          </a:xfrm>
+          <a:prstGeom prst="rect">
+            <a:avLst/>
+          </a:prstGeom>
+          <a:noFill/>
+          <a:ln/>
+        </p:spPr>
+        <p:txBody>
+          <a:bodyPr wrap="square" lIns="0" tIns="0" rIns="0" bIns="0" rtlCol="0" anchor="t"/>
+          <a:lstStyle/>
+          <a:p>
+            <a:pPr algn="l" indent="0" marL="0">
+              <a:lnSpc>
+                <a:spcPts val="1820"/>
+              </a:lnSpc>
+              <a:spcBef>
+                <a:spcPts val="300"/>
+              </a:spcBef>
+              <a:spcAft>
+                <a:spcPts val="300"/>
+              </a:spcAft>
+              <a:buNone/>
+            </a:pPr>
+            <a:r>
+              <a:rPr lang="en-US" sz="1300" dirty="0">
+                <a:solidFill>
+                  <a:srgbClr val="1C2833"/>
+                </a:solidFill>
+                <a:latin typeface="Georgia" pitchFamily="34" charset="0"/>
+                <a:ea typeface="Georgia" pitchFamily="34" charset="-122"/>
+                <a:cs typeface="Georgia" pitchFamily="34" charset="-120"/>
+              </a:rPr>
+              <a:t>&gt; "</a:t>
+            </a:r>
+            <a:pPr algn="l" indent="0" marL="0">
+              <a:lnSpc>
+                <a:spcPts val="1820"/>
+              </a:lnSpc>
+              <a:spcBef>
+                <a:spcPts val="300"/>
+              </a:spcBef>
+              <a:spcAft>
+                <a:spcPts val="300"/>
+              </a:spcAft>
+              <a:buNone/>
+            </a:pPr>
+            <a:r>
+              <a:rPr lang="en-US" sz="1300" i="1" dirty="0">
+                <a:solidFill>
+                  <a:srgbClr val="1C2833"/>
+                </a:solidFill>
+                <a:latin typeface="Georgia" pitchFamily="34" charset="0"/>
+                <a:ea typeface="Georgia" pitchFamily="34" charset="-122"/>
+                <a:cs typeface="Georgia" pitchFamily="34" charset="-120"/>
+              </a:rPr>
+              <a:t>śanair</a:t>
+            </a:r>
+            <a:pPr algn="l" indent="0" marL="0">
+              <a:lnSpc>
+                <a:spcPts val="1820"/>
+              </a:lnSpc>
+              <a:spcBef>
+                <a:spcPts val="300"/>
+              </a:spcBef>
+              <a:spcAft>
+                <a:spcPts val="300"/>
+              </a:spcAft>
+              <a:buNone/>
+            </a:pPr>
+            <a:r>
+              <a:rPr lang="en-US" sz="1300" dirty="0">
+                <a:solidFill>
+                  <a:srgbClr val="1C2833"/>
+                </a:solidFill>
+                <a:latin typeface="Georgia" pitchFamily="34" charset="0"/>
+                <a:ea typeface="Georgia" pitchFamily="34" charset="-122"/>
+                <a:cs typeface="Georgia" pitchFamily="34" charset="-120"/>
+              </a:rPr>
+              <a:t> — gradually" — Śrīmad-Bhāgavatam 4.8.44</a:t>
+            </a:r>
+            <a:endParaRPr lang="en-US" sz="1300" dirty="0"/>
+          </a:p>
+        </p:txBody>
+      </p:sp>
+      <p:sp>
+        <p:nvSpPr>
+          <p:cNvPr id="13" name="Text 11"/>
+          <p:cNvSpPr/>
+          <p:nvPr/>
+        </p:nvSpPr>
+        <p:spPr>
+          <a:xfrm>
+            <a:off x="406301" y="4434929"/>
+            <a:ext cx="8498026" cy="213271"/>
+          </a:xfrm>
+          <a:prstGeom prst="rect">
+            <a:avLst/>
+          </a:prstGeom>
+          <a:noFill/>
+          <a:ln/>
+        </p:spPr>
+        <p:txBody>
+          <a:bodyPr wrap="square" lIns="0" tIns="0" rIns="0" bIns="0" rtlCol="0" anchor="t"/>
+          <a:lstStyle/>
+          <a:p>
+            <a:pPr algn="l" indent="0" marL="0">
+              <a:lnSpc>
+                <a:spcPts val="1680"/>
+              </a:lnSpc>
+              <a:spcBef>
+                <a:spcPts val="300"/>
+              </a:spcBef>
+              <a:spcAft>
+                <a:spcPts val="300"/>
+              </a:spcAft>
+              <a:buNone/>
+            </a:pPr>
+            <a:r>
+              <a:rPr lang="en-US" sz="1200" dirty="0">
+                <a:solidFill>
+                  <a:srgbClr val="1C2833"/>
+                </a:solidFill>
+                <a:latin typeface="Arial" pitchFamily="34" charset="0"/>
+                <a:ea typeface="Arial" pitchFamily="34" charset="-122"/>
+                <a:cs typeface="Arial" pitchFamily="34" charset="-120"/>
+              </a:rPr>
+              <a:t>Middle ·  · IKS Curriculum</a:t>
+            </a:r>
+            <a:endParaRPr lang="en-US" sz="1200" dirty="0"/>
+          </a:p>
+        </p:txBody>
+      </p:sp>
+    </p:spTree>
+  </p:cSld>
+  <p:clrMapOvr>
+    <a:masterClrMapping/>
+  </p:clrMapOvr>
+</p:sld>
+</file>
+
+<file path=ppt/slides/slide16.xml><?xml version="1.0" encoding="utf-8"?>
+<p:sld xmlns:a="http://schemas.openxmlformats.org/drawingml/2006/main" xmlns:r="http://schemas.openxmlformats.org/officeDocument/2006/relationships" xmlns:p="http://schemas.openxmlformats.org/presentationml/2006/main">
+  <p:cSld name="Slide 16">
+    <p:bg>
+      <p:bgPr>
+        <a:solidFill>
+          <a:srgbClr val="FFFFFF"/>
+        </a:solidFill>
+      </p:bgPr>
+    </p:bg>
+    <p:spTree>
+      <p:nvGrpSpPr>
+        <p:cNvPr id="1" name=""/>
+        <p:cNvGrpSpPr/>
+        <p:nvPr/>
+      </p:nvGrpSpPr>
+      <p:grpSpPr>
+        <a:xfrm>
+          <a:off x="0" y="0"/>
+          <a:ext cx="0" cy="0"/>
+          <a:chOff x="0" y="0"/>
+          <a:chExt cx="0" cy="0"/>
+        </a:xfrm>
+      </p:grpSpPr>
+      <p:sp>
+        <p:nvSpPr>
+          <p:cNvPr id="2" name="Text 0"/>
+          <p:cNvSpPr/>
+          <p:nvPr/>
+        </p:nvSpPr>
+        <p:spPr>
+          <a:xfrm>
+            <a:off x="0" y="0"/>
+            <a:ext cx="9144000" cy="101501"/>
+          </a:xfrm>
+          <a:prstGeom prst="rect">
+            <a:avLst/>
+          </a:prstGeom>
+          <a:solidFill>
+            <a:srgbClr val="277884"/>
+          </a:solidFill>
+          <a:ln/>
+        </p:spPr>
+        <p:txBody>
+          <a:bodyPr wrap="square" rtlCol="0" anchor="ctr"/>
+          <a:lstStyle/>
+          <a:p>
+            <a:pPr indent="0" marL="0">
+              <a:buNone/>
+            </a:pPr>
+            <a:endParaRPr lang="en-US" dirty="0"/>
+          </a:p>
+        </p:txBody>
+      </p:sp>
+      <p:sp>
+        <p:nvSpPr>
+          <p:cNvPr id="3" name="Text 1"/>
+          <p:cNvSpPr/>
+          <p:nvPr/>
+        </p:nvSpPr>
+        <p:spPr>
+          <a:xfrm>
+            <a:off x="406301" y="457051"/>
+            <a:ext cx="8498026" cy="274290"/>
+          </a:xfrm>
+          <a:prstGeom prst="rect">
+            <a:avLst/>
+          </a:prstGeom>
+          <a:noFill/>
+          <a:ln/>
+        </p:spPr>
+        <p:txBody>
+          <a:bodyPr wrap="square" lIns="0" tIns="0" rIns="0" bIns="0" rtlCol="0" anchor="t"/>
+          <a:lstStyle/>
+          <a:p>
+            <a:pPr algn="l" indent="0" marL="0">
+              <a:lnSpc>
+                <a:spcPts val="2160"/>
+              </a:lnSpc>
+              <a:spcBef>
+                <a:spcPts val="600"/>
+              </a:spcBef>
+              <a:spcAft>
+                <a:spcPts val="800"/>
+              </a:spcAft>
+              <a:buNone/>
+            </a:pPr>
+            <a:r>
+              <a:rPr lang="en-US" sz="1800" b="1" dirty="0">
+                <a:solidFill>
+                  <a:srgbClr val="FE4447"/>
+                </a:solidFill>
+                <a:latin typeface="Georgia" pitchFamily="34" charset="0"/>
+                <a:ea typeface="Georgia" pitchFamily="34" charset="-122"/>
+                <a:cs typeface="Georgia" pitchFamily="34" charset="-120"/>
+              </a:rPr>
+              <a:t>Homework</a:t>
+            </a:r>
+            <a:endParaRPr lang="en-US" sz="1800" dirty="0"/>
+          </a:p>
+        </p:txBody>
+      </p:sp>
+      <p:sp>
+        <p:nvSpPr>
+          <p:cNvPr id="4" name="Text 2"/>
+          <p:cNvSpPr/>
+          <p:nvPr/>
+        </p:nvSpPr>
+        <p:spPr>
+          <a:xfrm>
+            <a:off x="634901" y="883593"/>
+            <a:ext cx="8102798" cy="281880"/>
+          </a:xfrm>
+          <a:prstGeom prst="rect">
+            <a:avLst/>
+          </a:prstGeom>
+          <a:noFill/>
+          <a:ln/>
+        </p:spPr>
+        <p:txBody>
+          <a:bodyPr wrap="square" lIns="0" tIns="0" rIns="0" bIns="0" rtlCol="0" anchor="t"/>
+          <a:lstStyle/>
+          <a:p>
+            <a:pPr algn="l" marL="342900" indent="-342900">
+              <a:lnSpc>
+                <a:spcPts val="1620"/>
+              </a:lnSpc>
+              <a:spcAft>
+                <a:spcPts val="300"/>
+              </a:spcAft>
+              <a:buSzPct val="100000"/>
+              <a:buChar char="•"/>
+            </a:pPr>
+            <a:r>
+              <a:rPr lang="en-US" sz="1200" dirty="0">
+                <a:solidFill>
+                  <a:srgbClr val="1C2833"/>
+                </a:solidFill>
+                <a:latin typeface="Arial" pitchFamily="34" charset="0"/>
+                <a:ea typeface="Arial" pitchFamily="34" charset="-122"/>
+                <a:cs typeface="Arial" pitchFamily="34" charset="-120"/>
+              </a:rPr>
+              <a:t>Practise the counted breath for 3 minutes before bed tonight. Note in your workbook: "I felt _____ before, _____ after."</a:t>
+            </a:r>
+            <a:endParaRPr lang="en-US" sz="1200" dirty="0"/>
+          </a:p>
+        </p:txBody>
+      </p:sp>
+      <p:sp>
+        <p:nvSpPr>
+          <p:cNvPr id="5" name="Text 3"/>
+          <p:cNvSpPr/>
+          <p:nvPr/>
+        </p:nvSpPr>
+        <p:spPr>
+          <a:xfrm>
+            <a:off x="406301" y="4434929"/>
+            <a:ext cx="8498026" cy="213271"/>
+          </a:xfrm>
+          <a:prstGeom prst="rect">
+            <a:avLst/>
+          </a:prstGeom>
+          <a:noFill/>
+          <a:ln/>
+        </p:spPr>
+        <p:txBody>
+          <a:bodyPr wrap="square" lIns="0" tIns="0" rIns="0" bIns="0" rtlCol="0" anchor="t"/>
+          <a:lstStyle/>
+          <a:p>
+            <a:pPr algn="l" indent="0" marL="0">
+              <a:lnSpc>
+                <a:spcPts val="1680"/>
+              </a:lnSpc>
+              <a:spcBef>
+                <a:spcPts val="300"/>
+              </a:spcBef>
+              <a:spcAft>
+                <a:spcPts val="300"/>
+              </a:spcAft>
+              <a:buNone/>
+            </a:pPr>
+            <a:r>
+              <a:rPr lang="en-US" sz="1200" dirty="0">
+                <a:solidFill>
+                  <a:srgbClr val="1C2833"/>
+                </a:solidFill>
+                <a:latin typeface="Arial" pitchFamily="34" charset="0"/>
+                <a:ea typeface="Arial" pitchFamily="34" charset="-122"/>
+                <a:cs typeface="Arial" pitchFamily="34" charset="-120"/>
+              </a:rPr>
+              <a:t>Middle ·  · IKS Curriculum</a:t>
+            </a:r>
+            <a:endParaRPr lang="en-US" sz="1200" dirty="0"/>
+          </a:p>
+        </p:txBody>
+      </p:sp>
+    </p:spTree>
+  </p:cSld>
+  <p:clrMapOvr>
+    <a:masterClrMapping/>
+  </p:clrMapOvr>
+</p:sld>
+</file>
+
+<file path=ppt/slides/slide17.xml><?xml version="1.0" encoding="utf-8"?>
+<p:sld xmlns:a="http://schemas.openxmlformats.org/drawingml/2006/main" xmlns:r="http://schemas.openxmlformats.org/officeDocument/2006/relationships" xmlns:p="http://schemas.openxmlformats.org/presentationml/2006/main">
+  <p:cSld name="Slide 17">
+    <p:bg>
+      <p:bgPr>
+        <a:solidFill>
+          <a:srgbClr val="FFFFFF"/>
+        </a:solidFill>
+      </p:bgPr>
+    </p:bg>
+    <p:spTree>
+      <p:nvGrpSpPr>
+        <p:cNvPr id="1" name=""/>
+        <p:cNvGrpSpPr/>
+        <p:nvPr/>
+      </p:nvGrpSpPr>
+      <p:grpSpPr>
+        <a:xfrm>
+          <a:off x="0" y="0"/>
+          <a:ext cx="0" cy="0"/>
+          <a:chOff x="0" y="0"/>
+          <a:chExt cx="0" cy="0"/>
+        </a:xfrm>
+      </p:grpSpPr>
+      <p:sp>
+        <p:nvSpPr>
+          <p:cNvPr id="2" name="Text 0"/>
+          <p:cNvSpPr/>
+          <p:nvPr/>
+        </p:nvSpPr>
+        <p:spPr>
+          <a:xfrm>
+            <a:off x="0" y="0"/>
+            <a:ext cx="9144000" cy="101501"/>
+          </a:xfrm>
+          <a:prstGeom prst="rect">
+            <a:avLst/>
+          </a:prstGeom>
+          <a:solidFill>
+            <a:srgbClr val="277884"/>
+          </a:solidFill>
+          <a:ln/>
+        </p:spPr>
+        <p:txBody>
+          <a:bodyPr wrap="square" rtlCol="0" anchor="ctr"/>
+          <a:lstStyle/>
+          <a:p>
+            <a:pPr indent="0" marL="0">
+              <a:buNone/>
+            </a:pPr>
+            <a:endParaRPr lang="en-US" dirty="0"/>
+          </a:p>
+        </p:txBody>
+      </p:sp>
+      <p:sp>
+        <p:nvSpPr>
+          <p:cNvPr id="3" name="Text 1"/>
+          <p:cNvSpPr/>
+          <p:nvPr/>
+        </p:nvSpPr>
+        <p:spPr>
+          <a:xfrm>
+            <a:off x="406301" y="457051"/>
+            <a:ext cx="8498026" cy="274290"/>
+          </a:xfrm>
+          <a:prstGeom prst="rect">
+            <a:avLst/>
+          </a:prstGeom>
+          <a:noFill/>
+          <a:ln/>
+        </p:spPr>
+        <p:txBody>
+          <a:bodyPr wrap="square" lIns="0" tIns="0" rIns="0" bIns="0" rtlCol="0" anchor="t"/>
+          <a:lstStyle/>
+          <a:p>
+            <a:pPr algn="l" indent="0" marL="0">
+              <a:lnSpc>
+                <a:spcPts val="2160"/>
+              </a:lnSpc>
+              <a:spcBef>
+                <a:spcPts val="600"/>
+              </a:spcBef>
+              <a:spcAft>
+                <a:spcPts val="800"/>
+              </a:spcAft>
+              <a:buNone/>
+            </a:pPr>
+            <a:r>
+              <a:rPr lang="en-US" sz="1800" b="1" dirty="0">
+                <a:solidFill>
+                  <a:srgbClr val="FE4447"/>
+                </a:solidFill>
+                <a:latin typeface="Georgia" pitchFamily="34" charset="0"/>
+                <a:ea typeface="Georgia" pitchFamily="34" charset="-122"/>
+                <a:cs typeface="Georgia" pitchFamily="34" charset="-120"/>
+              </a:rPr>
+              <a:t>Differentiation</a:t>
+            </a:r>
+            <a:endParaRPr lang="en-US" sz="1800" dirty="0"/>
+          </a:p>
+        </p:txBody>
+      </p:sp>
+      <p:sp>
+        <p:nvSpPr>
+          <p:cNvPr id="4" name="Text 2"/>
+          <p:cNvSpPr/>
+          <p:nvPr/>
+        </p:nvSpPr>
+        <p:spPr>
+          <a:xfrm>
+            <a:off x="634901" y="883593"/>
+            <a:ext cx="8102798" cy="525661"/>
+          </a:xfrm>
+          <a:prstGeom prst="rect">
+            <a:avLst/>
+          </a:prstGeom>
+          <a:noFill/>
+          <a:ln/>
+        </p:spPr>
+        <p:txBody>
+          <a:bodyPr wrap="square" lIns="0" tIns="0" rIns="0" bIns="0" rtlCol="0" anchor="t"/>
+          <a:lstStyle/>
+          <a:p>
+            <a:pPr algn="l" marL="342900" indent="-342900">
+              <a:lnSpc>
+                <a:spcPts val="1620"/>
+              </a:lnSpc>
+              <a:spcAft>
+                <a:spcPts val="300"/>
+              </a:spcAft>
+              <a:buSzPct val="100000"/>
+              <a:buChar char="•"/>
+            </a:pPr>
+            <a:r>
+              <a:rPr lang="en-US" sz="1200" b="1" dirty="0">
+                <a:solidFill>
+                  <a:srgbClr val="1C2833"/>
+                </a:solidFill>
+                <a:latin typeface="Arial" pitchFamily="34" charset="0"/>
+                <a:ea typeface="Arial" pitchFamily="34" charset="-122"/>
+                <a:cs typeface="Arial" pitchFamily="34" charset="-120"/>
+              </a:rPr>
+              <a:t>Tier up:</a:t>
+            </a:r>
+            <a:pPr algn="l" indent="0" marL="0">
+              <a:lnSpc>
+                <a:spcPts val="1620"/>
+              </a:lnSpc>
+              <a:spcAft>
+                <a:spcPts val="300"/>
+              </a:spcAft>
+              <a:buNone/>
+            </a:pPr>
+            <a:r>
+              <a:rPr lang="en-US" sz="1200" dirty="0">
+                <a:solidFill>
+                  <a:srgbClr val="1C2833"/>
+                </a:solidFill>
+                <a:latin typeface="Arial" pitchFamily="34" charset="0"/>
+                <a:ea typeface="Arial" pitchFamily="34" charset="-122"/>
+                <a:cs typeface="Arial" pitchFamily="34" charset="-120"/>
+              </a:rPr>
+              <a:t> Extend the counted breath to 5-in, 5-out for the second practice.</a:t>
+            </a:r>
+            <a:endParaRPr lang="en-US" sz="1200" dirty="0"/>
+          </a:p>
+          <a:p>
+            <a:pPr algn="l" marL="342900" indent="-342900">
+              <a:lnSpc>
+                <a:spcPts val="1620"/>
+              </a:lnSpc>
+              <a:spcAft>
+                <a:spcPts val="300"/>
+              </a:spcAft>
+              <a:buSzPct val="100000"/>
+              <a:buChar char="•"/>
+            </a:pPr>
+            <a:r>
+              <a:rPr lang="en-US" sz="1200" b="1" dirty="0">
+                <a:solidFill>
+                  <a:srgbClr val="1C2833"/>
+                </a:solidFill>
+                <a:latin typeface="Arial" pitchFamily="34" charset="0"/>
+                <a:ea typeface="Arial" pitchFamily="34" charset="-122"/>
+                <a:cs typeface="Arial" pitchFamily="34" charset="-120"/>
+              </a:rPr>
+              <a:t>Tier down:</a:t>
+            </a:r>
+            <a:pPr algn="l" indent="0" marL="0">
+              <a:lnSpc>
+                <a:spcPts val="1620"/>
+              </a:lnSpc>
+              <a:spcAft>
+                <a:spcPts val="300"/>
+              </a:spcAft>
+              <a:buNone/>
+            </a:pPr>
+            <a:r>
+              <a:rPr lang="en-US" sz="1200" dirty="0">
+                <a:solidFill>
+                  <a:srgbClr val="1C2833"/>
+                </a:solidFill>
+                <a:latin typeface="Arial" pitchFamily="34" charset="0"/>
+                <a:ea typeface="Arial" pitchFamily="34" charset="-122"/>
+                <a:cs typeface="Arial" pitchFamily="34" charset="-120"/>
+              </a:rPr>
+              <a:t> Just do the natural-breath observation. Skip the counted breath today.</a:t>
+            </a:r>
+            <a:endParaRPr lang="en-US" sz="1200" dirty="0"/>
+          </a:p>
+        </p:txBody>
+      </p:sp>
+      <p:sp>
+        <p:nvSpPr>
+          <p:cNvPr id="5" name="Text 3"/>
+          <p:cNvSpPr/>
+          <p:nvPr/>
+        </p:nvSpPr>
+        <p:spPr>
+          <a:xfrm>
+            <a:off x="406301" y="4434929"/>
+            <a:ext cx="8498026" cy="213271"/>
+          </a:xfrm>
+          <a:prstGeom prst="rect">
+            <a:avLst/>
+          </a:prstGeom>
+          <a:noFill/>
+          <a:ln/>
+        </p:spPr>
+        <p:txBody>
+          <a:bodyPr wrap="square" lIns="0" tIns="0" rIns="0" bIns="0" rtlCol="0" anchor="t"/>
+          <a:lstStyle/>
+          <a:p>
+            <a:pPr algn="l" indent="0" marL="0">
+              <a:lnSpc>
+                <a:spcPts val="1680"/>
+              </a:lnSpc>
+              <a:spcBef>
+                <a:spcPts val="300"/>
+              </a:spcBef>
+              <a:spcAft>
+                <a:spcPts val="300"/>
+              </a:spcAft>
+              <a:buNone/>
+            </a:pPr>
+            <a:r>
+              <a:rPr lang="en-US" sz="1200" dirty="0">
+                <a:solidFill>
+                  <a:srgbClr val="1C2833"/>
+                </a:solidFill>
+                <a:latin typeface="Arial" pitchFamily="34" charset="0"/>
+                <a:ea typeface="Arial" pitchFamily="34" charset="-122"/>
+                <a:cs typeface="Arial" pitchFamily="34" charset="-120"/>
+              </a:rPr>
+              <a:t>Middle ·  · IKS Curriculum</a:t>
+            </a:r>
+            <a:endParaRPr lang="en-US" sz="1200" dirty="0"/>
+          </a:p>
+        </p:txBody>
+      </p:sp>
+    </p:spTree>
+  </p:cSld>
+  <p:clrMapOvr>
+    <a:masterClrMapping/>
+  </p:clrMapOvr>
+</p:sld>
+</file>
+
+<file path=ppt/slides/slide18.xml><?xml version="1.0" encoding="utf-8"?>
+<p:sld xmlns:a="http://schemas.openxmlformats.org/drawingml/2006/main" xmlns:r="http://schemas.openxmlformats.org/officeDocument/2006/relationships" xmlns:p="http://schemas.openxmlformats.org/presentationml/2006/main">
+  <p:cSld name="Slide 18">
+    <p:bg>
+      <p:bgPr>
+        <a:solidFill>
+          <a:srgbClr val="FFFFFF"/>
+        </a:solidFill>
+      </p:bgPr>
+    </p:bg>
+    <p:spTree>
+      <p:nvGrpSpPr>
+        <p:cNvPr id="1" name=""/>
+        <p:cNvGrpSpPr/>
+        <p:nvPr/>
+      </p:nvGrpSpPr>
+      <p:grpSpPr>
+        <a:xfrm>
+          <a:off x="0" y="0"/>
+          <a:ext cx="0" cy="0"/>
+          <a:chOff x="0" y="0"/>
+          <a:chExt cx="0" cy="0"/>
+        </a:xfrm>
+      </p:grpSpPr>
+      <p:sp>
+        <p:nvSpPr>
+          <p:cNvPr id="2" name="Text 0"/>
+          <p:cNvSpPr/>
+          <p:nvPr/>
+        </p:nvSpPr>
+        <p:spPr>
+          <a:xfrm>
+            <a:off x="0" y="0"/>
+            <a:ext cx="9144000" cy="101501"/>
+          </a:xfrm>
+          <a:prstGeom prst="rect">
+            <a:avLst/>
+          </a:prstGeom>
+          <a:solidFill>
+            <a:srgbClr val="277884"/>
+          </a:solidFill>
+          <a:ln/>
+        </p:spPr>
+        <p:txBody>
+          <a:bodyPr wrap="square" rtlCol="0" anchor="ctr"/>
+          <a:lstStyle/>
+          <a:p>
+            <a:pPr indent="0" marL="0">
+              <a:buNone/>
+            </a:pPr>
+            <a:endParaRPr lang="en-US" dirty="0"/>
+          </a:p>
+        </p:txBody>
+      </p:sp>
+      <p:sp>
+        <p:nvSpPr>
+          <p:cNvPr id="3" name="Text 1"/>
+          <p:cNvSpPr/>
+          <p:nvPr/>
+        </p:nvSpPr>
+        <p:spPr>
+          <a:xfrm>
+            <a:off x="406301" y="457051"/>
+            <a:ext cx="8498026" cy="274290"/>
+          </a:xfrm>
+          <a:prstGeom prst="rect">
+            <a:avLst/>
+          </a:prstGeom>
+          <a:noFill/>
+          <a:ln/>
+        </p:spPr>
+        <p:txBody>
+          <a:bodyPr wrap="square" lIns="0" tIns="0" rIns="0" bIns="0" rtlCol="0" anchor="t"/>
+          <a:lstStyle/>
+          <a:p>
+            <a:pPr algn="l" indent="0" marL="0">
+              <a:lnSpc>
+                <a:spcPts val="2160"/>
+              </a:lnSpc>
+              <a:spcBef>
+                <a:spcPts val="600"/>
+              </a:spcBef>
+              <a:spcAft>
+                <a:spcPts val="800"/>
+              </a:spcAft>
+              <a:buNone/>
+            </a:pPr>
+            <a:r>
+              <a:rPr lang="en-US" sz="1800" b="1" dirty="0">
+                <a:solidFill>
+                  <a:srgbClr val="FE4447"/>
+                </a:solidFill>
+                <a:latin typeface="Georgia" pitchFamily="34" charset="0"/>
+                <a:ea typeface="Georgia" pitchFamily="34" charset="-122"/>
+                <a:cs typeface="Georgia" pitchFamily="34" charset="-120"/>
+              </a:rPr>
+              <a:t>Teacher notes</a:t>
+            </a:r>
+            <a:endParaRPr lang="en-US" sz="1800" dirty="0"/>
+          </a:p>
+        </p:txBody>
+      </p:sp>
+      <p:sp>
+        <p:nvSpPr>
+          <p:cNvPr id="4" name="Text 2"/>
+          <p:cNvSpPr/>
+          <p:nvPr/>
+        </p:nvSpPr>
+        <p:spPr>
+          <a:xfrm>
+            <a:off x="634901" y="883593"/>
+            <a:ext cx="8102798" cy="1180802"/>
+          </a:xfrm>
+          <a:prstGeom prst="rect">
+            <a:avLst/>
+          </a:prstGeom>
+          <a:noFill/>
+          <a:ln/>
+        </p:spPr>
+        <p:txBody>
+          <a:bodyPr wrap="square" lIns="0" tIns="0" rIns="0" bIns="0" rtlCol="0" anchor="t"/>
+          <a:lstStyle/>
+          <a:p>
+            <a:pPr algn="l" marL="342900" indent="-342900">
+              <a:lnSpc>
+                <a:spcPts val="1620"/>
+              </a:lnSpc>
+              <a:spcAft>
+                <a:spcPts val="300"/>
+              </a:spcAft>
+              <a:buSzPct val="100000"/>
+              <a:buChar char="•"/>
+            </a:pPr>
+            <a:r>
+              <a:rPr lang="en-US" sz="1200" dirty="0">
+                <a:solidFill>
+                  <a:srgbClr val="1C2833"/>
+                </a:solidFill>
+                <a:latin typeface="Arial" pitchFamily="34" charset="0"/>
+                <a:ea typeface="Arial" pitchFamily="34" charset="-122"/>
+                <a:cs typeface="Arial" pitchFamily="34" charset="-120"/>
+              </a:rPr>
+              <a:t>Some students find sitting with the breath uncomfortable — minds race, anxiety rises. Honour that: "if it feels too much, open your eyes and just rest."</a:t>
+            </a:r>
+            <a:endParaRPr lang="en-US" sz="1200" dirty="0"/>
+          </a:p>
+          <a:p>
+            <a:pPr algn="l" marL="342900" indent="-342900">
+              <a:lnSpc>
+                <a:spcPts val="1620"/>
+              </a:lnSpc>
+              <a:spcAft>
+                <a:spcPts val="300"/>
+              </a:spcAft>
+              <a:buSzPct val="100000"/>
+              <a:buChar char="•"/>
+            </a:pPr>
+            <a:r>
+              <a:rPr lang="en-US" sz="1200" dirty="0">
+                <a:solidFill>
+                  <a:srgbClr val="1C2833"/>
+                </a:solidFill>
+                <a:latin typeface="Arial" pitchFamily="34" charset="0"/>
+                <a:ea typeface="Arial" pitchFamily="34" charset="-122"/>
+                <a:cs typeface="Arial" pitchFamily="34" charset="-120"/>
+              </a:rPr>
+              <a:t>The "natural-breath-first" frame matters. Forceful breathing can cause hyperventilation or dizziness in students; we sidestep that completely at this band.</a:t>
+            </a:r>
+            <a:endParaRPr lang="en-US" sz="1200" dirty="0"/>
+          </a:p>
+          <a:p>
+            <a:pPr algn="l" marL="342900" indent="-342900">
+              <a:lnSpc>
+                <a:spcPts val="1620"/>
+              </a:lnSpc>
+              <a:spcAft>
+                <a:spcPts val="300"/>
+              </a:spcAft>
+              <a:buSzPct val="100000"/>
+              <a:buChar char="•"/>
+            </a:pPr>
+            <a:r>
+              <a:rPr lang="en-US" sz="1200" dirty="0">
+                <a:solidFill>
+                  <a:srgbClr val="1C2833"/>
+                </a:solidFill>
+                <a:latin typeface="Arial" pitchFamily="34" charset="0"/>
+                <a:ea typeface="Arial" pitchFamily="34" charset="-122"/>
+                <a:cs typeface="Arial" pitchFamily="34" charset="-120"/>
+              </a:rPr>
+              <a:t>Reinforce: this is real prāṇāyāma. The simplest forms are not "lesser" — they are the foundation.</a:t>
+            </a:r>
+            <a:endParaRPr lang="en-US" sz="1200" dirty="0"/>
+          </a:p>
+        </p:txBody>
+      </p:sp>
+      <p:sp>
+        <p:nvSpPr>
+          <p:cNvPr id="5" name="Text 3"/>
+          <p:cNvSpPr/>
+          <p:nvPr/>
+        </p:nvSpPr>
+        <p:spPr>
+          <a:xfrm>
+            <a:off x="406301" y="4434929"/>
+            <a:ext cx="8498026" cy="213271"/>
+          </a:xfrm>
+          <a:prstGeom prst="rect">
+            <a:avLst/>
+          </a:prstGeom>
+          <a:noFill/>
+          <a:ln/>
+        </p:spPr>
+        <p:txBody>
+          <a:bodyPr wrap="square" lIns="0" tIns="0" rIns="0" bIns="0" rtlCol="0" anchor="t"/>
+          <a:lstStyle/>
+          <a:p>
+            <a:pPr algn="l" indent="0" marL="0">
+              <a:lnSpc>
+                <a:spcPts val="1680"/>
+              </a:lnSpc>
+              <a:spcBef>
+                <a:spcPts val="300"/>
+              </a:spcBef>
+              <a:spcAft>
+                <a:spcPts val="300"/>
+              </a:spcAft>
+              <a:buNone/>
+            </a:pPr>
+            <a:r>
+              <a:rPr lang="en-US" sz="1200" dirty="0">
+                <a:solidFill>
+                  <a:srgbClr val="1C2833"/>
+                </a:solidFill>
+                <a:latin typeface="Arial" pitchFamily="34" charset="0"/>
+                <a:ea typeface="Arial" pitchFamily="34" charset="-122"/>
+                <a:cs typeface="Arial" pitchFamily="34" charset="-120"/>
+              </a:rPr>
+              <a:t>Middle ·  · IKS Curriculum</a:t>
+            </a:r>
+            <a:endParaRPr lang="en-US" sz="1200" dirty="0"/>
+          </a:p>
+        </p:txBody>
+      </p:sp>
+    </p:spTree>
+  </p:cSld>
+  <p:clrMapOvr>
+    <a:masterClrMapping/>
+  </p:clrMapOvr>
+</p:sld>
+</file>
+
+<file path=ppt/slides/slide19.xml><?xml version="1.0" encoding="utf-8"?>
+<p:sld xmlns:a="http://schemas.openxmlformats.org/drawingml/2006/main" xmlns:r="http://schemas.openxmlformats.org/officeDocument/2006/relationships" xmlns:p="http://schemas.openxmlformats.org/presentationml/2006/main">
+  <p:cSld name="Slide 19">
+    <p:bg>
+      <p:bgPr>
+        <a:solidFill>
+          <a:srgbClr val="FFFFFF"/>
+        </a:solidFill>
+      </p:bgPr>
+    </p:bg>
+    <p:spTree>
+      <p:nvGrpSpPr>
+        <p:cNvPr id="1" name=""/>
+        <p:cNvGrpSpPr/>
+        <p:nvPr/>
+      </p:nvGrpSpPr>
+      <p:grpSpPr>
+        <a:xfrm>
+          <a:off x="0" y="0"/>
+          <a:ext cx="0" cy="0"/>
+          <a:chOff x="0" y="0"/>
+          <a:chExt cx="0" cy="0"/>
+        </a:xfrm>
+      </p:grpSpPr>
+      <p:sp>
+        <p:nvSpPr>
+          <p:cNvPr id="2" name="Text 0"/>
+          <p:cNvSpPr/>
+          <p:nvPr/>
+        </p:nvSpPr>
+        <p:spPr>
+          <a:xfrm>
+            <a:off x="0" y="0"/>
+            <a:ext cx="9144000" cy="101501"/>
+          </a:xfrm>
+          <a:prstGeom prst="rect">
+            <a:avLst/>
+          </a:prstGeom>
+          <a:solidFill>
+            <a:srgbClr val="277884"/>
+          </a:solidFill>
+          <a:ln/>
+        </p:spPr>
+        <p:txBody>
+          <a:bodyPr wrap="square" rtlCol="0" anchor="ctr"/>
+          <a:lstStyle/>
+          <a:p>
+            <a:pPr indent="0" marL="0">
+              <a:buNone/>
+            </a:pPr>
+            <a:endParaRPr lang="en-US" dirty="0"/>
+          </a:p>
+        </p:txBody>
+      </p:sp>
+      <p:sp>
+        <p:nvSpPr>
+          <p:cNvPr id="3" name="Text 1"/>
+          <p:cNvSpPr/>
+          <p:nvPr/>
+        </p:nvSpPr>
+        <p:spPr>
+          <a:xfrm>
+            <a:off x="406301" y="457051"/>
+            <a:ext cx="8498026" cy="274290"/>
+          </a:xfrm>
+          <a:prstGeom prst="rect">
+            <a:avLst/>
+          </a:prstGeom>
+          <a:noFill/>
+          <a:ln/>
+        </p:spPr>
+        <p:txBody>
+          <a:bodyPr wrap="square" lIns="0" tIns="0" rIns="0" bIns="0" rtlCol="0" anchor="t"/>
+          <a:lstStyle/>
+          <a:p>
+            <a:pPr algn="l" indent="0" marL="0">
+              <a:lnSpc>
+                <a:spcPts val="2160"/>
+              </a:lnSpc>
+              <a:spcBef>
+                <a:spcPts val="600"/>
+              </a:spcBef>
+              <a:spcAft>
+                <a:spcPts val="800"/>
+              </a:spcAft>
+              <a:buNone/>
+            </a:pPr>
+            <a:r>
+              <a:rPr lang="en-US" sz="1800" b="1" dirty="0">
+                <a:solidFill>
+                  <a:srgbClr val="FE4447"/>
+                </a:solidFill>
+                <a:latin typeface="Georgia" pitchFamily="34" charset="0"/>
+                <a:ea typeface="Georgia" pitchFamily="34" charset="-122"/>
+                <a:cs typeface="Georgia" pitchFamily="34" charset="-120"/>
+              </a:rPr>
+              <a:t>Citation(s) used in this lesson</a:t>
+            </a:r>
+            <a:endParaRPr lang="en-US" sz="1800" dirty="0"/>
+          </a:p>
+        </p:txBody>
+      </p:sp>
+      <p:sp>
+        <p:nvSpPr>
+          <p:cNvPr id="4" name="Text 2"/>
+          <p:cNvSpPr/>
+          <p:nvPr/>
+        </p:nvSpPr>
+        <p:spPr>
+          <a:xfrm>
+            <a:off x="634901" y="883593"/>
+            <a:ext cx="8102798" cy="750391"/>
+          </a:xfrm>
+          <a:prstGeom prst="rect">
+            <a:avLst/>
+          </a:prstGeom>
+          <a:noFill/>
+          <a:ln/>
+        </p:spPr>
+        <p:txBody>
+          <a:bodyPr wrap="square" lIns="0" tIns="0" rIns="0" bIns="0" rtlCol="0" anchor="t"/>
+          <a:lstStyle/>
+          <a:p>
+            <a:pPr algn="l" marL="342900" indent="-342900">
+              <a:lnSpc>
+                <a:spcPts val="1620"/>
+              </a:lnSpc>
+              <a:spcAft>
+                <a:spcPts val="300"/>
+              </a:spcAft>
+              <a:buSzPct val="100000"/>
+              <a:buChar char="•"/>
+            </a:pPr>
+            <a:r>
+              <a:rPr lang="en-US" sz="1200" dirty="0">
+                <a:solidFill>
+                  <a:srgbClr val="1C2833"/>
+                </a:solidFill>
+                <a:latin typeface="Arial" pitchFamily="34" charset="0"/>
+                <a:ea typeface="Arial" pitchFamily="34" charset="-122"/>
+                <a:cs typeface="Arial" pitchFamily="34" charset="-120"/>
+              </a:rPr>
+              <a:t>SB 4.8.44 — vidya-karana RAG cache </a:t>
+            </a:r>
+            <a:pPr algn="l" indent="0" marL="0">
+              <a:lnSpc>
+                <a:spcPts val="1620"/>
+              </a:lnSpc>
+              <a:spcAft>
+                <a:spcPts val="300"/>
+              </a:spcAft>
+              <a:buNone/>
+            </a:pPr>
+            <a:r>
+              <a:rPr lang="en-US" sz="1200" dirty="0">
+                <a:solidFill>
+                  <a:srgbClr val="1C2833"/>
+                </a:solidFill>
+                <a:latin typeface="Arial" pitchFamily="34" charset="0"/>
+                <a:ea typeface="Arial" pitchFamily="34" charset="-122"/>
+                <a:cs typeface="Arial" pitchFamily="34" charset="-120"/>
+              </a:rPr>
+              <a:t>day-06-pranayama.json</a:t>
+            </a:r>
+            <a:pPr algn="l" indent="0" marL="0">
+              <a:lnSpc>
+                <a:spcPts val="1620"/>
+              </a:lnSpc>
+              <a:spcAft>
+                <a:spcPts val="300"/>
+              </a:spcAft>
+              <a:buNone/>
+            </a:pPr>
+            <a:r>
+              <a:rPr lang="en-US" sz="1200" dirty="0">
+                <a:solidFill>
+                  <a:srgbClr val="1C2833"/>
+                </a:solidFill>
+                <a:latin typeface="Arial" pitchFamily="34" charset="0"/>
+                <a:ea typeface="Arial" pitchFamily="34" charset="-122"/>
+                <a:cs typeface="Arial" pitchFamily="34" charset="-120"/>
+              </a:rPr>
+              <a:t> chunk[0]. Direct verse on threefold prāṇāyāma and gradual purification.</a:t>
+            </a:r>
+            <a:endParaRPr lang="en-US" sz="1200" dirty="0"/>
+          </a:p>
+          <a:p>
+            <a:pPr algn="l" marL="342900" indent="-342900">
+              <a:lnSpc>
+                <a:spcPts val="1620"/>
+              </a:lnSpc>
+              <a:spcAft>
+                <a:spcPts val="300"/>
+              </a:spcAft>
+              <a:buSzPct val="100000"/>
+              <a:buChar char="•"/>
+            </a:pPr>
+            <a:r>
+              <a:rPr lang="en-US" sz="1200" dirty="0">
+                <a:solidFill>
+                  <a:srgbClr val="1C2833"/>
+                </a:solidFill>
+                <a:latin typeface="Arial" pitchFamily="34" charset="0"/>
+                <a:ea typeface="Arial" pitchFamily="34" charset="-122"/>
+                <a:cs typeface="Arial" pitchFamily="34" charset="-120"/>
+              </a:rPr>
+              <a:t>BG Ch. 4 (apāne juhvati prāṇaṁ) — referenced via cache chunk on breath sacrifice.</a:t>
             </a:r>
             <a:endParaRPr lang="en-US" sz="1200" dirty="0"/>
           </a:p>
@@ -4225,7 +6363,7 @@
                 <a:ea typeface="Georgia" pitchFamily="34" charset="-122"/>
                 <a:cs typeface="Georgia" pitchFamily="34" charset="-120"/>
               </a:rPr>
-              <a:t>Materials</a:t>
+              <a:t>Learning objective</a:t>
             </a:r>
             <a:endParaRPr lang="en-US" sz="1800" dirty="0"/>
           </a:p>
@@ -4240,7 +6378,7 @@
         <p:spPr>
           <a:xfrm>
             <a:off x="406301" y="870942"/>
-            <a:ext cx="8498026" cy="445591"/>
+            <a:ext cx="8498026" cy="426541"/>
           </a:xfrm>
           <a:prstGeom prst="rect">
             <a:avLst/>
@@ -4273,53 +6411,7 @@
                 <a:ea typeface="Arial" pitchFamily="34" charset="-122"/>
                 <a:cs typeface="Arial" pitchFamily="34" charset="-120"/>
               </a:rPr>
-              <a:t>– Mats or comfortable seating. – Stopwatch. – Worksheet for breath observation (</a:t>
-            </a:r>
-            <a:pPr algn="l" indent="0" marL="0">
-              <a:lnSpc>
-                <a:spcPts val="1680"/>
-              </a:lnSpc>
-              <a:spcBef>
-                <a:spcPts val="300"/>
-              </a:spcBef>
-              <a:spcAft>
-                <a:spcPts val="300"/>
-              </a:spcAft>
-              <a:buNone/>
-            </a:pPr>
-            <a:r>
-              <a:rPr lang="en-US" sz="1200" dirty="0">
-                <a:solidFill>
-                  <a:srgbClr val="1C2833"/>
-                </a:solidFill>
-                <a:latin typeface="Arial" pitchFamily="34" charset="0"/>
-                <a:ea typeface="Arial" pitchFamily="34" charset="-122"/>
-                <a:cs typeface="Arial" pitchFamily="34" charset="-120"/>
-              </a:rPr>
-              <a:t>activities/activity-02-breath-observation.md</a:t>
-            </a:r>
-            <a:pPr algn="l" indent="0" marL="0">
-              <a:lnSpc>
-                <a:spcPts val="1680"/>
-              </a:lnSpc>
-              <a:spcBef>
-                <a:spcPts val="300"/>
-              </a:spcBef>
-              <a:spcAft>
-                <a:spcPts val="300"/>
-              </a:spcAft>
-              <a:buNone/>
-            </a:pPr>
-            <a:r>
-              <a:rPr lang="en-US" sz="1200" dirty="0">
-                <a:solidFill>
-                  <a:srgbClr val="1C2833"/>
-                </a:solidFill>
-                <a:latin typeface="Arial" pitchFamily="34" charset="0"/>
-                <a:ea typeface="Arial" pitchFamily="34" charset="-122"/>
-                <a:cs typeface="Arial" pitchFamily="34" charset="-120"/>
-              </a:rPr>
-              <a:t>).</a:t>
+              <a:t>By the end of this lesson, students will complete a 5-minute natural-breath observation and a 5-minute counted-breath (4-in, 4-out) practice, and describe one observable effect of slow breathing.</a:t>
             </a:r>
             <a:endParaRPr lang="en-US" sz="1200" dirty="0"/>
           </a:p>
@@ -4477,7 +6569,7 @@
                 <a:ea typeface="Georgia" pitchFamily="34" charset="-122"/>
                 <a:cs typeface="Georgia" pitchFamily="34" charset="-120"/>
               </a:rPr>
-              <a:t>Vocabulary introduced today</a:t>
+              <a:t>Materials</a:t>
             </a:r>
             <a:endParaRPr lang="en-US" sz="1800" dirty="0"/>
           </a:p>
@@ -4492,7 +6584,7 @@
         <p:spPr>
           <a:xfrm>
             <a:off x="634901" y="883593"/>
-            <a:ext cx="8102798" cy="525661"/>
+            <a:ext cx="8102798" cy="788491"/>
           </a:xfrm>
           <a:prstGeom prst="rect">
             <a:avLst/>
@@ -4515,7 +6607,7 @@
               <a:buChar char="•"/>
             </a:pPr>
             <a:r>
-              <a:rPr lang="en-US" sz="1200" i="1" dirty="0">
+              <a:rPr lang="en-US" sz="1200" dirty="0">
                 <a:solidFill>
                   <a:srgbClr val="1C2833"/>
                 </a:solidFill>
@@ -4523,16 +6615,20 @@
                 <a:ea typeface="Arial" pitchFamily="34" charset="-122"/>
                 <a:cs typeface="Arial" pitchFamily="34" charset="-120"/>
               </a:rPr>
-              <a:t>prāṇa</a:t>
-            </a:r>
-            <a:pPr algn="l" indent="0" marL="0">
+              <a:t>Mats or comfortable seating.</a:t>
+            </a:r>
+            <a:endParaRPr lang="en-US" sz="1200" dirty="0"/>
+          </a:p>
+          <a:p>
+            <a:pPr algn="l" marL="342900" indent="-342900">
               <a:lnSpc>
                 <a:spcPts val="1620"/>
               </a:lnSpc>
               <a:spcAft>
                 <a:spcPts val="300"/>
               </a:spcAft>
-              <a:buNone/>
+              <a:buSzPct val="100000"/>
+              <a:buChar char="•"/>
             </a:pPr>
             <a:r>
               <a:rPr lang="en-US" sz="1200" dirty="0">
@@ -4543,7 +6639,7 @@
                 <a:ea typeface="Arial" pitchFamily="34" charset="-122"/>
                 <a:cs typeface="Arial" pitchFamily="34" charset="-120"/>
               </a:rPr>
-              <a:t> (IAST: prāṇa; lit. "breath, vital energy") — breath as the bridge between body and mind.</a:t>
+              <a:t>Stopwatch.</a:t>
             </a:r>
             <a:endParaRPr lang="en-US" sz="1200" dirty="0"/>
           </a:p>
@@ -4559,7 +6655,7 @@
               <a:buChar char="•"/>
             </a:pPr>
             <a:r>
-              <a:rPr lang="en-US" sz="1200" i="1" dirty="0">
+              <a:rPr lang="en-US" sz="1200" dirty="0">
                 <a:solidFill>
                   <a:srgbClr val="1C2833"/>
                 </a:solidFill>
@@ -4567,7 +6663,7 @@
                 <a:ea typeface="Arial" pitchFamily="34" charset="-122"/>
                 <a:cs typeface="Arial" pitchFamily="34" charset="-120"/>
               </a:rPr>
-              <a:t>prāṇāyāma</a:t>
+              <a:t>Worksheet for breath observation (</a:t>
             </a:r>
             <a:pPr algn="l" indent="0" marL="0">
               <a:lnSpc>
@@ -4587,7 +6683,27 @@
                 <a:ea typeface="Arial" pitchFamily="34" charset="-122"/>
                 <a:cs typeface="Arial" pitchFamily="34" charset="-120"/>
               </a:rPr>
-              <a:t> (IAST: prāṇa-āyāma; lit. "extension or control of prāṇa") — the fourth limb; breath regulation.</a:t>
+              <a:t>activities/activity-02-breath-observation.md</a:t>
+            </a:r>
+            <a:pPr algn="l" indent="0" marL="0">
+              <a:lnSpc>
+                <a:spcPts val="1620"/>
+              </a:lnSpc>
+              <a:spcAft>
+                <a:spcPts val="300"/>
+              </a:spcAft>
+              <a:buNone/>
+            </a:pPr>
+            <a:r>
+              <a:rPr lang="en-US" sz="1200" dirty="0">
+                <a:solidFill>
+                  <a:srgbClr val="1C2833"/>
+                </a:solidFill>
+                <a:latin typeface="Arial" pitchFamily="34" charset="0"/>
+                <a:ea typeface="Arial" pitchFamily="34" charset="-122"/>
+                <a:cs typeface="Arial" pitchFamily="34" charset="-120"/>
+              </a:rPr>
+              <a:t>).</a:t>
             </a:r>
             <a:endParaRPr lang="en-US" sz="1200" dirty="0"/>
           </a:p>
@@ -4745,7 +6861,7 @@
                 <a:ea typeface="Georgia" pitchFamily="34" charset="-122"/>
                 <a:cs typeface="Georgia" pitchFamily="34" charset="-120"/>
               </a:rPr>
-              <a:t>Lesson flow</a:t>
+              <a:t>Vocabulary introduced today</a:t>
             </a:r>
             <a:endParaRPr lang="en-US" sz="1800" dirty="0"/>
           </a:p>
@@ -4754,6 +6870,116 @@
       <p:sp>
         <p:nvSpPr>
           <p:cNvPr id="4" name="Text 2"/>
+          <p:cNvSpPr/>
+          <p:nvPr/>
+        </p:nvSpPr>
+        <p:spPr>
+          <a:xfrm>
+            <a:off x="634901" y="883593"/>
+            <a:ext cx="8102798" cy="525661"/>
+          </a:xfrm>
+          <a:prstGeom prst="rect">
+            <a:avLst/>
+          </a:prstGeom>
+          <a:noFill/>
+          <a:ln/>
+        </p:spPr>
+        <p:txBody>
+          <a:bodyPr wrap="square" lIns="0" tIns="0" rIns="0" bIns="0" rtlCol="0" anchor="t"/>
+          <a:lstStyle/>
+          <a:p>
+            <a:pPr algn="l" marL="342900" indent="-342900">
+              <a:lnSpc>
+                <a:spcPts val="1620"/>
+              </a:lnSpc>
+              <a:spcAft>
+                <a:spcPts val="300"/>
+              </a:spcAft>
+              <a:buSzPct val="100000"/>
+              <a:buChar char="•"/>
+            </a:pPr>
+            <a:r>
+              <a:rPr lang="en-US" sz="1200" i="1" dirty="0">
+                <a:solidFill>
+                  <a:srgbClr val="1C2833"/>
+                </a:solidFill>
+                <a:latin typeface="Arial" pitchFamily="34" charset="0"/>
+                <a:ea typeface="Arial" pitchFamily="34" charset="-122"/>
+                <a:cs typeface="Arial" pitchFamily="34" charset="-120"/>
+              </a:rPr>
+              <a:t>prāṇa</a:t>
+            </a:r>
+            <a:pPr algn="l" indent="0" marL="0">
+              <a:lnSpc>
+                <a:spcPts val="1620"/>
+              </a:lnSpc>
+              <a:spcAft>
+                <a:spcPts val="300"/>
+              </a:spcAft>
+              <a:buNone/>
+            </a:pPr>
+            <a:r>
+              <a:rPr lang="en-US" sz="1200" dirty="0">
+                <a:solidFill>
+                  <a:srgbClr val="1C2833"/>
+                </a:solidFill>
+                <a:latin typeface="Arial" pitchFamily="34" charset="0"/>
+                <a:ea typeface="Arial" pitchFamily="34" charset="-122"/>
+                <a:cs typeface="Arial" pitchFamily="34" charset="-120"/>
+              </a:rPr>
+              <a:t> (IAST: prāṇa; lit. "breath, vital energy") — breath as the bridge between body and mind.</a:t>
+            </a:r>
+            <a:endParaRPr lang="en-US" sz="1200" dirty="0"/>
+          </a:p>
+          <a:p>
+            <a:pPr algn="l" marL="342900" indent="-342900">
+              <a:lnSpc>
+                <a:spcPts val="1620"/>
+              </a:lnSpc>
+              <a:spcAft>
+                <a:spcPts val="300"/>
+              </a:spcAft>
+              <a:buSzPct val="100000"/>
+              <a:buChar char="•"/>
+            </a:pPr>
+            <a:r>
+              <a:rPr lang="en-US" sz="1200" i="1" dirty="0">
+                <a:solidFill>
+                  <a:srgbClr val="1C2833"/>
+                </a:solidFill>
+                <a:latin typeface="Arial" pitchFamily="34" charset="0"/>
+                <a:ea typeface="Arial" pitchFamily="34" charset="-122"/>
+                <a:cs typeface="Arial" pitchFamily="34" charset="-120"/>
+              </a:rPr>
+              <a:t>prāṇāyāma</a:t>
+            </a:r>
+            <a:pPr algn="l" indent="0" marL="0">
+              <a:lnSpc>
+                <a:spcPts val="1620"/>
+              </a:lnSpc>
+              <a:spcAft>
+                <a:spcPts val="300"/>
+              </a:spcAft>
+              <a:buNone/>
+            </a:pPr>
+            <a:r>
+              <a:rPr lang="en-US" sz="1200" dirty="0">
+                <a:solidFill>
+                  <a:srgbClr val="1C2833"/>
+                </a:solidFill>
+                <a:latin typeface="Arial" pitchFamily="34" charset="0"/>
+                <a:ea typeface="Arial" pitchFamily="34" charset="-122"/>
+                <a:cs typeface="Arial" pitchFamily="34" charset="-120"/>
+              </a:rPr>
+              <a:t> (IAST: prāṇa-āyāma; lit. "extension or control of prāṇa") — the fourth limb; breath regulation.</a:t>
+            </a:r>
+            <a:endParaRPr lang="en-US" sz="1200" dirty="0"/>
+          </a:p>
+        </p:txBody>
+      </p:sp>
+      <p:sp>
+        <p:nvSpPr>
+          <p:cNvPr id="5" name="Text 3"/>
           <p:cNvSpPr/>
           <p:nvPr/>
         </p:nvSpPr>
@@ -4903,7 +7129,7 @@
                 <a:ea typeface="Georgia" pitchFamily="34" charset="-122"/>
                 <a:cs typeface="Georgia" pitchFamily="34" charset="-120"/>
               </a:rPr>
-              <a:t>Settle (2 min)</a:t>
+              <a:t>Lesson flow</a:t>
             </a:r>
             <a:endParaRPr lang="en-US" sz="1800" dirty="0"/>
           </a:p>
@@ -4912,54 +7138,6 @@
       <p:sp>
         <p:nvSpPr>
           <p:cNvPr id="4" name="Text 2"/>
-          <p:cNvSpPr/>
-          <p:nvPr/>
-        </p:nvSpPr>
-        <p:spPr>
-          <a:xfrm>
-            <a:off x="406301" y="870942"/>
-            <a:ext cx="8498026" cy="213271"/>
-          </a:xfrm>
-          <a:prstGeom prst="rect">
-            <a:avLst/>
-          </a:prstGeom>
-          <a:noFill/>
-          <a:ln/>
-        </p:spPr>
-        <p:txBody>
-          <a:bodyPr wrap="square" lIns="0" tIns="0" rIns="0" bIns="0" rtlCol="0" anchor="t"/>
-          <a:lstStyle/>
-          <a:p>
-            <a:pPr algn="l" indent="0" marL="0">
-              <a:lnSpc>
-                <a:spcPts val="1680"/>
-              </a:lnSpc>
-              <a:spcBef>
-                <a:spcPts val="300"/>
-              </a:spcBef>
-              <a:spcAft>
-                <a:spcPts val="300"/>
-              </a:spcAft>
-              <a:buNone/>
-            </a:pPr>
-            <a:r>
-              <a:rPr lang="en-US" sz="1200" dirty="0">
-                <a:solidFill>
-                  <a:srgbClr val="1C2833"/>
-                </a:solidFill>
-                <a:latin typeface="Arial" pitchFamily="34" charset="0"/>
-                <a:ea typeface="Arial" pitchFamily="34" charset="-122"/>
-                <a:cs typeface="Arial" pitchFamily="34" charset="-120"/>
-              </a:rPr>
-              <a:t>– Sukhāsana. 5 breaths.</a:t>
-            </a:r>
-            <a:endParaRPr lang="en-US" sz="1200" dirty="0"/>
-          </a:p>
-        </p:txBody>
-      </p:sp>
-      <p:sp>
-        <p:nvSpPr>
-          <p:cNvPr id="5" name="Text 3"/>
           <p:cNvSpPr/>
           <p:nvPr/>
         </p:nvSpPr>
@@ -5109,7 +7287,7 @@
                 <a:ea typeface="Georgia" pitchFamily="34" charset="-122"/>
                 <a:cs typeface="Georgia" pitchFamily="34" charset="-120"/>
               </a:rPr>
-              <a:t>Core (10 min) — What is prāṇāyāma?</a:t>
+              <a:t>Settle (2 min)</a:t>
             </a:r>
             <a:endParaRPr lang="en-US" sz="1800" dirty="0"/>
           </a:p>
@@ -5147,7 +7325,7 @@
               <a:buChar char="•"/>
             </a:pPr>
             <a:r>
-              <a:rPr lang="en-US" sz="1200" b="1" dirty="0">
+              <a:rPr lang="en-US" sz="1200" dirty="0">
                 <a:solidFill>
                   <a:srgbClr val="1C2833"/>
                 </a:solidFill>
@@ -5155,27 +7333,7 @@
                 <a:ea typeface="Arial" pitchFamily="34" charset="-122"/>
                 <a:cs typeface="Arial" pitchFamily="34" charset="-120"/>
               </a:rPr>
-              <a:t>Frame the limb</a:t>
-            </a:r>
-            <a:pPr algn="l" indent="0" marL="0">
-              <a:lnSpc>
-                <a:spcPts val="1620"/>
-              </a:lnSpc>
-              <a:spcAft>
-                <a:spcPts val="300"/>
-              </a:spcAft>
-              <a:buNone/>
-            </a:pPr>
-            <a:r>
-              <a:rPr lang="en-US" sz="1200" dirty="0">
-                <a:solidFill>
-                  <a:srgbClr val="1C2833"/>
-                </a:solidFill>
-                <a:latin typeface="Arial" pitchFamily="34" charset="0"/>
-                <a:ea typeface="Arial" pitchFamily="34" charset="-122"/>
-                <a:cs typeface="Arial" pitchFamily="34" charset="-120"/>
-              </a:rPr>
-              <a:t> (write on board):</a:t>
+              <a:t>Sukhāsana. 5 breaths.</a:t>
             </a:r>
             <a:endParaRPr lang="en-US" sz="1200" dirty="0"/>
           </a:p>
@@ -5189,678 +7347,7 @@
         </p:nvSpPr>
         <p:spPr>
           <a:xfrm>
-            <a:off x="406301" y="1254323"/>
-            <a:ext cx="8498026" cy="426541"/>
-          </a:xfrm>
-          <a:prstGeom prst="rect">
-            <a:avLst/>
-          </a:prstGeom>
-          <a:noFill/>
-          <a:ln/>
-        </p:spPr>
-        <p:txBody>
-          <a:bodyPr wrap="square" lIns="0" tIns="0" rIns="0" bIns="0" rtlCol="0" anchor="t"/>
-          <a:lstStyle/>
-          <a:p>
-            <a:pPr algn="l" indent="0" marL="0">
-              <a:lnSpc>
-                <a:spcPts val="1680"/>
-              </a:lnSpc>
-              <a:spcBef>
-                <a:spcPts val="300"/>
-              </a:spcBef>
-              <a:spcAft>
-                <a:spcPts val="300"/>
-              </a:spcAft>
-              <a:buNone/>
-            </a:pPr>
-            <a:r>
-              <a:rPr lang="en-US" sz="1200" dirty="0">
-                <a:solidFill>
-                  <a:srgbClr val="1C2833"/>
-                </a:solidFill>
-                <a:latin typeface="Arial" pitchFamily="34" charset="0"/>
-                <a:ea typeface="Arial" pitchFamily="34" charset="-122"/>
-                <a:cs typeface="Arial" pitchFamily="34" charset="-120"/>
-              </a:rPr>
-              <a:t>&gt; Prāṇāyāma — the 4th of the 8 limbs. &gt; Literally: </a:t>
-            </a:r>
-            <a:pPr algn="l" indent="0" marL="0">
-              <a:lnSpc>
-                <a:spcPts val="1680"/>
-              </a:lnSpc>
-              <a:spcBef>
-                <a:spcPts val="300"/>
-              </a:spcBef>
-              <a:spcAft>
-                <a:spcPts val="300"/>
-              </a:spcAft>
-              <a:buNone/>
-            </a:pPr>
-            <a:r>
-              <a:rPr lang="en-US" sz="1200" i="1" dirty="0">
-                <a:solidFill>
-                  <a:srgbClr val="1C2833"/>
-                </a:solidFill>
-                <a:latin typeface="Arial" pitchFamily="34" charset="0"/>
-                <a:ea typeface="Arial" pitchFamily="34" charset="-122"/>
-                <a:cs typeface="Arial" pitchFamily="34" charset="-120"/>
-              </a:rPr>
-              <a:t>prāṇa</a:t>
-            </a:r>
-            <a:pPr algn="l" indent="0" marL="0">
-              <a:lnSpc>
-                <a:spcPts val="1680"/>
-              </a:lnSpc>
-              <a:spcBef>
-                <a:spcPts val="300"/>
-              </a:spcBef>
-              <a:spcAft>
-                <a:spcPts val="300"/>
-              </a:spcAft>
-              <a:buNone/>
-            </a:pPr>
-            <a:r>
-              <a:rPr lang="en-US" sz="1200" dirty="0">
-                <a:solidFill>
-                  <a:srgbClr val="1C2833"/>
-                </a:solidFill>
-                <a:latin typeface="Arial" pitchFamily="34" charset="0"/>
-                <a:ea typeface="Arial" pitchFamily="34" charset="-122"/>
-                <a:cs typeface="Arial" pitchFamily="34" charset="-120"/>
-              </a:rPr>
-              <a:t> (breath) + </a:t>
-            </a:r>
-            <a:pPr algn="l" indent="0" marL="0">
-              <a:lnSpc>
-                <a:spcPts val="1680"/>
-              </a:lnSpc>
-              <a:spcBef>
-                <a:spcPts val="300"/>
-              </a:spcBef>
-              <a:spcAft>
-                <a:spcPts val="300"/>
-              </a:spcAft>
-              <a:buNone/>
-            </a:pPr>
-            <a:r>
-              <a:rPr lang="en-US" sz="1200" i="1" dirty="0">
-                <a:solidFill>
-                  <a:srgbClr val="1C2833"/>
-                </a:solidFill>
-                <a:latin typeface="Arial" pitchFamily="34" charset="0"/>
-                <a:ea typeface="Arial" pitchFamily="34" charset="-122"/>
-                <a:cs typeface="Arial" pitchFamily="34" charset="-120"/>
-              </a:rPr>
-              <a:t>āyāma</a:t>
-            </a:r>
-            <a:pPr algn="l" indent="0" marL="0">
-              <a:lnSpc>
-                <a:spcPts val="1680"/>
-              </a:lnSpc>
-              <a:spcBef>
-                <a:spcPts val="300"/>
-              </a:spcBef>
-              <a:spcAft>
-                <a:spcPts val="300"/>
-              </a:spcAft>
-              <a:buNone/>
-            </a:pPr>
-            <a:r>
-              <a:rPr lang="en-US" sz="1200" dirty="0">
-                <a:solidFill>
-                  <a:srgbClr val="1C2833"/>
-                </a:solidFill>
-                <a:latin typeface="Arial" pitchFamily="34" charset="0"/>
-                <a:ea typeface="Arial" pitchFamily="34" charset="-122"/>
-                <a:cs typeface="Arial" pitchFamily="34" charset="-120"/>
-              </a:rPr>
-              <a:t> (extension, regulation). &gt; Practical meaning: </a:t>
-            </a:r>
-            <a:pPr algn="l" indent="0" marL="0">
-              <a:lnSpc>
-                <a:spcPts val="1680"/>
-              </a:lnSpc>
-              <a:spcBef>
-                <a:spcPts val="300"/>
-              </a:spcBef>
-              <a:spcAft>
-                <a:spcPts val="300"/>
-              </a:spcAft>
-              <a:buNone/>
-            </a:pPr>
-            <a:r>
-              <a:rPr lang="en-US" sz="1200" i="1" dirty="0">
-                <a:solidFill>
-                  <a:srgbClr val="1C2833"/>
-                </a:solidFill>
-                <a:latin typeface="Arial" pitchFamily="34" charset="0"/>
-                <a:ea typeface="Arial" pitchFamily="34" charset="-122"/>
-                <a:cs typeface="Arial" pitchFamily="34" charset="-120"/>
-              </a:rPr>
-              <a:t>intentional breath observation and regulation, NOT forceful breath holding.</a:t>
-            </a:r>
-            <a:endParaRPr lang="en-US" sz="1200" dirty="0"/>
-          </a:p>
-        </p:txBody>
-      </p:sp>
-      <p:sp>
-        <p:nvSpPr>
-          <p:cNvPr id="6" name="Text 4"/>
-          <p:cNvSpPr/>
-          <p:nvPr/>
-        </p:nvSpPr>
-        <p:spPr>
-          <a:xfrm>
-            <a:off x="634901" y="1769715"/>
-            <a:ext cx="8102798" cy="281880"/>
-          </a:xfrm>
-          <a:prstGeom prst="rect">
-            <a:avLst/>
-          </a:prstGeom>
-          <a:noFill/>
-          <a:ln/>
-        </p:spPr>
-        <p:txBody>
-          <a:bodyPr wrap="square" lIns="0" tIns="0" rIns="0" bIns="0" rtlCol="0" anchor="t"/>
-          <a:lstStyle/>
-          <a:p>
-            <a:pPr algn="l" marL="342900" indent="-342900">
-              <a:lnSpc>
-                <a:spcPts val="1620"/>
-              </a:lnSpc>
-              <a:spcAft>
-                <a:spcPts val="300"/>
-              </a:spcAft>
-              <a:buSzPct val="100000"/>
-              <a:buChar char="•"/>
-            </a:pPr>
-            <a:r>
-              <a:rPr lang="en-US" sz="1200" b="1" dirty="0">
-                <a:solidFill>
-                  <a:srgbClr val="1C2833"/>
-                </a:solidFill>
-                <a:latin typeface="Arial" pitchFamily="34" charset="0"/>
-                <a:ea typeface="Arial" pitchFamily="34" charset="-122"/>
-                <a:cs typeface="Arial" pitchFamily="34" charset="-120"/>
-              </a:rPr>
-              <a:t>What we DO at this level:</a:t>
-            </a:r>
-            <a:endParaRPr lang="en-US" sz="1200" dirty="0"/>
-          </a:p>
-        </p:txBody>
-      </p:sp>
-      <p:sp>
-        <p:nvSpPr>
-          <p:cNvPr id="7" name="Text 5"/>
-          <p:cNvSpPr/>
-          <p:nvPr/>
-        </p:nvSpPr>
-        <p:spPr>
-          <a:xfrm>
-            <a:off x="406301" y="2140446"/>
-            <a:ext cx="8498026" cy="426541"/>
-          </a:xfrm>
-          <a:prstGeom prst="rect">
-            <a:avLst/>
-          </a:prstGeom>
-          <a:noFill/>
-          <a:ln/>
-        </p:spPr>
-        <p:txBody>
-          <a:bodyPr wrap="square" lIns="0" tIns="0" rIns="0" bIns="0" rtlCol="0" anchor="t"/>
-          <a:lstStyle/>
-          <a:p>
-            <a:pPr algn="l" indent="0" marL="0">
-              <a:lnSpc>
-                <a:spcPts val="1680"/>
-              </a:lnSpc>
-              <a:spcBef>
-                <a:spcPts val="300"/>
-              </a:spcBef>
-              <a:spcAft>
-                <a:spcPts val="300"/>
-              </a:spcAft>
-              <a:buNone/>
-            </a:pPr>
-            <a:r>
-              <a:rPr lang="en-US" sz="1200" dirty="0">
-                <a:solidFill>
-                  <a:srgbClr val="1C2833"/>
-                </a:solidFill>
-                <a:latin typeface="Arial" pitchFamily="34" charset="0"/>
-                <a:ea typeface="Arial" pitchFamily="34" charset="-122"/>
-                <a:cs typeface="Arial" pitchFamily="34" charset="-120"/>
-              </a:rPr>
-              <a:t>– Observe natural breath without changing it.    – Count breaths (in for 4, out for 4).    – Notice the gap between inhale and exhale.</a:t>
-            </a:r>
-            <a:endParaRPr lang="en-US" sz="1200" dirty="0"/>
-          </a:p>
-        </p:txBody>
-      </p:sp>
-      <p:sp>
-        <p:nvSpPr>
-          <p:cNvPr id="8" name="Text 6"/>
-          <p:cNvSpPr/>
-          <p:nvPr/>
-        </p:nvSpPr>
-        <p:spPr>
-          <a:xfrm>
-            <a:off x="634901" y="2655838"/>
-            <a:ext cx="8102798" cy="281880"/>
-          </a:xfrm>
-          <a:prstGeom prst="rect">
-            <a:avLst/>
-          </a:prstGeom>
-          <a:noFill/>
-          <a:ln/>
-        </p:spPr>
-        <p:txBody>
-          <a:bodyPr wrap="square" lIns="0" tIns="0" rIns="0" bIns="0" rtlCol="0" anchor="t"/>
-          <a:lstStyle/>
-          <a:p>
-            <a:pPr algn="l" marL="342900" indent="-342900">
-              <a:lnSpc>
-                <a:spcPts val="1620"/>
-              </a:lnSpc>
-              <a:spcAft>
-                <a:spcPts val="300"/>
-              </a:spcAft>
-              <a:buSzPct val="100000"/>
-              <a:buChar char="•"/>
-            </a:pPr>
-            <a:r>
-              <a:rPr lang="en-US" sz="1200" b="1" dirty="0">
-                <a:solidFill>
-                  <a:srgbClr val="1C2833"/>
-                </a:solidFill>
-                <a:latin typeface="Arial" pitchFamily="34" charset="0"/>
-                <a:ea typeface="Arial" pitchFamily="34" charset="-122"/>
-                <a:cs typeface="Arial" pitchFamily="34" charset="-120"/>
-              </a:rPr>
-              <a:t>What we DO NOT do at this level</a:t>
-            </a:r>
-            <a:pPr algn="l" indent="0" marL="0">
-              <a:lnSpc>
-                <a:spcPts val="1620"/>
-              </a:lnSpc>
-              <a:spcAft>
-                <a:spcPts val="300"/>
-              </a:spcAft>
-              <a:buNone/>
-            </a:pPr>
-            <a:r>
-              <a:rPr lang="en-US" sz="1200" dirty="0">
-                <a:solidFill>
-                  <a:srgbClr val="1C2833"/>
-                </a:solidFill>
-                <a:latin typeface="Arial" pitchFamily="34" charset="0"/>
-                <a:ea typeface="Arial" pitchFamily="34" charset="-122"/>
-                <a:cs typeface="Arial" pitchFamily="34" charset="-120"/>
-              </a:rPr>
-              <a:t> (write on board, large):</a:t>
-            </a:r>
-            <a:endParaRPr lang="en-US" sz="1200" dirty="0"/>
-          </a:p>
-        </p:txBody>
-      </p:sp>
-      <p:sp>
-        <p:nvSpPr>
-          <p:cNvPr id="9" name="Text 7"/>
-          <p:cNvSpPr/>
-          <p:nvPr/>
-        </p:nvSpPr>
-        <p:spPr>
-          <a:xfrm>
-            <a:off x="406301" y="3026569"/>
-            <a:ext cx="8498026" cy="426541"/>
-          </a:xfrm>
-          <a:prstGeom prst="rect">
-            <a:avLst/>
-          </a:prstGeom>
-          <a:noFill/>
-          <a:ln/>
-        </p:spPr>
-        <p:txBody>
-          <a:bodyPr wrap="square" lIns="0" tIns="0" rIns="0" bIns="0" rtlCol="0" anchor="t"/>
-          <a:lstStyle/>
-          <a:p>
-            <a:pPr algn="l" indent="0" marL="0">
-              <a:lnSpc>
-                <a:spcPts val="1680"/>
-              </a:lnSpc>
-              <a:spcBef>
-                <a:spcPts val="300"/>
-              </a:spcBef>
-              <a:spcAft>
-                <a:spcPts val="300"/>
-              </a:spcAft>
-              <a:buNone/>
-            </a:pPr>
-            <a:r>
-              <a:rPr lang="en-US" sz="1200" dirty="0">
-                <a:solidFill>
-                  <a:srgbClr val="1C2833"/>
-                </a:solidFill>
-                <a:latin typeface="Arial" pitchFamily="34" charset="0"/>
-                <a:ea typeface="Arial" pitchFamily="34" charset="-122"/>
-                <a:cs typeface="Arial" pitchFamily="34" charset="-120"/>
-              </a:rPr>
-              <a:t>&gt; </a:t>
-            </a:r>
-            <a:pPr algn="l" indent="0" marL="0">
-              <a:lnSpc>
-                <a:spcPts val="1680"/>
-              </a:lnSpc>
-              <a:spcBef>
-                <a:spcPts val="300"/>
-              </a:spcBef>
-              <a:spcAft>
-                <a:spcPts val="300"/>
-              </a:spcAft>
-              <a:buNone/>
-            </a:pPr>
-            <a:r>
-              <a:rPr lang="en-US" sz="1200" b="1" dirty="0">
-                <a:solidFill>
-                  <a:srgbClr val="1C2833"/>
-                </a:solidFill>
-                <a:latin typeface="Arial" pitchFamily="34" charset="0"/>
-                <a:ea typeface="Arial" pitchFamily="34" charset="-122"/>
-                <a:cs typeface="Arial" pitchFamily="34" charset="-120"/>
-              </a:rPr>
-              <a:t>No breath retention. No forceful breathing. No bellows breath (bhastrikā). No skull shining (kapālabhāti).</a:t>
-            </a:r>
-            <a:pPr algn="l" indent="0" marL="0">
-              <a:lnSpc>
-                <a:spcPts val="1680"/>
-              </a:lnSpc>
-              <a:spcBef>
-                <a:spcPts val="300"/>
-              </a:spcBef>
-              <a:spcAft>
-                <a:spcPts val="300"/>
-              </a:spcAft>
-              <a:buNone/>
-            </a:pPr>
-            <a:r>
-              <a:rPr lang="en-US" sz="1200" dirty="0">
-                <a:solidFill>
-                  <a:srgbClr val="1C2833"/>
-                </a:solidFill>
-                <a:latin typeface="Arial" pitchFamily="34" charset="0"/>
-                <a:ea typeface="Arial" pitchFamily="34" charset="-122"/>
-                <a:cs typeface="Arial" pitchFamily="34" charset="-120"/>
-              </a:rPr>
-              <a:t> &gt; &gt; These advanced techniques require a certified yoga teacher. We're not doing them here.</a:t>
-            </a:r>
-            <a:endParaRPr lang="en-US" sz="1200" dirty="0"/>
-          </a:p>
-        </p:txBody>
-      </p:sp>
-      <p:sp>
-        <p:nvSpPr>
-          <p:cNvPr id="10" name="Text 8"/>
-          <p:cNvSpPr/>
-          <p:nvPr/>
-        </p:nvSpPr>
-        <p:spPr>
-          <a:xfrm>
-            <a:off x="634901" y="3541961"/>
-            <a:ext cx="8102798" cy="281880"/>
-          </a:xfrm>
-          <a:prstGeom prst="rect">
-            <a:avLst/>
-          </a:prstGeom>
-          <a:noFill/>
-          <a:ln/>
-        </p:spPr>
-        <p:txBody>
-          <a:bodyPr wrap="square" lIns="0" tIns="0" rIns="0" bIns="0" rtlCol="0" anchor="t"/>
-          <a:lstStyle/>
-          <a:p>
-            <a:pPr algn="l" marL="342900" indent="-342900">
-              <a:lnSpc>
-                <a:spcPts val="1620"/>
-              </a:lnSpc>
-              <a:spcAft>
-                <a:spcPts val="300"/>
-              </a:spcAft>
-              <a:buSzPct val="100000"/>
-              <a:buChar char="•"/>
-            </a:pPr>
-            <a:r>
-              <a:rPr lang="en-US" sz="1200" b="1" dirty="0">
-                <a:solidFill>
-                  <a:srgbClr val="1C2833"/>
-                </a:solidFill>
-                <a:latin typeface="Arial" pitchFamily="34" charset="0"/>
-                <a:ea typeface="Arial" pitchFamily="34" charset="-122"/>
-                <a:cs typeface="Arial" pitchFamily="34" charset="-120"/>
-              </a:rPr>
-              <a:t>Source</a:t>
-            </a:r>
-            <a:pPr algn="l" indent="0" marL="0">
-              <a:lnSpc>
-                <a:spcPts val="1620"/>
-              </a:lnSpc>
-              <a:spcAft>
-                <a:spcPts val="300"/>
-              </a:spcAft>
-              <a:buNone/>
-            </a:pPr>
-            <a:r>
-              <a:rPr lang="en-US" sz="1200" dirty="0">
-                <a:solidFill>
-                  <a:srgbClr val="1C2833"/>
-                </a:solidFill>
-                <a:latin typeface="Arial" pitchFamily="34" charset="0"/>
-                <a:ea typeface="Arial" pitchFamily="34" charset="-122"/>
-                <a:cs typeface="Arial" pitchFamily="34" charset="-120"/>
-              </a:rPr>
-              <a:t> (read aloud, don't memorise):</a:t>
-            </a:r>
-            <a:endParaRPr lang="en-US" sz="1200" dirty="0"/>
-          </a:p>
-        </p:txBody>
-      </p:sp>
-      <p:sp>
-        <p:nvSpPr>
-          <p:cNvPr id="11" name="Text 9"/>
-          <p:cNvSpPr/>
-          <p:nvPr/>
-        </p:nvSpPr>
-        <p:spPr>
-          <a:xfrm>
-            <a:off x="406301" y="3912691"/>
-            <a:ext cx="8498026" cy="639812"/>
-          </a:xfrm>
-          <a:prstGeom prst="rect">
-            <a:avLst/>
-          </a:prstGeom>
-          <a:noFill/>
-          <a:ln/>
-        </p:spPr>
-        <p:txBody>
-          <a:bodyPr wrap="square" lIns="0" tIns="0" rIns="0" bIns="0" rtlCol="0" anchor="t"/>
-          <a:lstStyle/>
-          <a:p>
-            <a:pPr algn="l" indent="0" marL="0">
-              <a:lnSpc>
-                <a:spcPts val="1680"/>
-              </a:lnSpc>
-              <a:spcBef>
-                <a:spcPts val="300"/>
-              </a:spcBef>
-              <a:spcAft>
-                <a:spcPts val="300"/>
-              </a:spcAft>
-              <a:buNone/>
-            </a:pPr>
-            <a:r>
-              <a:rPr lang="en-US" sz="1200" dirty="0">
-                <a:solidFill>
-                  <a:srgbClr val="1C2833"/>
-                </a:solidFill>
-                <a:latin typeface="Arial" pitchFamily="34" charset="0"/>
-                <a:ea typeface="Arial" pitchFamily="34" charset="-122"/>
-                <a:cs typeface="Arial" pitchFamily="34" charset="-120"/>
-              </a:rPr>
-              <a:t>&gt; "</a:t>
-            </a:r>
-            <a:pPr algn="l" indent="0" marL="0">
-              <a:lnSpc>
-                <a:spcPts val="1680"/>
-              </a:lnSpc>
-              <a:spcBef>
-                <a:spcPts val="300"/>
-              </a:spcBef>
-              <a:spcAft>
-                <a:spcPts val="300"/>
-              </a:spcAft>
-              <a:buNone/>
-            </a:pPr>
-            <a:r>
-              <a:rPr lang="en-US" sz="1200" i="1" dirty="0">
-                <a:solidFill>
-                  <a:srgbClr val="1C2833"/>
-                </a:solidFill>
-                <a:latin typeface="Arial" pitchFamily="34" charset="0"/>
-                <a:ea typeface="Arial" pitchFamily="34" charset="-122"/>
-                <a:cs typeface="Arial" pitchFamily="34" charset="-120"/>
-              </a:rPr>
-              <a:t>prāṇāyāmena tṛ-vṛtā prāṇendṛya-mano-malam śanair vyudasyābhidhyāyen manasā guruṇā gurum</a:t>
-            </a:r>
-            <a:pPr algn="l" indent="0" marL="0">
-              <a:lnSpc>
-                <a:spcPts val="1680"/>
-              </a:lnSpc>
-              <a:spcBef>
-                <a:spcPts val="300"/>
-              </a:spcBef>
-              <a:spcAft>
-                <a:spcPts val="300"/>
-              </a:spcAft>
-              <a:buNone/>
-            </a:pPr>
-            <a:r>
-              <a:rPr lang="en-US" sz="1200" dirty="0">
-                <a:solidFill>
-                  <a:srgbClr val="1C2833"/>
-                </a:solidFill>
-                <a:latin typeface="Arial" pitchFamily="34" charset="0"/>
-                <a:ea typeface="Arial" pitchFamily="34" charset="-122"/>
-                <a:cs typeface="Arial" pitchFamily="34" charset="-120"/>
-              </a:rPr>
-              <a:t>" &gt; "Through the threefold prāṇāyāma practice, one gradually purifies the breath, senses, and mind, and then meditates." &gt; — Śrīmad-Bhāgavatam 4.8.44</a:t>
-            </a:r>
-            <a:endParaRPr lang="en-US" sz="1200" dirty="0"/>
-          </a:p>
-        </p:txBody>
-      </p:sp>
-      <p:sp>
-        <p:nvSpPr>
-          <p:cNvPr id="12" name="Text 10"/>
-          <p:cNvSpPr/>
-          <p:nvPr/>
-        </p:nvSpPr>
-        <p:spPr>
-          <a:xfrm>
-            <a:off x="406301" y="4628704"/>
-            <a:ext cx="8498026" cy="213271"/>
-          </a:xfrm>
-          <a:prstGeom prst="rect">
-            <a:avLst/>
-          </a:prstGeom>
-          <a:noFill/>
-          <a:ln/>
-        </p:spPr>
-        <p:txBody>
-          <a:bodyPr wrap="square" lIns="0" tIns="0" rIns="0" bIns="0" rtlCol="0" anchor="t"/>
-          <a:lstStyle/>
-          <a:p>
-            <a:pPr algn="l" indent="0" marL="0">
-              <a:lnSpc>
-                <a:spcPts val="1680"/>
-              </a:lnSpc>
-              <a:spcBef>
-                <a:spcPts val="300"/>
-              </a:spcBef>
-              <a:spcAft>
-                <a:spcPts val="300"/>
-              </a:spcAft>
-              <a:buNone/>
-            </a:pPr>
-            <a:r>
-              <a:rPr lang="en-US" sz="1200" i="1" dirty="0">
-                <a:solidFill>
-                  <a:srgbClr val="1C2833"/>
-                </a:solidFill>
-                <a:latin typeface="Arial" pitchFamily="34" charset="0"/>
-                <a:ea typeface="Arial" pitchFamily="34" charset="-122"/>
-                <a:cs typeface="Arial" pitchFamily="34" charset="-120"/>
-              </a:rPr>
-              <a:t>"Notice the word </a:t>
-            </a:r>
-            <a:pPr algn="l" indent="0" marL="0">
-              <a:lnSpc>
-                <a:spcPts val="1680"/>
-              </a:lnSpc>
-              <a:spcBef>
-                <a:spcPts val="300"/>
-              </a:spcBef>
-              <a:spcAft>
-                <a:spcPts val="300"/>
-              </a:spcAft>
-              <a:buNone/>
-            </a:pPr>
-            <a:r>
-              <a:rPr lang="en-US" sz="1200" b="1" i="1" dirty="0">
-                <a:solidFill>
-                  <a:srgbClr val="1C2833"/>
-                </a:solidFill>
-                <a:latin typeface="Arial" pitchFamily="34" charset="0"/>
-                <a:ea typeface="Arial" pitchFamily="34" charset="-122"/>
-                <a:cs typeface="Arial" pitchFamily="34" charset="-120"/>
-              </a:rPr>
-              <a:t>gradually</a:t>
-            </a:r>
-            <a:pPr algn="l" indent="0" marL="0">
-              <a:lnSpc>
-                <a:spcPts val="1680"/>
-              </a:lnSpc>
-              <a:spcBef>
-                <a:spcPts val="300"/>
-              </a:spcBef>
-              <a:spcAft>
-                <a:spcPts val="300"/>
-              </a:spcAft>
-              <a:buNone/>
-            </a:pPr>
-            <a:r>
-              <a:rPr lang="en-US" sz="1200" i="1" dirty="0">
-                <a:solidFill>
-                  <a:srgbClr val="1C2833"/>
-                </a:solidFill>
-                <a:latin typeface="Arial" pitchFamily="34" charset="0"/>
-                <a:ea typeface="Arial" pitchFamily="34" charset="-122"/>
-                <a:cs typeface="Arial" pitchFamily="34" charset="-120"/>
-              </a:rPr>
-              <a:t> (śanair). The tradition is unambiguous: this is slow work."</a:t>
-            </a:r>
-            <a:endParaRPr lang="en-US" sz="1200" dirty="0"/>
-          </a:p>
-        </p:txBody>
-      </p:sp>
-      <p:sp>
-        <p:nvSpPr>
-          <p:cNvPr id="13" name="Text 11"/>
-          <p:cNvSpPr/>
-          <p:nvPr/>
-        </p:nvSpPr>
-        <p:spPr>
-          <a:xfrm>
-            <a:off x="406301" y="4994374"/>
+            <a:off x="406301" y="4434929"/>
             <a:ext cx="8498026" cy="213271"/>
           </a:xfrm>
           <a:prstGeom prst="rect">
@@ -6004,7 +7491,7 @@
                 <a:ea typeface="Georgia" pitchFamily="34" charset="-122"/>
                 <a:cs typeface="Georgia" pitchFamily="34" charset="-120"/>
               </a:rPr>
-              <a:t>Practice (20 min) — Two breath practices</a:t>
+              <a:t>Core (10 min) — What is prāṇāyāma?</a:t>
             </a:r>
             <a:endParaRPr lang="en-US" sz="1800" dirty="0"/>
           </a:p>
@@ -6018,8 +7505,8 @@
         </p:nvSpPr>
         <p:spPr>
           <a:xfrm>
-            <a:off x="406301" y="870942"/>
-            <a:ext cx="8498026" cy="639812"/>
+            <a:off x="634901" y="883593"/>
+            <a:ext cx="8102798" cy="281880"/>
           </a:xfrm>
           <a:prstGeom prst="rect">
             <a:avLst/>
@@ -6031,17 +7518,15 @@
           <a:bodyPr wrap="square" lIns="0" tIns="0" rIns="0" bIns="0" rtlCol="0" anchor="t"/>
           <a:lstStyle/>
           <a:p>
-            <a:pPr algn="l" indent="0" marL="0">
-              <a:lnSpc>
-                <a:spcPts val="1680"/>
-              </a:lnSpc>
-              <a:spcBef>
-                <a:spcPts val="300"/>
-              </a:spcBef>
-              <a:spcAft>
-                <a:spcPts val="300"/>
-              </a:spcAft>
-              <a:buNone/>
+            <a:pPr algn="l" marL="342900" indent="-342900">
+              <a:lnSpc>
+                <a:spcPts val="1620"/>
+              </a:lnSpc>
+              <a:spcAft>
+                <a:spcPts val="300"/>
+              </a:spcAft>
+              <a:buSzPct val="100000"/>
+              <a:buChar char="•"/>
             </a:pPr>
             <a:r>
               <a:rPr lang="en-US" sz="1200" b="1" dirty="0">
@@ -6052,15 +7537,12 @@
                 <a:ea typeface="Arial" pitchFamily="34" charset="-122"/>
                 <a:cs typeface="Arial" pitchFamily="34" charset="-120"/>
               </a:rPr>
-              <a:t>Practice 1 (5 min) — Natural-breath observation.</a:t>
-            </a:r>
-            <a:pPr algn="l" indent="0" marL="0">
-              <a:lnSpc>
-                <a:spcPts val="1680"/>
-              </a:lnSpc>
-              <a:spcBef>
-                <a:spcPts val="300"/>
-              </a:spcBef>
+              <a:t>Frame the limb</a:t>
+            </a:r>
+            <a:pPr algn="l" indent="0" marL="0">
+              <a:lnSpc>
+                <a:spcPts val="1620"/>
+              </a:lnSpc>
               <a:spcAft>
                 <a:spcPts val="300"/>
               </a:spcAft>
@@ -6075,7 +7557,7 @@
                 <a:ea typeface="Arial" pitchFamily="34" charset="-122"/>
                 <a:cs typeface="Arial" pitchFamily="34" charset="-120"/>
               </a:rPr>
-              <a:t> – Sukhāsana. Eyes closed (or lowered). – Breathe completely naturally. Don't change anything. – Observe: which nostril is more open? Is the breath deep or shallow? Even or uneven? – Just NOTICE. Don't fix. – Teacher rings a soft bell at 1 min, 3 min, 5 min.</a:t>
+              <a:t> (write on board):</a:t>
             </a:r>
             <a:endParaRPr lang="en-US" sz="1200" dirty="0"/>
           </a:p>
@@ -6089,13 +7571,66 @@
         </p:nvSpPr>
         <p:spPr>
           <a:xfrm>
-            <a:off x="406301" y="1586954"/>
-            <a:ext cx="8498026" cy="639812"/>
-          </a:xfrm>
-          <a:prstGeom prst="rect">
+            <a:off x="406301" y="1266974"/>
+            <a:ext cx="8331398" cy="842963"/>
+          </a:xfrm>
+          <a:prstGeom prst="rect">
+            <a:avLst/>
+          </a:prstGeom>
+          <a:solidFill>
+            <a:srgbClr val="F4F8F9"/>
+          </a:solidFill>
+          <a:ln/>
+        </p:spPr>
+        <p:txBody>
+          <a:bodyPr wrap="square" rtlCol="0" anchor="ctr"/>
+          <a:lstStyle/>
+          <a:p>
+            <a:pPr indent="0" marL="0">
+              <a:buNone/>
+            </a:pPr>
+            <a:endParaRPr lang="en-US" dirty="0"/>
+          </a:p>
+        </p:txBody>
+      </p:sp>
+      <p:sp>
+        <p:nvSpPr>
+          <p:cNvPr id="6" name="Shape 4"/>
+          <p:cNvSpPr/>
+          <p:nvPr/>
+        </p:nvSpPr>
+        <p:spPr>
+          <a:xfrm>
+            <a:off x="434876" y="1266974"/>
+            <a:ext cx="0" cy="842962"/>
+          </a:xfrm>
+          <a:prstGeom prst="line">
             <a:avLst/>
           </a:prstGeom>
           <a:noFill/>
+          <a:ln w="57150">
+            <a:solidFill>
+              <a:srgbClr val="FE4447"/>
+            </a:solidFill>
+            <a:prstDash val="solid"/>
+          </a:ln>
+        </p:spPr>
+      </p:sp>
+      <p:sp>
+        <p:nvSpPr>
+          <p:cNvPr id="7" name="Text 5"/>
+          <p:cNvSpPr/>
+          <p:nvPr/>
+        </p:nvSpPr>
+        <p:spPr>
+          <a:xfrm>
+            <a:off x="692051" y="1457474"/>
+            <a:ext cx="7973389" cy="461963"/>
+          </a:xfrm>
+          <a:prstGeom prst="rect">
+            <a:avLst/>
+          </a:prstGeom>
+          <a:noFill/>
           <a:ln/>
         </p:spPr>
         <p:txBody>
@@ -6104,7 +7639,7 @@
           <a:p>
             <a:pPr algn="l" indent="0" marL="0">
               <a:lnSpc>
-                <a:spcPts val="1680"/>
+                <a:spcPts val="1820"/>
               </a:lnSpc>
               <a:spcBef>
                 <a:spcPts val="300"/>
@@ -6115,19 +7650,19 @@
               <a:buNone/>
             </a:pPr>
             <a:r>
-              <a:rPr lang="en-US" sz="1200" b="1" dirty="0">
-                <a:solidFill>
-                  <a:srgbClr val="1C2833"/>
-                </a:solidFill>
-                <a:latin typeface="Arial" pitchFamily="34" charset="0"/>
-                <a:ea typeface="Arial" pitchFamily="34" charset="-122"/>
-                <a:cs typeface="Arial" pitchFamily="34" charset="-120"/>
-              </a:rPr>
-              <a:t>Practice 2 (5 min) — Counted breath.</a:t>
-            </a:r>
-            <a:pPr algn="l" indent="0" marL="0">
-              <a:lnSpc>
-                <a:spcPts val="1680"/>
+              <a:rPr lang="en-US" sz="1300" dirty="0">
+                <a:solidFill>
+                  <a:srgbClr val="1C2833"/>
+                </a:solidFill>
+                <a:latin typeface="Georgia" pitchFamily="34" charset="0"/>
+                <a:ea typeface="Georgia" pitchFamily="34" charset="-122"/>
+                <a:cs typeface="Georgia" pitchFamily="34" charset="-120"/>
+              </a:rPr>
+              <a:t>Prāṇāyāma — the 4th of the 8 limbs. Literally: </a:t>
+            </a:r>
+            <a:pPr algn="l" indent="0" marL="0">
+              <a:lnSpc>
+                <a:spcPts val="1820"/>
               </a:lnSpc>
               <a:spcBef>
                 <a:spcPts val="300"/>
@@ -6138,23 +7673,115 @@
               <a:buNone/>
             </a:pPr>
             <a:r>
-              <a:rPr lang="en-US" sz="1200" dirty="0">
-                <a:solidFill>
-                  <a:srgbClr val="1C2833"/>
-                </a:solidFill>
-                <a:latin typeface="Arial" pitchFamily="34" charset="0"/>
-                <a:ea typeface="Arial" pitchFamily="34" charset="-122"/>
-                <a:cs typeface="Arial" pitchFamily="34" charset="-120"/>
-              </a:rPr>
-              <a:t> – Inhale slowly to count of 4 (count silently in your head). – Exhale slowly to count of 4. – No holding at the top or bottom. Continuous. – 10 cycles = roughly 1 minute. Aim for 5 minutes (50 cycles). – If you lose count, restart at 1.</a:t>
-            </a:r>
-            <a:endParaRPr lang="en-US" sz="1200" dirty="0"/>
-          </a:p>
-        </p:txBody>
-      </p:sp>
-      <p:sp>
-        <p:nvSpPr>
-          <p:cNvPr id="6" name="Text 4"/>
+              <a:rPr lang="en-US" sz="1300" i="1" dirty="0">
+                <a:solidFill>
+                  <a:srgbClr val="1C2833"/>
+                </a:solidFill>
+                <a:latin typeface="Georgia" pitchFamily="34" charset="0"/>
+                <a:ea typeface="Georgia" pitchFamily="34" charset="-122"/>
+                <a:cs typeface="Georgia" pitchFamily="34" charset="-120"/>
+              </a:rPr>
+              <a:t>prāṇa</a:t>
+            </a:r>
+            <a:pPr algn="l" indent="0" marL="0">
+              <a:lnSpc>
+                <a:spcPts val="1820"/>
+              </a:lnSpc>
+              <a:spcBef>
+                <a:spcPts val="300"/>
+              </a:spcBef>
+              <a:spcAft>
+                <a:spcPts val="300"/>
+              </a:spcAft>
+              <a:buNone/>
+            </a:pPr>
+            <a:r>
+              <a:rPr lang="en-US" sz="1300" dirty="0">
+                <a:solidFill>
+                  <a:srgbClr val="1C2833"/>
+                </a:solidFill>
+                <a:latin typeface="Georgia" pitchFamily="34" charset="0"/>
+                <a:ea typeface="Georgia" pitchFamily="34" charset="-122"/>
+                <a:cs typeface="Georgia" pitchFamily="34" charset="-120"/>
+              </a:rPr>
+              <a:t> (breath) + </a:t>
+            </a:r>
+            <a:pPr algn="l" indent="0" marL="0">
+              <a:lnSpc>
+                <a:spcPts val="1820"/>
+              </a:lnSpc>
+              <a:spcBef>
+                <a:spcPts val="300"/>
+              </a:spcBef>
+              <a:spcAft>
+                <a:spcPts val="300"/>
+              </a:spcAft>
+              <a:buNone/>
+            </a:pPr>
+            <a:r>
+              <a:rPr lang="en-US" sz="1300" i="1" dirty="0">
+                <a:solidFill>
+                  <a:srgbClr val="1C2833"/>
+                </a:solidFill>
+                <a:latin typeface="Georgia" pitchFamily="34" charset="0"/>
+                <a:ea typeface="Georgia" pitchFamily="34" charset="-122"/>
+                <a:cs typeface="Georgia" pitchFamily="34" charset="-120"/>
+              </a:rPr>
+              <a:t>āyāma</a:t>
+            </a:r>
+            <a:pPr algn="l" indent="0" marL="0">
+              <a:lnSpc>
+                <a:spcPts val="1820"/>
+              </a:lnSpc>
+              <a:spcBef>
+                <a:spcPts val="300"/>
+              </a:spcBef>
+              <a:spcAft>
+                <a:spcPts val="300"/>
+              </a:spcAft>
+              <a:buNone/>
+            </a:pPr>
+            <a:r>
+              <a:rPr lang="en-US" sz="1300" dirty="0">
+                <a:solidFill>
+                  <a:srgbClr val="1C2833"/>
+                </a:solidFill>
+                <a:latin typeface="Georgia" pitchFamily="34" charset="0"/>
+                <a:ea typeface="Georgia" pitchFamily="34" charset="-122"/>
+                <a:cs typeface="Georgia" pitchFamily="34" charset="-120"/>
+              </a:rPr>
+              <a:t> (extension, regulation). Practical meaning: </a:t>
+            </a:r>
+            <a:pPr algn="l" indent="0" marL="0">
+              <a:lnSpc>
+                <a:spcPts val="1820"/>
+              </a:lnSpc>
+              <a:spcBef>
+                <a:spcPts val="300"/>
+              </a:spcBef>
+              <a:spcAft>
+                <a:spcPts val="300"/>
+              </a:spcAft>
+              <a:buNone/>
+            </a:pPr>
+            <a:r>
+              <a:rPr lang="en-US" sz="1300" i="1" dirty="0">
+                <a:solidFill>
+                  <a:srgbClr val="1C2833"/>
+                </a:solidFill>
+                <a:latin typeface="Georgia" pitchFamily="34" charset="0"/>
+                <a:ea typeface="Georgia" pitchFamily="34" charset="-122"/>
+                <a:cs typeface="Georgia" pitchFamily="34" charset="-120"/>
+              </a:rPr>
+              <a:t>intentional breath observation and regulation, NOT forceful breath holding.</a:t>
+            </a:r>
+            <a:endParaRPr lang="en-US" sz="1300" dirty="0"/>
+          </a:p>
+        </p:txBody>
+      </p:sp>
+      <p:sp>
+        <p:nvSpPr>
+          <p:cNvPr id="8" name="Text 6"/>
           <p:cNvSpPr/>
           <p:nvPr/>
         </p:nvSpPr>
@@ -6304,7 +7931,7 @@
                 <a:ea typeface="Georgia" pitchFamily="34" charset="-122"/>
                 <a:cs typeface="Georgia" pitchFamily="34" charset="-120"/>
               </a:rPr>
-              <a:t>Reflection (8 min)</a:t>
+              <a:t>Core (10 min) — What is prāṇāyāma? (cont.)</a:t>
             </a:r>
             <a:endParaRPr lang="en-US" sz="1800" dirty="0"/>
           </a:p>
@@ -6318,8 +7945,8 @@
         </p:nvSpPr>
         <p:spPr>
           <a:xfrm>
-            <a:off x="406301" y="870942"/>
-            <a:ext cx="8498026" cy="436066"/>
+            <a:off x="634901" y="883593"/>
+            <a:ext cx="8102798" cy="281880"/>
           </a:xfrm>
           <a:prstGeom prst="rect">
             <a:avLst/>
@@ -6331,20 +7958,18 @@
           <a:bodyPr wrap="square" lIns="0" tIns="0" rIns="0" bIns="0" rtlCol="0" anchor="t"/>
           <a:lstStyle/>
           <a:p>
-            <a:pPr algn="l" indent="0" marL="0">
-              <a:lnSpc>
-                <a:spcPts val="1680"/>
-              </a:lnSpc>
-              <a:spcBef>
-                <a:spcPts val="300"/>
-              </a:spcBef>
-              <a:spcAft>
-                <a:spcPts val="300"/>
-              </a:spcAft>
-              <a:buNone/>
-            </a:pPr>
-            <a:r>
-              <a:rPr lang="en-US" sz="1200" dirty="0">
+            <a:pPr algn="l" marL="342900" indent="-342900">
+              <a:lnSpc>
+                <a:spcPts val="1620"/>
+              </a:lnSpc>
+              <a:spcAft>
+                <a:spcPts val="300"/>
+              </a:spcAft>
+              <a:buSzPct val="100000"/>
+              <a:buChar char="•"/>
+            </a:pPr>
+            <a:r>
+              <a:rPr lang="en-US" sz="1200" b="1" dirty="0">
                 <a:solidFill>
                   <a:srgbClr val="1C2833"/>
                 </a:solidFill>
@@ -6352,19 +7977,42 @@
                 <a:ea typeface="Arial" pitchFamily="34" charset="-122"/>
                 <a:cs typeface="Arial" pitchFamily="34" charset="-120"/>
               </a:rPr>
-              <a:t>– Worksheet </a:t>
-            </a:r>
-            <a:pPr algn="l" indent="0" marL="0">
-              <a:lnSpc>
-                <a:spcPts val="1680"/>
-              </a:lnSpc>
-              <a:spcBef>
-                <a:spcPts val="300"/>
-              </a:spcBef>
-              <a:spcAft>
-                <a:spcPts val="300"/>
-              </a:spcAft>
-              <a:buNone/>
+              <a:t>What we DO at this level:</a:t>
+            </a:r>
+            <a:endParaRPr lang="en-US" sz="1200" dirty="0"/>
+          </a:p>
+        </p:txBody>
+      </p:sp>
+      <p:sp>
+        <p:nvSpPr>
+          <p:cNvPr id="5" name="Text 3"/>
+          <p:cNvSpPr/>
+          <p:nvPr/>
+        </p:nvSpPr>
+        <p:spPr>
+          <a:xfrm>
+            <a:off x="634901" y="1266974"/>
+            <a:ext cx="8102798" cy="769441"/>
+          </a:xfrm>
+          <a:prstGeom prst="rect">
+            <a:avLst/>
+          </a:prstGeom>
+          <a:noFill/>
+          <a:ln/>
+        </p:spPr>
+        <p:txBody>
+          <a:bodyPr wrap="square" lIns="0" tIns="0" rIns="0" bIns="0" rtlCol="0" anchor="t"/>
+          <a:lstStyle/>
+          <a:p>
+            <a:pPr algn="l" marL="342900" indent="-342900">
+              <a:lnSpc>
+                <a:spcPts val="1620"/>
+              </a:lnSpc>
+              <a:spcAft>
+                <a:spcPts val="300"/>
+              </a:spcAft>
+              <a:buSzPct val="100000"/>
+              <a:buChar char="•"/>
             </a:pPr>
             <a:r>
               <a:rPr lang="en-US" sz="1200" dirty="0">
@@ -6375,19 +8023,20 @@
                 <a:ea typeface="Arial" pitchFamily="34" charset="-122"/>
                 <a:cs typeface="Arial" pitchFamily="34" charset="-120"/>
               </a:rPr>
-              <a:t>activities/activity-02-breath-observation.md</a:t>
-            </a:r>
-            <a:pPr algn="l" indent="0" marL="0">
-              <a:lnSpc>
-                <a:spcPts val="1680"/>
-              </a:lnSpc>
-              <a:spcBef>
-                <a:spcPts val="300"/>
-              </a:spcBef>
-              <a:spcAft>
-                <a:spcPts val="300"/>
-              </a:spcAft>
-              <a:buNone/>
+              <a:t>Observe natural breath without changing it.</a:t>
+            </a:r>
+            <a:endParaRPr lang="en-US" sz="1200" dirty="0"/>
+          </a:p>
+          <a:p>
+            <a:pPr algn="l" marL="342900" indent="-342900">
+              <a:lnSpc>
+                <a:spcPts val="1620"/>
+              </a:lnSpc>
+              <a:spcAft>
+                <a:spcPts val="300"/>
+              </a:spcAft>
+              <a:buSzPct val="100000"/>
+              <a:buChar char="•"/>
             </a:pPr>
             <a:r>
               <a:rPr lang="en-US" sz="1200" dirty="0">
@@ -6398,15 +8047,39 @@
                 <a:ea typeface="Arial" pitchFamily="34" charset="-122"/>
                 <a:cs typeface="Arial" pitchFamily="34" charset="-120"/>
               </a:rPr>
-              <a:t>. – Students write briefly: – Before the practice, my mind felt: ____ – After the practice, my mind felt: ____ – One thing I noticed about my breath: ____</a:t>
+              <a:t>Count breaths (in for 4, out for 4).</a:t>
             </a:r>
             <a:endParaRPr lang="en-US" sz="1200" dirty="0"/>
           </a:p>
-        </p:txBody>
-      </p:sp>
-      <p:sp>
-        <p:nvSpPr>
-          <p:cNvPr id="5" name="Text 3"/>
+          <a:p>
+            <a:pPr algn="l" marL="342900" indent="-342900">
+              <a:lnSpc>
+                <a:spcPts val="1620"/>
+              </a:lnSpc>
+              <a:spcAft>
+                <a:spcPts val="300"/>
+              </a:spcAft>
+              <a:buSzPct val="100000"/>
+              <a:buChar char="•"/>
+            </a:pPr>
+            <a:r>
+              <a:rPr lang="en-US" sz="1200" dirty="0">
+                <a:solidFill>
+                  <a:srgbClr val="1C2833"/>
+                </a:solidFill>
+                <a:latin typeface="Arial" pitchFamily="34" charset="0"/>
+                <a:ea typeface="Arial" pitchFamily="34" charset="-122"/>
+                <a:cs typeface="Arial" pitchFamily="34" charset="-120"/>
+              </a:rPr>
+              <a:t>Notice the gap between inhale and exhale.</a:t>
+            </a:r>
+            <a:endParaRPr lang="en-US" sz="1200" dirty="0"/>
+          </a:p>
+        </p:txBody>
+      </p:sp>
+      <p:sp>
+        <p:nvSpPr>
+          <p:cNvPr id="6" name="Text 4"/>
           <p:cNvSpPr/>
           <p:nvPr/>
         </p:nvSpPr>
@@ -6556,7 +8229,7 @@
                 <a:ea typeface="Georgia" pitchFamily="34" charset="-122"/>
                 <a:cs typeface="Georgia" pitchFamily="34" charset="-120"/>
               </a:rPr>
-              <a:t>Wrap-up (5 min)</a:t>
+              <a:t>Core (10 min) — What is prāṇāyāma? (cont.)</a:t>
             </a:r>
             <a:endParaRPr lang="en-US" sz="1800" dirty="0"/>
           </a:p>
@@ -6570,8 +8243,8 @@
         </p:nvSpPr>
         <p:spPr>
           <a:xfrm>
-            <a:off x="406301" y="870942"/>
-            <a:ext cx="8498026" cy="639812"/>
+            <a:off x="634901" y="883593"/>
+            <a:ext cx="8102798" cy="281880"/>
           </a:xfrm>
           <a:prstGeom prst="rect">
             <a:avLst/>
@@ -6583,20 +8256,18 @@
           <a:bodyPr wrap="square" lIns="0" tIns="0" rIns="0" bIns="0" rtlCol="0" anchor="t"/>
           <a:lstStyle/>
           <a:p>
-            <a:pPr algn="l" indent="0" marL="0">
-              <a:lnSpc>
-                <a:spcPts val="1680"/>
-              </a:lnSpc>
-              <a:spcBef>
-                <a:spcPts val="300"/>
-              </a:spcBef>
-              <a:spcAft>
-                <a:spcPts val="300"/>
-              </a:spcAft>
-              <a:buNone/>
-            </a:pPr>
-            <a:r>
-              <a:rPr lang="en-US" sz="1200" dirty="0">
+            <a:pPr algn="l" marL="342900" indent="-342900">
+              <a:lnSpc>
+                <a:spcPts val="1620"/>
+              </a:lnSpc>
+              <a:spcAft>
+                <a:spcPts val="300"/>
+              </a:spcAft>
+              <a:buSzPct val="100000"/>
+              <a:buChar char="•"/>
+            </a:pPr>
+            <a:r>
+              <a:rPr lang="en-US" sz="1200" b="1" dirty="0">
                 <a:solidFill>
                   <a:srgbClr val="1C2833"/>
                 </a:solidFill>
@@ -6604,22 +8275,19 @@
                 <a:ea typeface="Arial" pitchFamily="34" charset="-122"/>
                 <a:cs typeface="Arial" pitchFamily="34" charset="-120"/>
               </a:rPr>
-              <a:t>– 3 student shares: one sentence each on "what I noticed." – Note: </a:t>
-            </a:r>
-            <a:pPr algn="l" indent="0" marL="0">
-              <a:lnSpc>
-                <a:spcPts val="1680"/>
-              </a:lnSpc>
-              <a:spcBef>
-                <a:spcPts val="300"/>
-              </a:spcBef>
-              <a:spcAft>
-                <a:spcPts val="300"/>
-              </a:spcAft>
-              <a:buNone/>
-            </a:pPr>
-            <a:r>
-              <a:rPr lang="en-US" sz="1200" i="1" dirty="0">
+              <a:t>What we DO NOT do at this level</a:t>
+            </a:r>
+            <a:pPr algn="l" indent="0" marL="0">
+              <a:lnSpc>
+                <a:spcPts val="1620"/>
+              </a:lnSpc>
+              <a:spcAft>
+                <a:spcPts val="300"/>
+              </a:spcAft>
+              <a:buNone/>
+            </a:pPr>
+            <a:r>
+              <a:rPr lang="en-US" sz="1200" dirty="0">
                 <a:solidFill>
                   <a:srgbClr val="1C2833"/>
                 </a:solidFill>
@@ -6627,11 +8295,89 @@
                 <a:ea typeface="Arial" pitchFamily="34" charset="-122"/>
                 <a:cs typeface="Arial" pitchFamily="34" charset="-120"/>
               </a:rPr>
-              <a:t>"A common report — the mind is busier than we thought. Noticing that IS the practice."</a:t>
-            </a:r>
-            <a:pPr algn="l" indent="0" marL="0">
-              <a:lnSpc>
-                <a:spcPts val="1680"/>
+              <a:t> (write on board, large):</a:t>
+            </a:r>
+            <a:endParaRPr lang="en-US" sz="1200" dirty="0"/>
+          </a:p>
+        </p:txBody>
+      </p:sp>
+      <p:sp>
+        <p:nvSpPr>
+          <p:cNvPr id="5" name="Text 3"/>
+          <p:cNvSpPr/>
+          <p:nvPr/>
+        </p:nvSpPr>
+        <p:spPr>
+          <a:xfrm>
+            <a:off x="406301" y="1266974"/>
+            <a:ext cx="8331398" cy="1112044"/>
+          </a:xfrm>
+          <a:prstGeom prst="rect">
+            <a:avLst/>
+          </a:prstGeom>
+          <a:solidFill>
+            <a:srgbClr val="F4F8F9"/>
+          </a:solidFill>
+          <a:ln/>
+        </p:spPr>
+        <p:txBody>
+          <a:bodyPr wrap="square" rtlCol="0" anchor="ctr"/>
+          <a:lstStyle/>
+          <a:p>
+            <a:pPr indent="0" marL="0">
+              <a:buNone/>
+            </a:pPr>
+            <a:endParaRPr lang="en-US" dirty="0"/>
+          </a:p>
+        </p:txBody>
+      </p:sp>
+      <p:sp>
+        <p:nvSpPr>
+          <p:cNvPr id="6" name="Shape 4"/>
+          <p:cNvSpPr/>
+          <p:nvPr/>
+        </p:nvSpPr>
+        <p:spPr>
+          <a:xfrm>
+            <a:off x="434876" y="1266974"/>
+            <a:ext cx="0" cy="1112044"/>
+          </a:xfrm>
+          <a:prstGeom prst="line">
+            <a:avLst/>
+          </a:prstGeom>
+          <a:noFill/>
+          <a:ln w="57150">
+            <a:solidFill>
+              <a:srgbClr val="FE4447"/>
+            </a:solidFill>
+            <a:prstDash val="solid"/>
+          </a:ln>
+        </p:spPr>
+      </p:sp>
+      <p:sp>
+        <p:nvSpPr>
+          <p:cNvPr id="7" name="Text 5"/>
+          <p:cNvSpPr/>
+          <p:nvPr/>
+        </p:nvSpPr>
+        <p:spPr>
+          <a:xfrm>
+            <a:off x="692051" y="1457474"/>
+            <a:ext cx="7973389" cy="461963"/>
+          </a:xfrm>
+          <a:prstGeom prst="rect">
+            <a:avLst/>
+          </a:prstGeom>
+          <a:noFill/>
+          <a:ln/>
+        </p:spPr>
+        <p:txBody>
+          <a:bodyPr wrap="square" lIns="0" tIns="0" rIns="0" bIns="0" rtlCol="0" anchor="t"/>
+          <a:lstStyle/>
+          <a:p>
+            <a:pPr algn="l" indent="0" marL="0">
+              <a:lnSpc>
+                <a:spcPts val="1820"/>
               </a:lnSpc>
               <a:spcBef>
                 <a:spcPts val="300"/>
@@ -6642,7 +8388,101 @@
               <a:buNone/>
             </a:pPr>
             <a:r>
-              <a:rPr lang="en-US" sz="1200" dirty="0">
+              <a:rPr lang="en-US" sz="1300" b="1" i="1" dirty="0">
+                <a:solidFill>
+                  <a:srgbClr val="1C2833"/>
+                </a:solidFill>
+                <a:latin typeface="Georgia" pitchFamily="34" charset="0"/>
+                <a:ea typeface="Georgia" pitchFamily="34" charset="-122"/>
+                <a:cs typeface="Georgia" pitchFamily="34" charset="-120"/>
+              </a:rPr>
+              <a:t>No breath retention. No forceful breathing. No bellows breath (bhastrikā). No skull shining (kapālabhāti).</a:t>
+            </a:r>
+            <a:endParaRPr lang="en-US" sz="1300" dirty="0"/>
+          </a:p>
+        </p:txBody>
+      </p:sp>
+      <p:sp>
+        <p:nvSpPr>
+          <p:cNvPr id="8" name="Text 6"/>
+          <p:cNvSpPr/>
+          <p:nvPr/>
+        </p:nvSpPr>
+        <p:spPr>
+          <a:xfrm>
+            <a:off x="692051" y="1957536"/>
+            <a:ext cx="7973389" cy="230981"/>
+          </a:xfrm>
+          <a:prstGeom prst="rect">
+            <a:avLst/>
+          </a:prstGeom>
+          <a:noFill/>
+          <a:ln/>
+        </p:spPr>
+        <p:txBody>
+          <a:bodyPr wrap="square" lIns="0" tIns="0" rIns="0" bIns="0" rtlCol="0" anchor="t"/>
+          <a:lstStyle/>
+          <a:p>
+            <a:pPr algn="l" indent="0" marL="0">
+              <a:lnSpc>
+                <a:spcPts val="1820"/>
+              </a:lnSpc>
+              <a:spcBef>
+                <a:spcPts val="300"/>
+              </a:spcBef>
+              <a:spcAft>
+                <a:spcPts val="300"/>
+              </a:spcAft>
+              <a:buNone/>
+            </a:pPr>
+            <a:r>
+              <a:rPr lang="en-US" sz="1300" i="1" dirty="0">
+                <a:solidFill>
+                  <a:srgbClr val="1C2833"/>
+                </a:solidFill>
+                <a:latin typeface="Georgia" pitchFamily="34" charset="0"/>
+                <a:ea typeface="Georgia" pitchFamily="34" charset="-122"/>
+                <a:cs typeface="Georgia" pitchFamily="34" charset="-120"/>
+              </a:rPr>
+              <a:t>These advanced techniques require a certified yoga teacher. We're not doing them here.</a:t>
+            </a:r>
+            <a:endParaRPr lang="en-US" sz="1300" dirty="0"/>
+          </a:p>
+        </p:txBody>
+      </p:sp>
+      <p:sp>
+        <p:nvSpPr>
+          <p:cNvPr id="9" name="Text 7"/>
+          <p:cNvSpPr/>
+          <p:nvPr/>
+        </p:nvSpPr>
+        <p:spPr>
+          <a:xfrm>
+            <a:off x="634901" y="2480518"/>
+            <a:ext cx="8102798" cy="281880"/>
+          </a:xfrm>
+          <a:prstGeom prst="rect">
+            <a:avLst/>
+          </a:prstGeom>
+          <a:noFill/>
+          <a:ln/>
+        </p:spPr>
+        <p:txBody>
+          <a:bodyPr wrap="square" lIns="0" tIns="0" rIns="0" bIns="0" rtlCol="0" anchor="t"/>
+          <a:lstStyle/>
+          <a:p>
+            <a:pPr algn="l" marL="342900" indent="-342900">
+              <a:lnSpc>
+                <a:spcPts val="1620"/>
+              </a:lnSpc>
+              <a:spcAft>
+                <a:spcPts val="300"/>
+              </a:spcAft>
+              <a:buSzPct val="100000"/>
+              <a:buChar char="•"/>
+            </a:pPr>
+            <a:r>
+              <a:rPr lang="en-US" sz="1200" b="1" dirty="0">
                 <a:solidFill>
                   <a:srgbClr val="1C2833"/>
                 </a:solidFill>
@@ -6650,22 +8490,19 @@
                 <a:ea typeface="Arial" pitchFamily="34" charset="-122"/>
                 <a:cs typeface="Arial" pitchFamily="34" charset="-120"/>
               </a:rPr>
-              <a:t> – Preview Day 7: </a:t>
-            </a:r>
-            <a:pPr algn="l" indent="0" marL="0">
-              <a:lnSpc>
-                <a:spcPts val="1680"/>
-              </a:lnSpc>
-              <a:spcBef>
-                <a:spcPts val="300"/>
-              </a:spcBef>
-              <a:spcAft>
-                <a:spcPts val="300"/>
-              </a:spcAft>
-              <a:buNone/>
-            </a:pPr>
-            <a:r>
-              <a:rPr lang="en-US" sz="1200" i="1" dirty="0">
+              <a:t>Source</a:t>
+            </a:r>
+            <a:pPr algn="l" indent="0" marL="0">
+              <a:lnSpc>
+                <a:spcPts val="1620"/>
+              </a:lnSpc>
+              <a:spcAft>
+                <a:spcPts val="300"/>
+              </a:spcAft>
+              <a:buNone/>
+            </a:pPr>
+            <a:r>
+              <a:rPr lang="en-US" sz="1200" dirty="0">
                 <a:solidFill>
                   <a:srgbClr val="1C2833"/>
                 </a:solidFill>
@@ -6673,7 +8510,7 @@
                 <a:ea typeface="Arial" pitchFamily="34" charset="-122"/>
                 <a:cs typeface="Arial" pitchFamily="34" charset="-120"/>
               </a:rPr>
-              <a:t>"Tomorrow — why does this work? We'll look at the autonomic nervous system."</a:t>
+              <a:t> (read aloud, don't memorise):</a:t>
             </a:r>
             <a:endParaRPr lang="en-US" sz="1200" dirty="0"/>
           </a:p>
@@ -6681,7 +8518,7 @@
       </p:sp>
       <p:sp>
         <p:nvSpPr>
-          <p:cNvPr id="5" name="Text 3"/>
+          <p:cNvPr id="10" name="Text 8"/>
           <p:cNvSpPr/>
           <p:nvPr/>
         </p:nvSpPr>
